--- a/AI漫剧制作课程/PPT课件/模块14-工业化生产.pptx
+++ b/AI漫剧制作课程/PPT课件/模块14-工业化生产.pptx
@@ -3095,7 +3095,7 @@
     <p:bg>
       <p:bgPr>
         <a:solidFill>
-          <a:srgbClr val="0B1120"/>
+          <a:srgbClr val="0A0E1A"/>
         </a:solidFill>
         <a:effectLst/>
       </p:bgPr>
@@ -3116,7 +3116,7 @@
         <p:spPr>
           <a:xfrm>
             <a:off x="0" y="0"/>
-            <a:ext cx="5029200" cy="6858000"/>
+            <a:ext cx="4754880" cy="6858000"/>
           </a:xfrm>
           <a:prstGeom prst="rect">
             <a:avLst/>
@@ -3159,13 +3159,13 @@
         <p:spPr>
           <a:xfrm>
             <a:off x="0" y="0"/>
-            <a:ext cx="5029200" cy="109728"/>
-          </a:xfrm>
-          <a:prstGeom prst="rect">
-            <a:avLst/>
-          </a:prstGeom>
-          <a:solidFill>
-            <a:srgbClr val="FFFFFF"/>
+            <a:ext cx="4754880" cy="25400"/>
+          </a:xfrm>
+          <a:prstGeom prst="rect">
+            <a:avLst/>
+          </a:prstGeom>
+          <a:solidFill>
+            <a:srgbClr val="F0F4FC"/>
           </a:solidFill>
           <a:ln>
             <a:noFill/>
@@ -3202,13 +3202,13 @@
         <p:spPr>
           <a:xfrm>
             <a:off x="0" y="0"/>
-            <a:ext cx="109728" cy="6858000"/>
-          </a:xfrm>
-          <a:prstGeom prst="rect">
-            <a:avLst/>
-          </a:prstGeom>
-          <a:solidFill>
-            <a:srgbClr val="FFFFFF"/>
+            <a:ext cx="25400" cy="6858000"/>
+          </a:xfrm>
+          <a:prstGeom prst="rect">
+            <a:avLst/>
+          </a:prstGeom>
+          <a:solidFill>
+            <a:srgbClr val="F0F4FC"/>
           </a:solidFill>
           <a:ln>
             <a:noFill/>
@@ -3244,8 +3244,8 @@
         </p:nvSpPr>
         <p:spPr>
           <a:xfrm>
-            <a:off x="457200" y="1371600"/>
-            <a:ext cx="4114800" cy="2286000"/>
+            <a:off x="548640" y="1097280"/>
+            <a:ext cx="3657600" cy="2560320"/>
           </a:xfrm>
           <a:prstGeom prst="rect">
             <a:avLst/>
@@ -3259,9 +3259,9 @@
           <a:lstStyle/>
           <a:p>
             <a:pPr algn="l">
-              <a:defRPr sz="14000" b="1">
+              <a:defRPr sz="12000" b="1">
                 <a:solidFill>
-                  <a:srgbClr val="FFFFFF"/>
+                  <a:srgbClr val="F0F4FC"/>
                 </a:solidFill>
                 <a:latin typeface="Microsoft YaHei"/>
               </a:defRPr>
@@ -3280,8 +3280,8 @@
         </p:nvSpPr>
         <p:spPr>
           <a:xfrm>
-            <a:off x="548640" y="3657600"/>
-            <a:ext cx="3657600" cy="457200"/>
+            <a:off x="640080" y="3474720"/>
+            <a:ext cx="2743200" cy="365760"/>
           </a:xfrm>
           <a:prstGeom prst="rect">
             <a:avLst/>
@@ -3295,9 +3295,9 @@
           <a:lstStyle/>
           <a:p>
             <a:pPr algn="l">
-              <a:defRPr sz="1400" b="0">
+              <a:defRPr sz="1200" b="0">
                 <a:solidFill>
-                  <a:srgbClr val="FFFFFF"/>
+                  <a:srgbClr val="F0F4FC"/>
                 </a:solidFill>
                 <a:latin typeface="Microsoft YaHei"/>
               </a:defRPr>
@@ -3310,20 +3310,20 @@
       </p:sp>
       <p:sp>
         <p:nvSpPr>
-          <p:cNvPr id="7" name="Rounded Rectangle 6"/>
-          <p:cNvSpPr/>
-          <p:nvPr/>
-        </p:nvSpPr>
-        <p:spPr>
-          <a:xfrm>
-            <a:off x="5669280" y="1371600"/>
-            <a:ext cx="5943600" cy="457200"/>
-          </a:xfrm>
-          <a:prstGeom prst="roundRect">
-            <a:avLst/>
-          </a:prstGeom>
-          <a:solidFill>
-            <a:srgbClr val="F59E0B"/>
+          <p:cNvPr id="7" name="Rectangle 6"/>
+          <p:cNvSpPr/>
+          <p:nvPr/>
+        </p:nvSpPr>
+        <p:spPr>
+          <a:xfrm>
+            <a:off x="640080" y="3931920"/>
+            <a:ext cx="1371600" cy="19050"/>
+          </a:xfrm>
+          <a:prstGeom prst="rect">
+            <a:avLst/>
+          </a:prstGeom>
+          <a:solidFill>
+            <a:srgbClr val="F0F4FC"/>
           </a:solidFill>
           <a:ln>
             <a:noFill/>
@@ -3353,14 +3353,57 @@
       </p:sp>
       <p:sp>
         <p:nvSpPr>
-          <p:cNvPr id="8" name="TextBox 7"/>
+          <p:cNvPr id="8" name="Rounded Rectangle 7"/>
+          <p:cNvSpPr/>
+          <p:nvPr/>
+        </p:nvSpPr>
+        <p:spPr>
+          <a:xfrm>
+            <a:off x="5486400" y="1371600"/>
+            <a:ext cx="5943600" cy="411480"/>
+          </a:xfrm>
+          <a:prstGeom prst="roundRect">
+            <a:avLst/>
+          </a:prstGeom>
+          <a:solidFill>
+            <a:srgbClr val="F59E0B"/>
+          </a:solidFill>
+          <a:ln>
+            <a:noFill/>
+          </a:ln>
+        </p:spPr>
+        <p:style>
+          <a:lnRef idx="1">
+            <a:schemeClr val="accent1"/>
+          </a:lnRef>
+          <a:fillRef idx="3">
+            <a:schemeClr val="accent1"/>
+          </a:fillRef>
+          <a:effectRef idx="2">
+            <a:schemeClr val="accent1"/>
+          </a:effectRef>
+          <a:fontRef idx="minor">
+            <a:schemeClr val="lt1"/>
+          </a:fontRef>
+        </p:style>
+        <p:txBody>
+          <a:bodyPr rtlCol="0" anchor="ctr"/>
+          <a:lstStyle/>
+          <a:p>
+            <a:pPr algn="ctr"/>
+          </a:p>
+        </p:txBody>
+      </p:sp>
+      <p:sp>
+        <p:nvSpPr>
+          <p:cNvPr id="9" name="TextBox 8"/>
           <p:cNvSpPr txBox="1"/>
           <p:nvPr/>
         </p:nvSpPr>
         <p:spPr>
           <a:xfrm>
-            <a:off x="5852160" y="1371600"/>
-            <a:ext cx="5486400" cy="457200"/>
+            <a:off x="5669280" y="1371600"/>
+            <a:ext cx="5577840" cy="411480"/>
           </a:xfrm>
           <a:prstGeom prst="rect">
             <a:avLst/>
@@ -3374,9 +3417,9 @@
           <a:lstStyle/>
           <a:p>
             <a:pPr algn="ctr">
-              <a:defRPr sz="1200" b="0">
+              <a:defRPr sz="1100" b="0">
                 <a:solidFill>
-                  <a:srgbClr val="FFFFFF"/>
+                  <a:srgbClr val="F0F4FC"/>
                 </a:solidFill>
                 <a:latin typeface="Microsoft YaHei"/>
               </a:defRPr>
@@ -3389,14 +3432,14 @@
       </p:sp>
       <p:sp>
         <p:nvSpPr>
-          <p:cNvPr id="9" name="TextBox 8"/>
+          <p:cNvPr id="10" name="TextBox 9"/>
           <p:cNvSpPr txBox="1"/>
           <p:nvPr/>
         </p:nvSpPr>
         <p:spPr>
           <a:xfrm>
-            <a:off x="5669280" y="2286000"/>
-            <a:ext cx="5943600" cy="1645920"/>
+            <a:off x="5486400" y="2377440"/>
+            <a:ext cx="5943600" cy="1463040"/>
           </a:xfrm>
           <a:prstGeom prst="rect">
             <a:avLst/>
@@ -3410,9 +3453,9 @@
           <a:lstStyle/>
           <a:p>
             <a:pPr algn="l">
-              <a:defRPr sz="3600" b="1">
+              <a:defRPr sz="4400" b="1">
                 <a:solidFill>
-                  <a:srgbClr val="FFFFFF"/>
+                  <a:srgbClr val="F0F4FC"/>
                 </a:solidFill>
                 <a:latin typeface="Microsoft YaHei"/>
               </a:defRPr>
@@ -3425,14 +3468,14 @@
       </p:sp>
       <p:sp>
         <p:nvSpPr>
-          <p:cNvPr id="10" name="Rectangle 9"/>
-          <p:cNvSpPr/>
-          <p:nvPr/>
-        </p:nvSpPr>
-        <p:spPr>
-          <a:xfrm>
-            <a:off x="5669280" y="4023360"/>
-            <a:ext cx="2743200" cy="38100"/>
+          <p:cNvPr id="11" name="Rectangle 10"/>
+          <p:cNvSpPr/>
+          <p:nvPr/>
+        </p:nvSpPr>
+        <p:spPr>
+          <a:xfrm>
+            <a:off x="5486400" y="4023360"/>
+            <a:ext cx="2286000" cy="38100"/>
           </a:xfrm>
           <a:prstGeom prst="rect">
             <a:avLst/>
@@ -3468,14 +3511,14 @@
       </p:sp>
       <p:sp>
         <p:nvSpPr>
-          <p:cNvPr id="11" name="TextBox 10"/>
+          <p:cNvPr id="12" name="TextBox 11"/>
           <p:cNvSpPr txBox="1"/>
           <p:nvPr/>
         </p:nvSpPr>
         <p:spPr>
           <a:xfrm>
-            <a:off x="5669280" y="4389120"/>
-            <a:ext cx="5943600" cy="914400"/>
+            <a:off x="5486400" y="4389120"/>
+            <a:ext cx="5943600" cy="731520"/>
           </a:xfrm>
           <a:prstGeom prst="rect">
             <a:avLst/>
@@ -3489,9 +3532,9 @@
           <a:lstStyle/>
           <a:p>
             <a:pPr algn="l">
-              <a:defRPr sz="1800" b="0">
+              <a:defRPr sz="1600" b="0">
                 <a:solidFill>
-                  <a:srgbClr val="CBD5E8"/>
+                  <a:srgbClr val="A0AEC4"/>
                 </a:solidFill>
                 <a:latin typeface="Microsoft YaHei"/>
               </a:defRPr>
@@ -3504,20 +3547,20 @@
       </p:sp>
       <p:sp>
         <p:nvSpPr>
-          <p:cNvPr id="12" name="Rectangle 11"/>
-          <p:cNvSpPr/>
-          <p:nvPr/>
-        </p:nvSpPr>
-        <p:spPr>
-          <a:xfrm>
-            <a:off x="5669280" y="5669280"/>
-            <a:ext cx="5943600" cy="640080"/>
-          </a:xfrm>
-          <a:prstGeom prst="rect">
-            <a:avLst/>
-          </a:prstGeom>
-          <a:solidFill>
-            <a:srgbClr val="141E33"/>
+          <p:cNvPr id="13" name="Rectangle 12"/>
+          <p:cNvSpPr/>
+          <p:nvPr/>
+        </p:nvSpPr>
+        <p:spPr>
+          <a:xfrm>
+            <a:off x="5486400" y="5486400"/>
+            <a:ext cx="5943600" cy="594360"/>
+          </a:xfrm>
+          <a:prstGeom prst="rect">
+            <a:avLst/>
+          </a:prstGeom>
+          <a:solidFill>
+            <a:srgbClr val="161F35"/>
           </a:solidFill>
           <a:ln>
             <a:noFill/>
@@ -3547,14 +3590,14 @@
       </p:sp>
       <p:sp>
         <p:nvSpPr>
-          <p:cNvPr id="13" name="TextBox 12"/>
+          <p:cNvPr id="14" name="TextBox 13"/>
           <p:cNvSpPr txBox="1"/>
           <p:nvPr/>
         </p:nvSpPr>
         <p:spPr>
           <a:xfrm>
-            <a:off x="5852160" y="5715000"/>
-            <a:ext cx="1371600" cy="548640"/>
+            <a:off x="5669280" y="5532120"/>
+            <a:ext cx="1280160" cy="502920"/>
           </a:xfrm>
           <a:prstGeom prst="rect">
             <a:avLst/>
@@ -3568,7 +3611,7 @@
           <a:lstStyle/>
           <a:p>
             <a:pPr algn="ctr">
-              <a:defRPr sz="1200" b="1">
+              <a:defRPr sz="1100" b="1">
                 <a:solidFill>
                   <a:srgbClr val="F59E0B"/>
                 </a:solidFill>
@@ -3583,14 +3626,14 @@
       </p:sp>
       <p:sp>
         <p:nvSpPr>
-          <p:cNvPr id="14" name="TextBox 13"/>
+          <p:cNvPr id="15" name="TextBox 14"/>
           <p:cNvSpPr txBox="1"/>
           <p:nvPr/>
         </p:nvSpPr>
         <p:spPr>
           <a:xfrm>
-            <a:off x="7315200" y="5715000"/>
-            <a:ext cx="1371600" cy="548640"/>
+            <a:off x="7132320" y="5532120"/>
+            <a:ext cx="1280160" cy="502920"/>
           </a:xfrm>
           <a:prstGeom prst="rect">
             <a:avLst/>
@@ -3604,7 +3647,7 @@
           <a:lstStyle/>
           <a:p>
             <a:pPr algn="ctr">
-              <a:defRPr sz="1200" b="1">
+              <a:defRPr sz="1100" b="1">
                 <a:solidFill>
                   <a:srgbClr val="F59E0B"/>
                 </a:solidFill>
@@ -3619,14 +3662,14 @@
       </p:sp>
       <p:sp>
         <p:nvSpPr>
-          <p:cNvPr id="15" name="TextBox 14"/>
+          <p:cNvPr id="16" name="TextBox 15"/>
           <p:cNvSpPr txBox="1"/>
           <p:nvPr/>
         </p:nvSpPr>
         <p:spPr>
           <a:xfrm>
-            <a:off x="8778240" y="5715000"/>
-            <a:ext cx="1371600" cy="548640"/>
+            <a:off x="8595360" y="5532120"/>
+            <a:ext cx="1280160" cy="502920"/>
           </a:xfrm>
           <a:prstGeom prst="rect">
             <a:avLst/>
@@ -3640,7 +3683,7 @@
           <a:lstStyle/>
           <a:p>
             <a:pPr algn="ctr">
-              <a:defRPr sz="1200" b="1">
+              <a:defRPr sz="1100" b="1">
                 <a:solidFill>
                   <a:srgbClr val="F59E0B"/>
                 </a:solidFill>
@@ -3655,14 +3698,14 @@
       </p:sp>
       <p:sp>
         <p:nvSpPr>
-          <p:cNvPr id="16" name="TextBox 15"/>
+          <p:cNvPr id="17" name="TextBox 16"/>
           <p:cNvSpPr txBox="1"/>
           <p:nvPr/>
         </p:nvSpPr>
         <p:spPr>
           <a:xfrm>
-            <a:off x="10241280" y="5715000"/>
-            <a:ext cx="1371600" cy="548640"/>
+            <a:off x="10058400" y="5532120"/>
+            <a:ext cx="1280160" cy="502920"/>
           </a:xfrm>
           <a:prstGeom prst="rect">
             <a:avLst/>
@@ -3676,7 +3719,7 @@
           <a:lstStyle/>
           <a:p>
             <a:pPr algn="ctr">
-              <a:defRPr sz="1200" b="1">
+              <a:defRPr sz="1100" b="1">
                 <a:solidFill>
                   <a:srgbClr val="F59E0B"/>
                 </a:solidFill>
@@ -3703,7 +3746,7 @@
     <p:bg>
       <p:bgPr>
         <a:solidFill>
-          <a:srgbClr val="0B1120"/>
+          <a:srgbClr val="0A0E1A"/>
         </a:solidFill>
         <a:effectLst/>
       </p:bgPr>
@@ -3724,13 +3767,13 @@
         <p:spPr>
           <a:xfrm>
             <a:off x="0" y="0"/>
-            <a:ext cx="12191695" cy="1051560"/>
-          </a:xfrm>
-          <a:prstGeom prst="rect">
-            <a:avLst/>
-          </a:prstGeom>
-          <a:solidFill>
-            <a:srgbClr val="141E33"/>
+            <a:ext cx="12191695" cy="38100"/>
+          </a:xfrm>
+          <a:prstGeom prst="rect">
+            <a:avLst/>
+          </a:prstGeom>
+          <a:solidFill>
+            <a:srgbClr val="F59E0B"/>
           </a:solidFill>
           <a:ln>
             <a:noFill/>
@@ -3766,14 +3809,14 @@
         </p:nvSpPr>
         <p:spPr>
           <a:xfrm>
-            <a:off x="0" y="0"/>
-            <a:ext cx="109728" cy="1051560"/>
-          </a:xfrm>
-          <a:prstGeom prst="rect">
-            <a:avLst/>
-          </a:prstGeom>
-          <a:solidFill>
-            <a:srgbClr val="F59E0B"/>
+            <a:off x="0" y="38100"/>
+            <a:ext cx="12191695" cy="914400"/>
+          </a:xfrm>
+          <a:prstGeom prst="rect">
+            <a:avLst/>
+          </a:prstGeom>
+          <a:solidFill>
+            <a:srgbClr val="161F35"/>
           </a:solidFill>
           <a:ln>
             <a:noFill/>
@@ -3803,14 +3846,57 @@
       </p:sp>
       <p:sp>
         <p:nvSpPr>
-          <p:cNvPr id="4" name="TextBox 3"/>
+          <p:cNvPr id="4" name="Rectangle 3"/>
+          <p:cNvSpPr/>
+          <p:nvPr/>
+        </p:nvSpPr>
+        <p:spPr>
+          <a:xfrm>
+            <a:off x="0" y="38100"/>
+            <a:ext cx="91440" cy="914400"/>
+          </a:xfrm>
+          <a:prstGeom prst="rect">
+            <a:avLst/>
+          </a:prstGeom>
+          <a:solidFill>
+            <a:srgbClr val="F59E0B"/>
+          </a:solidFill>
+          <a:ln>
+            <a:noFill/>
+          </a:ln>
+        </p:spPr>
+        <p:style>
+          <a:lnRef idx="1">
+            <a:schemeClr val="accent1"/>
+          </a:lnRef>
+          <a:fillRef idx="3">
+            <a:schemeClr val="accent1"/>
+          </a:fillRef>
+          <a:effectRef idx="2">
+            <a:schemeClr val="accent1"/>
+          </a:effectRef>
+          <a:fontRef idx="minor">
+            <a:schemeClr val="lt1"/>
+          </a:fontRef>
+        </p:style>
+        <p:txBody>
+          <a:bodyPr rtlCol="0" anchor="ctr"/>
+          <a:lstStyle/>
+          <a:p>
+            <a:pPr algn="ctr"/>
+          </a:p>
+        </p:txBody>
+      </p:sp>
+      <p:sp>
+        <p:nvSpPr>
+          <p:cNvPr id="5" name="TextBox 4"/>
           <p:cNvSpPr txBox="1"/>
           <p:nvPr/>
         </p:nvSpPr>
         <p:spPr>
           <a:xfrm>
-            <a:off x="548640" y="182880"/>
-            <a:ext cx="10058400" cy="640080"/>
+            <a:off x="731520" y="137160"/>
+            <a:ext cx="10728655" cy="640080"/>
           </a:xfrm>
           <a:prstGeom prst="rect">
             <a:avLst/>
@@ -3824,9 +3910,9 @@
           <a:lstStyle/>
           <a:p>
             <a:pPr algn="l">
-              <a:defRPr sz="2600" b="1">
+              <a:defRPr sz="2400" b="1">
                 <a:solidFill>
-                  <a:srgbClr val="FFFFFF"/>
+                  <a:srgbClr val="F0F4FC"/>
                 </a:solidFill>
                 <a:latin typeface="Microsoft YaHei"/>
               </a:defRPr>
@@ -3839,20 +3925,20 @@
       </p:sp>
       <p:sp>
         <p:nvSpPr>
-          <p:cNvPr id="5" name="Rectangle 4"/>
-          <p:cNvSpPr/>
-          <p:nvPr/>
-        </p:nvSpPr>
-        <p:spPr>
-          <a:xfrm>
-            <a:off x="0" y="1051560"/>
-            <a:ext cx="12191695" cy="25400"/>
-          </a:xfrm>
-          <a:prstGeom prst="rect">
-            <a:avLst/>
-          </a:prstGeom>
-          <a:solidFill>
-            <a:srgbClr val="F59E0B"/>
+          <p:cNvPr id="6" name="Rectangle 5"/>
+          <p:cNvSpPr/>
+          <p:nvPr/>
+        </p:nvSpPr>
+        <p:spPr>
+          <a:xfrm>
+            <a:off x="0" y="1078992"/>
+            <a:ext cx="12191695" cy="12700"/>
+          </a:xfrm>
+          <a:prstGeom prst="rect">
+            <a:avLst/>
+          </a:prstGeom>
+          <a:solidFill>
+            <a:srgbClr val="253350"/>
           </a:solidFill>
           <a:ln>
             <a:noFill/>
@@ -3882,20 +3968,20 @@
       </p:sp>
       <p:sp>
         <p:nvSpPr>
-          <p:cNvPr id="6" name="Rounded Rectangle 5"/>
-          <p:cNvSpPr/>
-          <p:nvPr/>
-        </p:nvSpPr>
-        <p:spPr>
-          <a:xfrm>
-            <a:off x="457200" y="1371600"/>
-            <a:ext cx="11247120" cy="685800"/>
+          <p:cNvPr id="7" name="Rounded Rectangle 6"/>
+          <p:cNvSpPr/>
+          <p:nvPr/>
+        </p:nvSpPr>
+        <p:spPr>
+          <a:xfrm>
+            <a:off x="457200" y="1280160"/>
+            <a:ext cx="11247120" cy="658368"/>
           </a:xfrm>
           <a:prstGeom prst="roundRect">
             <a:avLst/>
           </a:prstGeom>
           <a:solidFill>
-            <a:srgbClr val="141E33"/>
+            <a:srgbClr val="161F35"/>
           </a:solidFill>
           <a:ln>
             <a:noFill/>
@@ -3925,20 +4011,20 @@
       </p:sp>
       <p:sp>
         <p:nvSpPr>
-          <p:cNvPr id="7" name="Rectangle 6"/>
-          <p:cNvSpPr/>
-          <p:nvPr/>
-        </p:nvSpPr>
-        <p:spPr>
-          <a:xfrm>
-            <a:off x="457200" y="1371600"/>
-            <a:ext cx="73152" cy="685800"/>
-          </a:xfrm>
-          <a:prstGeom prst="rect">
-            <a:avLst/>
-          </a:prstGeom>
-          <a:solidFill>
-            <a:srgbClr val="00D4FF"/>
+          <p:cNvPr id="8" name="Rectangle 7"/>
+          <p:cNvSpPr/>
+          <p:nvPr/>
+        </p:nvSpPr>
+        <p:spPr>
+          <a:xfrm>
+            <a:off x="457200" y="1280160"/>
+            <a:ext cx="54864" cy="658368"/>
+          </a:xfrm>
+          <a:prstGeom prst="rect">
+            <a:avLst/>
+          </a:prstGeom>
+          <a:solidFill>
+            <a:srgbClr val="00C8F0"/>
           </a:solidFill>
           <a:ln>
             <a:noFill/>
@@ -3968,20 +4054,20 @@
       </p:sp>
       <p:sp>
         <p:nvSpPr>
-          <p:cNvPr id="8" name="Oval 7"/>
-          <p:cNvSpPr/>
-          <p:nvPr/>
-        </p:nvSpPr>
-        <p:spPr>
-          <a:xfrm>
-            <a:off x="731520" y="1481328"/>
-            <a:ext cx="411480" cy="411480"/>
+          <p:cNvPr id="9" name="Oval 8"/>
+          <p:cNvSpPr/>
+          <p:nvPr/>
+        </p:nvSpPr>
+        <p:spPr>
+          <a:xfrm>
+            <a:off x="685800" y="1399032"/>
+            <a:ext cx="365760" cy="365760"/>
           </a:xfrm>
           <a:prstGeom prst="ellipse">
             <a:avLst/>
           </a:prstGeom>
           <a:solidFill>
-            <a:srgbClr val="00D4FF"/>
+            <a:srgbClr val="00C8F0"/>
           </a:solidFill>
           <a:ln>
             <a:noFill/>
@@ -4011,14 +4097,14 @@
       </p:sp>
       <p:sp>
         <p:nvSpPr>
-          <p:cNvPr id="9" name="TextBox 8"/>
+          <p:cNvPr id="10" name="TextBox 9"/>
           <p:cNvSpPr txBox="1"/>
           <p:nvPr/>
         </p:nvSpPr>
         <p:spPr>
           <a:xfrm>
-            <a:off x="731520" y="1481328"/>
-            <a:ext cx="411480" cy="411480"/>
+            <a:off x="685800" y="1399032"/>
+            <a:ext cx="365760" cy="365760"/>
           </a:xfrm>
           <a:prstGeom prst="rect">
             <a:avLst/>
@@ -4032,9 +4118,9 @@
           <a:lstStyle/>
           <a:p>
             <a:pPr algn="ctr">
-              <a:defRPr sz="1300" b="1">
+              <a:defRPr sz="1200" b="1">
                 <a:solidFill>
-                  <a:srgbClr val="FFFFFF"/>
+                  <a:srgbClr val="F0F4FC"/>
                 </a:solidFill>
                 <a:latin typeface="Microsoft YaHei"/>
               </a:defRPr>
@@ -4047,14 +4133,14 @@
       </p:sp>
       <p:sp>
         <p:nvSpPr>
-          <p:cNvPr id="10" name="TextBox 9"/>
+          <p:cNvPr id="11" name="TextBox 10"/>
           <p:cNvSpPr txBox="1"/>
           <p:nvPr/>
         </p:nvSpPr>
         <p:spPr>
           <a:xfrm>
-            <a:off x="1371600" y="1463040"/>
-            <a:ext cx="10058400" cy="502920"/>
+            <a:off x="1234440" y="1371600"/>
+            <a:ext cx="10058400" cy="457200"/>
           </a:xfrm>
           <a:prstGeom prst="rect">
             <a:avLst/>
@@ -4068,9 +4154,9 @@
           <a:lstStyle/>
           <a:p>
             <a:pPr algn="l">
-              <a:defRPr sz="1500" b="0">
+              <a:defRPr sz="1400" b="0">
                 <a:solidFill>
-                  <a:srgbClr val="CBD5E8"/>
+                  <a:srgbClr val="A0AEC4"/>
                 </a:solidFill>
                 <a:latin typeface="Microsoft YaHei"/>
               </a:defRPr>
@@ -4083,20 +4169,20 @@
       </p:sp>
       <p:sp>
         <p:nvSpPr>
-          <p:cNvPr id="11" name="Rectangle 10"/>
-          <p:cNvSpPr/>
-          <p:nvPr/>
-        </p:nvSpPr>
-        <p:spPr>
-          <a:xfrm>
-            <a:off x="914400" y="2057400"/>
-            <a:ext cx="25400" cy="137160"/>
-          </a:xfrm>
-          <a:prstGeom prst="rect">
-            <a:avLst/>
-          </a:prstGeom>
-          <a:solidFill>
-            <a:srgbClr val="00D4FF"/>
+          <p:cNvPr id="12" name="Rectangle 11"/>
+          <p:cNvSpPr/>
+          <p:nvPr/>
+        </p:nvSpPr>
+        <p:spPr>
+          <a:xfrm>
+            <a:off x="850392" y="1938528"/>
+            <a:ext cx="19050" cy="146304"/>
+          </a:xfrm>
+          <a:prstGeom prst="rect">
+            <a:avLst/>
+          </a:prstGeom>
+          <a:solidFill>
+            <a:srgbClr val="00C8F0"/>
           </a:solidFill>
           <a:ln>
             <a:noFill/>
@@ -4126,20 +4212,20 @@
       </p:sp>
       <p:sp>
         <p:nvSpPr>
-          <p:cNvPr id="12" name="Rounded Rectangle 11"/>
-          <p:cNvSpPr/>
-          <p:nvPr/>
-        </p:nvSpPr>
-        <p:spPr>
-          <a:xfrm>
-            <a:off x="457200" y="2194560"/>
-            <a:ext cx="11247120" cy="685800"/>
+          <p:cNvPr id="13" name="Rounded Rectangle 12"/>
+          <p:cNvSpPr/>
+          <p:nvPr/>
+        </p:nvSpPr>
+        <p:spPr>
+          <a:xfrm>
+            <a:off x="457200" y="2084832"/>
+            <a:ext cx="11247120" cy="658368"/>
           </a:xfrm>
           <a:prstGeom prst="roundRect">
             <a:avLst/>
           </a:prstGeom>
           <a:solidFill>
-            <a:srgbClr val="141E33"/>
+            <a:srgbClr val="161F35"/>
           </a:solidFill>
           <a:ln>
             <a:noFill/>
@@ -4169,20 +4255,20 @@
       </p:sp>
       <p:sp>
         <p:nvSpPr>
-          <p:cNvPr id="13" name="Rectangle 12"/>
-          <p:cNvSpPr/>
-          <p:nvPr/>
-        </p:nvSpPr>
-        <p:spPr>
-          <a:xfrm>
-            <a:off x="457200" y="2194560"/>
-            <a:ext cx="73152" cy="685800"/>
-          </a:xfrm>
-          <a:prstGeom prst="rect">
-            <a:avLst/>
-          </a:prstGeom>
-          <a:solidFill>
-            <a:srgbClr val="7C3AED"/>
+          <p:cNvPr id="14" name="Rectangle 13"/>
+          <p:cNvSpPr/>
+          <p:nvPr/>
+        </p:nvSpPr>
+        <p:spPr>
+          <a:xfrm>
+            <a:off x="457200" y="2084832"/>
+            <a:ext cx="54864" cy="658368"/>
+          </a:xfrm>
+          <a:prstGeom prst="rect">
+            <a:avLst/>
+          </a:prstGeom>
+          <a:solidFill>
+            <a:srgbClr val="8B5CF6"/>
           </a:solidFill>
           <a:ln>
             <a:noFill/>
@@ -4212,20 +4298,20 @@
       </p:sp>
       <p:sp>
         <p:nvSpPr>
-          <p:cNvPr id="14" name="Oval 13"/>
-          <p:cNvSpPr/>
-          <p:nvPr/>
-        </p:nvSpPr>
-        <p:spPr>
-          <a:xfrm>
-            <a:off x="731520" y="2304288"/>
-            <a:ext cx="411480" cy="411480"/>
+          <p:cNvPr id="15" name="Oval 14"/>
+          <p:cNvSpPr/>
+          <p:nvPr/>
+        </p:nvSpPr>
+        <p:spPr>
+          <a:xfrm>
+            <a:off x="685800" y="2203704"/>
+            <a:ext cx="365760" cy="365760"/>
           </a:xfrm>
           <a:prstGeom prst="ellipse">
             <a:avLst/>
           </a:prstGeom>
           <a:solidFill>
-            <a:srgbClr val="7C3AED"/>
+            <a:srgbClr val="8B5CF6"/>
           </a:solidFill>
           <a:ln>
             <a:noFill/>
@@ -4255,14 +4341,14 @@
       </p:sp>
       <p:sp>
         <p:nvSpPr>
-          <p:cNvPr id="15" name="TextBox 14"/>
+          <p:cNvPr id="16" name="TextBox 15"/>
           <p:cNvSpPr txBox="1"/>
           <p:nvPr/>
         </p:nvSpPr>
         <p:spPr>
           <a:xfrm>
-            <a:off x="731520" y="2304288"/>
-            <a:ext cx="411480" cy="411480"/>
+            <a:off x="685800" y="2203704"/>
+            <a:ext cx="365760" cy="365760"/>
           </a:xfrm>
           <a:prstGeom prst="rect">
             <a:avLst/>
@@ -4276,9 +4362,9 @@
           <a:lstStyle/>
           <a:p>
             <a:pPr algn="ctr">
-              <a:defRPr sz="1300" b="1">
+              <a:defRPr sz="1200" b="1">
                 <a:solidFill>
-                  <a:srgbClr val="FFFFFF"/>
+                  <a:srgbClr val="F0F4FC"/>
                 </a:solidFill>
                 <a:latin typeface="Microsoft YaHei"/>
               </a:defRPr>
@@ -4291,14 +4377,14 @@
       </p:sp>
       <p:sp>
         <p:nvSpPr>
-          <p:cNvPr id="16" name="TextBox 15"/>
+          <p:cNvPr id="17" name="TextBox 16"/>
           <p:cNvSpPr txBox="1"/>
           <p:nvPr/>
         </p:nvSpPr>
         <p:spPr>
           <a:xfrm>
-            <a:off x="1371600" y="2286000"/>
-            <a:ext cx="10058400" cy="502920"/>
+            <a:off x="1234440" y="2176272"/>
+            <a:ext cx="10058400" cy="457200"/>
           </a:xfrm>
           <a:prstGeom prst="rect">
             <a:avLst/>
@@ -4312,9 +4398,9 @@
           <a:lstStyle/>
           <a:p>
             <a:pPr algn="l">
-              <a:defRPr sz="1500" b="0">
+              <a:defRPr sz="1400" b="0">
                 <a:solidFill>
-                  <a:srgbClr val="CBD5E8"/>
+                  <a:srgbClr val="A0AEC4"/>
                 </a:solidFill>
                 <a:latin typeface="Microsoft YaHei"/>
               </a:defRPr>
@@ -4327,20 +4413,20 @@
       </p:sp>
       <p:sp>
         <p:nvSpPr>
-          <p:cNvPr id="17" name="Rectangle 16"/>
-          <p:cNvSpPr/>
-          <p:nvPr/>
-        </p:nvSpPr>
-        <p:spPr>
-          <a:xfrm>
-            <a:off x="914400" y="2880360"/>
-            <a:ext cx="25400" cy="137160"/>
-          </a:xfrm>
-          <a:prstGeom prst="rect">
-            <a:avLst/>
-          </a:prstGeom>
-          <a:solidFill>
-            <a:srgbClr val="7C3AED"/>
+          <p:cNvPr id="18" name="Rectangle 17"/>
+          <p:cNvSpPr/>
+          <p:nvPr/>
+        </p:nvSpPr>
+        <p:spPr>
+          <a:xfrm>
+            <a:off x="850392" y="2743200"/>
+            <a:ext cx="19050" cy="146304"/>
+          </a:xfrm>
+          <a:prstGeom prst="rect">
+            <a:avLst/>
+          </a:prstGeom>
+          <a:solidFill>
+            <a:srgbClr val="8B5CF6"/>
           </a:solidFill>
           <a:ln>
             <a:noFill/>
@@ -4370,20 +4456,20 @@
       </p:sp>
       <p:sp>
         <p:nvSpPr>
-          <p:cNvPr id="18" name="Rounded Rectangle 17"/>
-          <p:cNvSpPr/>
-          <p:nvPr/>
-        </p:nvSpPr>
-        <p:spPr>
-          <a:xfrm>
-            <a:off x="457200" y="3017520"/>
-            <a:ext cx="11247120" cy="685800"/>
+          <p:cNvPr id="19" name="Rounded Rectangle 18"/>
+          <p:cNvSpPr/>
+          <p:nvPr/>
+        </p:nvSpPr>
+        <p:spPr>
+          <a:xfrm>
+            <a:off x="457200" y="2889504"/>
+            <a:ext cx="11247120" cy="658368"/>
           </a:xfrm>
           <a:prstGeom prst="roundRect">
             <a:avLst/>
           </a:prstGeom>
           <a:solidFill>
-            <a:srgbClr val="141E33"/>
+            <a:srgbClr val="161F35"/>
           </a:solidFill>
           <a:ln>
             <a:noFill/>
@@ -4413,20 +4499,20 @@
       </p:sp>
       <p:sp>
         <p:nvSpPr>
-          <p:cNvPr id="19" name="Rectangle 18"/>
-          <p:cNvSpPr/>
-          <p:nvPr/>
-        </p:nvSpPr>
-        <p:spPr>
-          <a:xfrm>
-            <a:off x="457200" y="3017520"/>
-            <a:ext cx="73152" cy="685800"/>
-          </a:xfrm>
-          <a:prstGeom prst="rect">
-            <a:avLst/>
-          </a:prstGeom>
-          <a:solidFill>
-            <a:srgbClr val="FF6B35"/>
+          <p:cNvPr id="20" name="Rectangle 19"/>
+          <p:cNvSpPr/>
+          <p:nvPr/>
+        </p:nvSpPr>
+        <p:spPr>
+          <a:xfrm>
+            <a:off x="457200" y="2889504"/>
+            <a:ext cx="54864" cy="658368"/>
+          </a:xfrm>
+          <a:prstGeom prst="rect">
+            <a:avLst/>
+          </a:prstGeom>
+          <a:solidFill>
+            <a:srgbClr val="F07A35"/>
           </a:solidFill>
           <a:ln>
             <a:noFill/>
@@ -4456,20 +4542,20 @@
       </p:sp>
       <p:sp>
         <p:nvSpPr>
-          <p:cNvPr id="20" name="Oval 19"/>
-          <p:cNvSpPr/>
-          <p:nvPr/>
-        </p:nvSpPr>
-        <p:spPr>
-          <a:xfrm>
-            <a:off x="731520" y="3127248"/>
-            <a:ext cx="411480" cy="411480"/>
+          <p:cNvPr id="21" name="Oval 20"/>
+          <p:cNvSpPr/>
+          <p:nvPr/>
+        </p:nvSpPr>
+        <p:spPr>
+          <a:xfrm>
+            <a:off x="685800" y="3008376"/>
+            <a:ext cx="365760" cy="365760"/>
           </a:xfrm>
           <a:prstGeom prst="ellipse">
             <a:avLst/>
           </a:prstGeom>
           <a:solidFill>
-            <a:srgbClr val="FF6B35"/>
+            <a:srgbClr val="F07A35"/>
           </a:solidFill>
           <a:ln>
             <a:noFill/>
@@ -4499,14 +4585,14 @@
       </p:sp>
       <p:sp>
         <p:nvSpPr>
-          <p:cNvPr id="21" name="TextBox 20"/>
+          <p:cNvPr id="22" name="TextBox 21"/>
           <p:cNvSpPr txBox="1"/>
           <p:nvPr/>
         </p:nvSpPr>
         <p:spPr>
           <a:xfrm>
-            <a:off x="731520" y="3127248"/>
-            <a:ext cx="411480" cy="411480"/>
+            <a:off x="685800" y="3008376"/>
+            <a:ext cx="365760" cy="365760"/>
           </a:xfrm>
           <a:prstGeom prst="rect">
             <a:avLst/>
@@ -4520,9 +4606,9 @@
           <a:lstStyle/>
           <a:p>
             <a:pPr algn="ctr">
-              <a:defRPr sz="1300" b="1">
+              <a:defRPr sz="1200" b="1">
                 <a:solidFill>
-                  <a:srgbClr val="FFFFFF"/>
+                  <a:srgbClr val="F0F4FC"/>
                 </a:solidFill>
                 <a:latin typeface="Microsoft YaHei"/>
               </a:defRPr>
@@ -4535,14 +4621,14 @@
       </p:sp>
       <p:sp>
         <p:nvSpPr>
-          <p:cNvPr id="22" name="TextBox 21"/>
+          <p:cNvPr id="23" name="TextBox 22"/>
           <p:cNvSpPr txBox="1"/>
           <p:nvPr/>
         </p:nvSpPr>
         <p:spPr>
           <a:xfrm>
-            <a:off x="1371600" y="3108960"/>
-            <a:ext cx="10058400" cy="502920"/>
+            <a:off x="1234440" y="2980944"/>
+            <a:ext cx="10058400" cy="457200"/>
           </a:xfrm>
           <a:prstGeom prst="rect">
             <a:avLst/>
@@ -4556,9 +4642,9 @@
           <a:lstStyle/>
           <a:p>
             <a:pPr algn="l">
-              <a:defRPr sz="1500" b="0">
+              <a:defRPr sz="1400" b="0">
                 <a:solidFill>
-                  <a:srgbClr val="CBD5E8"/>
+                  <a:srgbClr val="A0AEC4"/>
                 </a:solidFill>
                 <a:latin typeface="Microsoft YaHei"/>
               </a:defRPr>
@@ -4571,20 +4657,20 @@
       </p:sp>
       <p:sp>
         <p:nvSpPr>
-          <p:cNvPr id="23" name="Rectangle 22"/>
-          <p:cNvSpPr/>
-          <p:nvPr/>
-        </p:nvSpPr>
-        <p:spPr>
-          <a:xfrm>
-            <a:off x="914400" y="3703320"/>
-            <a:ext cx="25400" cy="137160"/>
-          </a:xfrm>
-          <a:prstGeom prst="rect">
-            <a:avLst/>
-          </a:prstGeom>
-          <a:solidFill>
-            <a:srgbClr val="FF6B35"/>
+          <p:cNvPr id="24" name="Rectangle 23"/>
+          <p:cNvSpPr/>
+          <p:nvPr/>
+        </p:nvSpPr>
+        <p:spPr>
+          <a:xfrm>
+            <a:off x="850392" y="3547872"/>
+            <a:ext cx="19050" cy="146304"/>
+          </a:xfrm>
+          <a:prstGeom prst="rect">
+            <a:avLst/>
+          </a:prstGeom>
+          <a:solidFill>
+            <a:srgbClr val="F07A35"/>
           </a:solidFill>
           <a:ln>
             <a:noFill/>
@@ -4614,20 +4700,20 @@
       </p:sp>
       <p:sp>
         <p:nvSpPr>
-          <p:cNvPr id="24" name="Rounded Rectangle 23"/>
-          <p:cNvSpPr/>
-          <p:nvPr/>
-        </p:nvSpPr>
-        <p:spPr>
-          <a:xfrm>
-            <a:off x="457200" y="3840480"/>
-            <a:ext cx="11247120" cy="685800"/>
+          <p:cNvPr id="25" name="Rounded Rectangle 24"/>
+          <p:cNvSpPr/>
+          <p:nvPr/>
+        </p:nvSpPr>
+        <p:spPr>
+          <a:xfrm>
+            <a:off x="457200" y="3694176"/>
+            <a:ext cx="11247120" cy="658368"/>
           </a:xfrm>
           <a:prstGeom prst="roundRect">
             <a:avLst/>
           </a:prstGeom>
           <a:solidFill>
-            <a:srgbClr val="141E33"/>
+            <a:srgbClr val="161F35"/>
           </a:solidFill>
           <a:ln>
             <a:noFill/>
@@ -4657,14 +4743,14 @@
       </p:sp>
       <p:sp>
         <p:nvSpPr>
-          <p:cNvPr id="25" name="Rectangle 24"/>
-          <p:cNvSpPr/>
-          <p:nvPr/>
-        </p:nvSpPr>
-        <p:spPr>
-          <a:xfrm>
-            <a:off x="457200" y="3840480"/>
-            <a:ext cx="73152" cy="685800"/>
+          <p:cNvPr id="26" name="Rectangle 25"/>
+          <p:cNvSpPr/>
+          <p:nvPr/>
+        </p:nvSpPr>
+        <p:spPr>
+          <a:xfrm>
+            <a:off x="457200" y="3694176"/>
+            <a:ext cx="54864" cy="658368"/>
           </a:xfrm>
           <a:prstGeom prst="rect">
             <a:avLst/>
@@ -4700,14 +4786,14 @@
       </p:sp>
       <p:sp>
         <p:nvSpPr>
-          <p:cNvPr id="26" name="Oval 25"/>
-          <p:cNvSpPr/>
-          <p:nvPr/>
-        </p:nvSpPr>
-        <p:spPr>
-          <a:xfrm>
-            <a:off x="731520" y="3950208"/>
-            <a:ext cx="411480" cy="411480"/>
+          <p:cNvPr id="27" name="Oval 26"/>
+          <p:cNvSpPr/>
+          <p:nvPr/>
+        </p:nvSpPr>
+        <p:spPr>
+          <a:xfrm>
+            <a:off x="685800" y="3813048"/>
+            <a:ext cx="365760" cy="365760"/>
           </a:xfrm>
           <a:prstGeom prst="ellipse">
             <a:avLst/>
@@ -4743,14 +4829,14 @@
       </p:sp>
       <p:sp>
         <p:nvSpPr>
-          <p:cNvPr id="27" name="TextBox 26"/>
+          <p:cNvPr id="28" name="TextBox 27"/>
           <p:cNvSpPr txBox="1"/>
           <p:nvPr/>
         </p:nvSpPr>
         <p:spPr>
           <a:xfrm>
-            <a:off x="731520" y="3950208"/>
-            <a:ext cx="411480" cy="411480"/>
+            <a:off x="685800" y="3813048"/>
+            <a:ext cx="365760" cy="365760"/>
           </a:xfrm>
           <a:prstGeom prst="rect">
             <a:avLst/>
@@ -4764,9 +4850,9 @@
           <a:lstStyle/>
           <a:p>
             <a:pPr algn="ctr">
-              <a:defRPr sz="1300" b="1">
+              <a:defRPr sz="1200" b="1">
                 <a:solidFill>
-                  <a:srgbClr val="FFFFFF"/>
+                  <a:srgbClr val="F0F4FC"/>
                 </a:solidFill>
                 <a:latin typeface="Microsoft YaHei"/>
               </a:defRPr>
@@ -4779,14 +4865,14 @@
       </p:sp>
       <p:sp>
         <p:nvSpPr>
-          <p:cNvPr id="28" name="TextBox 27"/>
+          <p:cNvPr id="29" name="TextBox 28"/>
           <p:cNvSpPr txBox="1"/>
           <p:nvPr/>
         </p:nvSpPr>
         <p:spPr>
           <a:xfrm>
-            <a:off x="1371600" y="3931920"/>
-            <a:ext cx="10058400" cy="502920"/>
+            <a:off x="1234440" y="3785616"/>
+            <a:ext cx="10058400" cy="457200"/>
           </a:xfrm>
           <a:prstGeom prst="rect">
             <a:avLst/>
@@ -4800,9 +4886,9 @@
           <a:lstStyle/>
           <a:p>
             <a:pPr algn="l">
-              <a:defRPr sz="1500" b="0">
+              <a:defRPr sz="1400" b="0">
                 <a:solidFill>
-                  <a:srgbClr val="CBD5E8"/>
+                  <a:srgbClr val="A0AEC4"/>
                 </a:solidFill>
                 <a:latin typeface="Microsoft YaHei"/>
               </a:defRPr>
@@ -4815,14 +4901,14 @@
       </p:sp>
       <p:sp>
         <p:nvSpPr>
-          <p:cNvPr id="29" name="Rectangle 28"/>
-          <p:cNvSpPr/>
-          <p:nvPr/>
-        </p:nvSpPr>
-        <p:spPr>
-          <a:xfrm>
-            <a:off x="914400" y="4526280"/>
-            <a:ext cx="25400" cy="137160"/>
+          <p:cNvPr id="30" name="Rectangle 29"/>
+          <p:cNvSpPr/>
+          <p:nvPr/>
+        </p:nvSpPr>
+        <p:spPr>
+          <a:xfrm>
+            <a:off x="850392" y="4352544"/>
+            <a:ext cx="19050" cy="146304"/>
           </a:xfrm>
           <a:prstGeom prst="rect">
             <a:avLst/>
@@ -4858,20 +4944,20 @@
       </p:sp>
       <p:sp>
         <p:nvSpPr>
-          <p:cNvPr id="30" name="Rounded Rectangle 29"/>
-          <p:cNvSpPr/>
-          <p:nvPr/>
-        </p:nvSpPr>
-        <p:spPr>
-          <a:xfrm>
-            <a:off x="457200" y="4663440"/>
-            <a:ext cx="11247120" cy="685800"/>
+          <p:cNvPr id="31" name="Rounded Rectangle 30"/>
+          <p:cNvSpPr/>
+          <p:nvPr/>
+        </p:nvSpPr>
+        <p:spPr>
+          <a:xfrm>
+            <a:off x="457200" y="4498848"/>
+            <a:ext cx="11247120" cy="658368"/>
           </a:xfrm>
           <a:prstGeom prst="roundRect">
             <a:avLst/>
           </a:prstGeom>
           <a:solidFill>
-            <a:srgbClr val="141E33"/>
+            <a:srgbClr val="161F35"/>
           </a:solidFill>
           <a:ln>
             <a:noFill/>
@@ -4901,14 +4987,14 @@
       </p:sp>
       <p:sp>
         <p:nvSpPr>
-          <p:cNvPr id="31" name="Rectangle 30"/>
-          <p:cNvSpPr/>
-          <p:nvPr/>
-        </p:nvSpPr>
-        <p:spPr>
-          <a:xfrm>
-            <a:off x="457200" y="4663440"/>
-            <a:ext cx="73152" cy="685800"/>
+          <p:cNvPr id="32" name="Rectangle 31"/>
+          <p:cNvSpPr/>
+          <p:nvPr/>
+        </p:nvSpPr>
+        <p:spPr>
+          <a:xfrm>
+            <a:off x="457200" y="4498848"/>
+            <a:ext cx="54864" cy="658368"/>
           </a:xfrm>
           <a:prstGeom prst="rect">
             <a:avLst/>
@@ -4944,14 +5030,14 @@
       </p:sp>
       <p:sp>
         <p:nvSpPr>
-          <p:cNvPr id="32" name="Oval 31"/>
-          <p:cNvSpPr/>
-          <p:nvPr/>
-        </p:nvSpPr>
-        <p:spPr>
-          <a:xfrm>
-            <a:off x="731520" y="4773168"/>
-            <a:ext cx="411480" cy="411480"/>
+          <p:cNvPr id="33" name="Oval 32"/>
+          <p:cNvSpPr/>
+          <p:nvPr/>
+        </p:nvSpPr>
+        <p:spPr>
+          <a:xfrm>
+            <a:off x="685800" y="4617720"/>
+            <a:ext cx="365760" cy="365760"/>
           </a:xfrm>
           <a:prstGeom prst="ellipse">
             <a:avLst/>
@@ -4987,14 +5073,14 @@
       </p:sp>
       <p:sp>
         <p:nvSpPr>
-          <p:cNvPr id="33" name="TextBox 32"/>
+          <p:cNvPr id="34" name="TextBox 33"/>
           <p:cNvSpPr txBox="1"/>
           <p:nvPr/>
         </p:nvSpPr>
         <p:spPr>
           <a:xfrm>
-            <a:off x="731520" y="4773168"/>
-            <a:ext cx="411480" cy="411480"/>
+            <a:off x="685800" y="4617720"/>
+            <a:ext cx="365760" cy="365760"/>
           </a:xfrm>
           <a:prstGeom prst="rect">
             <a:avLst/>
@@ -5008,9 +5094,9 @@
           <a:lstStyle/>
           <a:p>
             <a:pPr algn="ctr">
-              <a:defRPr sz="1300" b="1">
+              <a:defRPr sz="1200" b="1">
                 <a:solidFill>
-                  <a:srgbClr val="FFFFFF"/>
+                  <a:srgbClr val="F0F4FC"/>
                 </a:solidFill>
                 <a:latin typeface="Microsoft YaHei"/>
               </a:defRPr>
@@ -5023,14 +5109,14 @@
       </p:sp>
       <p:sp>
         <p:nvSpPr>
-          <p:cNvPr id="34" name="TextBox 33"/>
+          <p:cNvPr id="35" name="TextBox 34"/>
           <p:cNvSpPr txBox="1"/>
           <p:nvPr/>
         </p:nvSpPr>
         <p:spPr>
           <a:xfrm>
-            <a:off x="1371600" y="4754880"/>
-            <a:ext cx="10058400" cy="502920"/>
+            <a:off x="1234440" y="4590288"/>
+            <a:ext cx="10058400" cy="457200"/>
           </a:xfrm>
           <a:prstGeom prst="rect">
             <a:avLst/>
@@ -5044,9 +5130,9 @@
           <a:lstStyle/>
           <a:p>
             <a:pPr algn="l">
-              <a:defRPr sz="1500" b="0">
+              <a:defRPr sz="1400" b="0">
                 <a:solidFill>
-                  <a:srgbClr val="CBD5E8"/>
+                  <a:srgbClr val="A0AEC4"/>
                 </a:solidFill>
                 <a:latin typeface="Microsoft YaHei"/>
               </a:defRPr>
@@ -5059,14 +5145,14 @@
       </p:sp>
       <p:sp>
         <p:nvSpPr>
-          <p:cNvPr id="35" name="Rectangle 34"/>
-          <p:cNvSpPr/>
-          <p:nvPr/>
-        </p:nvSpPr>
-        <p:spPr>
-          <a:xfrm>
-            <a:off x="914400" y="5349240"/>
-            <a:ext cx="25400" cy="137160"/>
+          <p:cNvPr id="36" name="Rectangle 35"/>
+          <p:cNvSpPr/>
+          <p:nvPr/>
+        </p:nvSpPr>
+        <p:spPr>
+          <a:xfrm>
+            <a:off x="850392" y="5157216"/>
+            <a:ext cx="19050" cy="146304"/>
           </a:xfrm>
           <a:prstGeom prst="rect">
             <a:avLst/>
@@ -5102,20 +5188,20 @@
       </p:sp>
       <p:sp>
         <p:nvSpPr>
-          <p:cNvPr id="36" name="Rounded Rectangle 35"/>
-          <p:cNvSpPr/>
-          <p:nvPr/>
-        </p:nvSpPr>
-        <p:spPr>
-          <a:xfrm>
-            <a:off x="457200" y="5486400"/>
-            <a:ext cx="11247120" cy="685800"/>
+          <p:cNvPr id="37" name="Rounded Rectangle 36"/>
+          <p:cNvSpPr/>
+          <p:nvPr/>
+        </p:nvSpPr>
+        <p:spPr>
+          <a:xfrm>
+            <a:off x="457200" y="5303520"/>
+            <a:ext cx="11247120" cy="658368"/>
           </a:xfrm>
           <a:prstGeom prst="roundRect">
             <a:avLst/>
           </a:prstGeom>
           <a:solidFill>
-            <a:srgbClr val="141E33"/>
+            <a:srgbClr val="161F35"/>
           </a:solidFill>
           <a:ln>
             <a:noFill/>
@@ -5145,20 +5231,20 @@
       </p:sp>
       <p:sp>
         <p:nvSpPr>
-          <p:cNvPr id="37" name="Rectangle 36"/>
-          <p:cNvSpPr/>
-          <p:nvPr/>
-        </p:nvSpPr>
-        <p:spPr>
-          <a:xfrm>
-            <a:off x="457200" y="5486400"/>
-            <a:ext cx="73152" cy="685800"/>
-          </a:xfrm>
-          <a:prstGeom prst="rect">
-            <a:avLst/>
-          </a:prstGeom>
-          <a:solidFill>
-            <a:srgbClr val="EF4444"/>
+          <p:cNvPr id="38" name="Rectangle 37"/>
+          <p:cNvSpPr/>
+          <p:nvPr/>
+        </p:nvSpPr>
+        <p:spPr>
+          <a:xfrm>
+            <a:off x="457200" y="5303520"/>
+            <a:ext cx="54864" cy="658368"/>
+          </a:xfrm>
+          <a:prstGeom prst="rect">
+            <a:avLst/>
+          </a:prstGeom>
+          <a:solidFill>
+            <a:srgbClr val="F43F5E"/>
           </a:solidFill>
           <a:ln>
             <a:noFill/>
@@ -5188,20 +5274,20 @@
       </p:sp>
       <p:sp>
         <p:nvSpPr>
-          <p:cNvPr id="38" name="Oval 37"/>
-          <p:cNvSpPr/>
-          <p:nvPr/>
-        </p:nvSpPr>
-        <p:spPr>
-          <a:xfrm>
-            <a:off x="731520" y="5596128"/>
-            <a:ext cx="411480" cy="411480"/>
+          <p:cNvPr id="39" name="Oval 38"/>
+          <p:cNvSpPr/>
+          <p:nvPr/>
+        </p:nvSpPr>
+        <p:spPr>
+          <a:xfrm>
+            <a:off x="685800" y="5422392"/>
+            <a:ext cx="365760" cy="365760"/>
           </a:xfrm>
           <a:prstGeom prst="ellipse">
             <a:avLst/>
           </a:prstGeom>
           <a:solidFill>
-            <a:srgbClr val="EF4444"/>
+            <a:srgbClr val="F43F5E"/>
           </a:solidFill>
           <a:ln>
             <a:noFill/>
@@ -5231,14 +5317,14 @@
       </p:sp>
       <p:sp>
         <p:nvSpPr>
-          <p:cNvPr id="39" name="TextBox 38"/>
+          <p:cNvPr id="40" name="TextBox 39"/>
           <p:cNvSpPr txBox="1"/>
           <p:nvPr/>
         </p:nvSpPr>
         <p:spPr>
           <a:xfrm>
-            <a:off x="731520" y="5596128"/>
-            <a:ext cx="411480" cy="411480"/>
+            <a:off x="685800" y="5422392"/>
+            <a:ext cx="365760" cy="365760"/>
           </a:xfrm>
           <a:prstGeom prst="rect">
             <a:avLst/>
@@ -5252,9 +5338,9 @@
           <a:lstStyle/>
           <a:p>
             <a:pPr algn="ctr">
-              <a:defRPr sz="1300" b="1">
+              <a:defRPr sz="1200" b="1">
                 <a:solidFill>
-                  <a:srgbClr val="FFFFFF"/>
+                  <a:srgbClr val="F0F4FC"/>
                 </a:solidFill>
                 <a:latin typeface="Microsoft YaHei"/>
               </a:defRPr>
@@ -5267,14 +5353,14 @@
       </p:sp>
       <p:sp>
         <p:nvSpPr>
-          <p:cNvPr id="40" name="TextBox 39"/>
+          <p:cNvPr id="41" name="TextBox 40"/>
           <p:cNvSpPr txBox="1"/>
           <p:nvPr/>
         </p:nvSpPr>
         <p:spPr>
           <a:xfrm>
-            <a:off x="1371600" y="5577840"/>
-            <a:ext cx="10058400" cy="502920"/>
+            <a:off x="1234440" y="5394960"/>
+            <a:ext cx="10058400" cy="457200"/>
           </a:xfrm>
           <a:prstGeom prst="rect">
             <a:avLst/>
@@ -5288,9 +5374,9 @@
           <a:lstStyle/>
           <a:p>
             <a:pPr algn="l">
-              <a:defRPr sz="1500" b="0">
+              <a:defRPr sz="1400" b="0">
                 <a:solidFill>
-                  <a:srgbClr val="CBD5E8"/>
+                  <a:srgbClr val="A0AEC4"/>
                 </a:solidFill>
                 <a:latin typeface="Microsoft YaHei"/>
               </a:defRPr>
@@ -5303,20 +5389,20 @@
       </p:sp>
       <p:sp>
         <p:nvSpPr>
-          <p:cNvPr id="41" name="Rectangle 40"/>
+          <p:cNvPr id="42" name="Rectangle 41"/>
           <p:cNvSpPr/>
           <p:nvPr/>
         </p:nvSpPr>
         <p:spPr>
           <a:xfrm>
             <a:off x="0" y="6446520"/>
-            <a:ext cx="12191695" cy="19050"/>
-          </a:xfrm>
-          <a:prstGeom prst="rect">
-            <a:avLst/>
-          </a:prstGeom>
-          <a:solidFill>
-            <a:srgbClr val="2D3B55"/>
+            <a:ext cx="12191695" cy="12700"/>
+          </a:xfrm>
+          <a:prstGeom prst="rect">
+            <a:avLst/>
+          </a:prstGeom>
+          <a:solidFill>
+            <a:srgbClr val="253350"/>
           </a:solidFill>
           <a:ln>
             <a:noFill/>
@@ -5346,14 +5432,14 @@
       </p:sp>
       <p:sp>
         <p:nvSpPr>
-          <p:cNvPr id="42" name="TextBox 41"/>
+          <p:cNvPr id="43" name="TextBox 42"/>
           <p:cNvSpPr txBox="1"/>
           <p:nvPr/>
         </p:nvSpPr>
         <p:spPr>
           <a:xfrm>
-            <a:off x="457200" y="6492240"/>
-            <a:ext cx="5486400" cy="274320"/>
+            <a:off x="731520" y="6492240"/>
+            <a:ext cx="4572000" cy="274320"/>
           </a:xfrm>
           <a:prstGeom prst="rect">
             <a:avLst/>
@@ -5369,20 +5455,20 @@
             <a:pPr algn="l">
               <a:defRPr sz="900" b="0">
                 <a:solidFill>
-                  <a:srgbClr val="6B7B9E"/>
+                  <a:srgbClr val="607090"/>
                 </a:solidFill>
                 <a:latin typeface="Microsoft YaHei"/>
               </a:defRPr>
             </a:pPr>
             <a:r>
-              <a:t>模块14：工业化生产</a:t>
-            </a:r>
-          </a:p>
-        </p:txBody>
-      </p:sp>
-      <p:sp>
-        <p:nvSpPr>
-          <p:cNvPr id="43" name="TextBox 42"/>
+              <a:t>模块14 · 工业化生产</a:t>
+            </a:r>
+          </a:p>
+        </p:txBody>
+      </p:sp>
+      <p:sp>
+        <p:nvSpPr>
+          <p:cNvPr id="44" name="TextBox 43"/>
           <p:cNvSpPr txBox="1"/>
           <p:nvPr/>
         </p:nvSpPr>
@@ -5405,7 +5491,7 @@
             <a:pPr algn="r">
               <a:defRPr sz="900" b="0">
                 <a:solidFill>
-                  <a:srgbClr val="6B7B9E"/>
+                  <a:srgbClr val="607090"/>
                 </a:solidFill>
                 <a:latin typeface="Microsoft YaHei"/>
               </a:defRPr>
@@ -5430,7 +5516,7 @@
     <p:bg>
       <p:bgPr>
         <a:solidFill>
-          <a:srgbClr val="0B1120"/>
+          <a:srgbClr val="0A0E1A"/>
         </a:solidFill>
         <a:effectLst/>
       </p:bgPr>
@@ -5451,13 +5537,13 @@
         <p:spPr>
           <a:xfrm>
             <a:off x="0" y="0"/>
-            <a:ext cx="12191695" cy="1051560"/>
-          </a:xfrm>
-          <a:prstGeom prst="rect">
-            <a:avLst/>
-          </a:prstGeom>
-          <a:solidFill>
-            <a:srgbClr val="141E33"/>
+            <a:ext cx="12191695" cy="38100"/>
+          </a:xfrm>
+          <a:prstGeom prst="rect">
+            <a:avLst/>
+          </a:prstGeom>
+          <a:solidFill>
+            <a:srgbClr val="10B981"/>
           </a:solidFill>
           <a:ln>
             <a:noFill/>
@@ -5493,14 +5579,14 @@
         </p:nvSpPr>
         <p:spPr>
           <a:xfrm>
-            <a:off x="0" y="0"/>
-            <a:ext cx="109728" cy="1051560"/>
-          </a:xfrm>
-          <a:prstGeom prst="rect">
-            <a:avLst/>
-          </a:prstGeom>
-          <a:solidFill>
-            <a:srgbClr val="10B981"/>
+            <a:off x="0" y="38100"/>
+            <a:ext cx="12191695" cy="914400"/>
+          </a:xfrm>
+          <a:prstGeom prst="rect">
+            <a:avLst/>
+          </a:prstGeom>
+          <a:solidFill>
+            <a:srgbClr val="161F35"/>
           </a:solidFill>
           <a:ln>
             <a:noFill/>
@@ -5530,14 +5616,57 @@
       </p:sp>
       <p:sp>
         <p:nvSpPr>
-          <p:cNvPr id="4" name="TextBox 3"/>
+          <p:cNvPr id="4" name="Rectangle 3"/>
+          <p:cNvSpPr/>
+          <p:nvPr/>
+        </p:nvSpPr>
+        <p:spPr>
+          <a:xfrm>
+            <a:off x="0" y="38100"/>
+            <a:ext cx="91440" cy="914400"/>
+          </a:xfrm>
+          <a:prstGeom prst="rect">
+            <a:avLst/>
+          </a:prstGeom>
+          <a:solidFill>
+            <a:srgbClr val="10B981"/>
+          </a:solidFill>
+          <a:ln>
+            <a:noFill/>
+          </a:ln>
+        </p:spPr>
+        <p:style>
+          <a:lnRef idx="1">
+            <a:schemeClr val="accent1"/>
+          </a:lnRef>
+          <a:fillRef idx="3">
+            <a:schemeClr val="accent1"/>
+          </a:fillRef>
+          <a:effectRef idx="2">
+            <a:schemeClr val="accent1"/>
+          </a:effectRef>
+          <a:fontRef idx="minor">
+            <a:schemeClr val="lt1"/>
+          </a:fontRef>
+        </p:style>
+        <p:txBody>
+          <a:bodyPr rtlCol="0" anchor="ctr"/>
+          <a:lstStyle/>
+          <a:p>
+            <a:pPr algn="ctr"/>
+          </a:p>
+        </p:txBody>
+      </p:sp>
+      <p:sp>
+        <p:nvSpPr>
+          <p:cNvPr id="5" name="TextBox 4"/>
           <p:cNvSpPr txBox="1"/>
           <p:nvPr/>
         </p:nvSpPr>
         <p:spPr>
           <a:xfrm>
-            <a:off x="548640" y="182880"/>
-            <a:ext cx="10058400" cy="640080"/>
+            <a:off x="731520" y="137160"/>
+            <a:ext cx="10728655" cy="640080"/>
           </a:xfrm>
           <a:prstGeom prst="rect">
             <a:avLst/>
@@ -5551,9 +5680,9 @@
           <a:lstStyle/>
           <a:p>
             <a:pPr algn="l">
-              <a:defRPr sz="2600" b="1">
+              <a:defRPr sz="2400" b="1">
                 <a:solidFill>
-                  <a:srgbClr val="FFFFFF"/>
+                  <a:srgbClr val="F0F4FC"/>
                 </a:solidFill>
                 <a:latin typeface="Microsoft YaHei"/>
               </a:defRPr>
@@ -5566,20 +5695,20 @@
       </p:sp>
       <p:sp>
         <p:nvSpPr>
-          <p:cNvPr id="5" name="Rectangle 4"/>
-          <p:cNvSpPr/>
-          <p:nvPr/>
-        </p:nvSpPr>
-        <p:spPr>
-          <a:xfrm>
-            <a:off x="0" y="1051560"/>
-            <a:ext cx="12191695" cy="25400"/>
-          </a:xfrm>
-          <a:prstGeom prst="rect">
-            <a:avLst/>
-          </a:prstGeom>
-          <a:solidFill>
-            <a:srgbClr val="10B981"/>
+          <p:cNvPr id="6" name="Rectangle 5"/>
+          <p:cNvSpPr/>
+          <p:nvPr/>
+        </p:nvSpPr>
+        <p:spPr>
+          <a:xfrm>
+            <a:off x="0" y="1078992"/>
+            <a:ext cx="12191695" cy="12700"/>
+          </a:xfrm>
+          <a:prstGeom prst="rect">
+            <a:avLst/>
+          </a:prstGeom>
+          <a:solidFill>
+            <a:srgbClr val="253350"/>
           </a:solidFill>
           <a:ln>
             <a:noFill/>
@@ -5609,20 +5738,20 @@
       </p:sp>
       <p:sp>
         <p:nvSpPr>
-          <p:cNvPr id="6" name="Rounded Rectangle 5"/>
-          <p:cNvSpPr/>
-          <p:nvPr/>
-        </p:nvSpPr>
-        <p:spPr>
-          <a:xfrm>
-            <a:off x="457200" y="1371600"/>
-            <a:ext cx="11247120" cy="685800"/>
+          <p:cNvPr id="7" name="Rounded Rectangle 6"/>
+          <p:cNvSpPr/>
+          <p:nvPr/>
+        </p:nvSpPr>
+        <p:spPr>
+          <a:xfrm>
+            <a:off x="457200" y="1280160"/>
+            <a:ext cx="11247120" cy="658368"/>
           </a:xfrm>
           <a:prstGeom prst="roundRect">
             <a:avLst/>
           </a:prstGeom>
           <a:solidFill>
-            <a:srgbClr val="141E33"/>
+            <a:srgbClr val="161F35"/>
           </a:solidFill>
           <a:ln>
             <a:noFill/>
@@ -5652,20 +5781,20 @@
       </p:sp>
       <p:sp>
         <p:nvSpPr>
-          <p:cNvPr id="7" name="Rounded Rectangle 6"/>
-          <p:cNvSpPr/>
-          <p:nvPr/>
-        </p:nvSpPr>
-        <p:spPr>
-          <a:xfrm>
-            <a:off x="640080" y="1508760"/>
-            <a:ext cx="365760" cy="365760"/>
+          <p:cNvPr id="8" name="Rounded Rectangle 7"/>
+          <p:cNvSpPr/>
+          <p:nvPr/>
+        </p:nvSpPr>
+        <p:spPr>
+          <a:xfrm>
+            <a:off x="640080" y="1426464"/>
+            <a:ext cx="320040" cy="320040"/>
           </a:xfrm>
           <a:prstGeom prst="roundRect">
             <a:avLst/>
           </a:prstGeom>
           <a:noFill/>
-          <a:ln w="19050">
+          <a:ln w="12700">
             <a:solidFill>
               <a:srgbClr val="10B981"/>
             </a:solidFill>
@@ -5695,13 +5824,13 @@
       </p:sp>
       <p:sp>
         <p:nvSpPr>
-          <p:cNvPr id="8" name="TextBox 7"/>
+          <p:cNvPr id="9" name="TextBox 8"/>
           <p:cNvSpPr txBox="1"/>
           <p:nvPr/>
         </p:nvSpPr>
         <p:spPr>
           <a:xfrm>
-            <a:off x="1188720" y="1463040"/>
+            <a:off x="1097280" y="1371600"/>
             <a:ext cx="457200" cy="457200"/>
           </a:xfrm>
           <a:prstGeom prst="rect">
@@ -5716,7 +5845,7 @@
           <a:lstStyle/>
           <a:p>
             <a:pPr algn="l">
-              <a:defRPr sz="1200" b="1">
+              <a:defRPr sz="1100" b="1">
                 <a:solidFill>
                   <a:srgbClr val="10B981"/>
                 </a:solidFill>
@@ -5731,14 +5860,14 @@
       </p:sp>
       <p:sp>
         <p:nvSpPr>
-          <p:cNvPr id="9" name="TextBox 8"/>
+          <p:cNvPr id="10" name="TextBox 9"/>
           <p:cNvSpPr txBox="1"/>
           <p:nvPr/>
         </p:nvSpPr>
         <p:spPr>
           <a:xfrm>
-            <a:off x="1645920" y="1463040"/>
-            <a:ext cx="9601200" cy="502920"/>
+            <a:off x="1554480" y="1371600"/>
+            <a:ext cx="9601200" cy="457200"/>
           </a:xfrm>
           <a:prstGeom prst="rect">
             <a:avLst/>
@@ -5752,9 +5881,9 @@
           <a:lstStyle/>
           <a:p>
             <a:pPr algn="l">
-              <a:defRPr sz="1500" b="0">
+              <a:defRPr sz="1400" b="0">
                 <a:solidFill>
-                  <a:srgbClr val="CBD5E8"/>
+                  <a:srgbClr val="A0AEC4"/>
                 </a:solidFill>
                 <a:latin typeface="Microsoft YaHei"/>
               </a:defRPr>
@@ -5767,20 +5896,20 @@
       </p:sp>
       <p:sp>
         <p:nvSpPr>
-          <p:cNvPr id="10" name="Rounded Rectangle 9"/>
-          <p:cNvSpPr/>
-          <p:nvPr/>
-        </p:nvSpPr>
-        <p:spPr>
-          <a:xfrm>
-            <a:off x="457200" y="2194560"/>
-            <a:ext cx="11247120" cy="685800"/>
+          <p:cNvPr id="11" name="Rounded Rectangle 10"/>
+          <p:cNvSpPr/>
+          <p:nvPr/>
+        </p:nvSpPr>
+        <p:spPr>
+          <a:xfrm>
+            <a:off x="457200" y="2084832"/>
+            <a:ext cx="11247120" cy="658368"/>
           </a:xfrm>
           <a:prstGeom prst="roundRect">
             <a:avLst/>
           </a:prstGeom>
           <a:solidFill>
-            <a:srgbClr val="141E33"/>
+            <a:srgbClr val="161F35"/>
           </a:solidFill>
           <a:ln>
             <a:noFill/>
@@ -5810,20 +5939,20 @@
       </p:sp>
       <p:sp>
         <p:nvSpPr>
-          <p:cNvPr id="11" name="Rounded Rectangle 10"/>
-          <p:cNvSpPr/>
-          <p:nvPr/>
-        </p:nvSpPr>
-        <p:spPr>
-          <a:xfrm>
-            <a:off x="640080" y="2331720"/>
-            <a:ext cx="365760" cy="365760"/>
+          <p:cNvPr id="12" name="Rounded Rectangle 11"/>
+          <p:cNvSpPr/>
+          <p:nvPr/>
+        </p:nvSpPr>
+        <p:spPr>
+          <a:xfrm>
+            <a:off x="640080" y="2231136"/>
+            <a:ext cx="320040" cy="320040"/>
           </a:xfrm>
           <a:prstGeom prst="roundRect">
             <a:avLst/>
           </a:prstGeom>
           <a:noFill/>
-          <a:ln w="19050">
+          <a:ln w="12700">
             <a:solidFill>
               <a:srgbClr val="10B981"/>
             </a:solidFill>
@@ -5853,13 +5982,13 @@
       </p:sp>
       <p:sp>
         <p:nvSpPr>
-          <p:cNvPr id="12" name="TextBox 11"/>
+          <p:cNvPr id="13" name="TextBox 12"/>
           <p:cNvSpPr txBox="1"/>
           <p:nvPr/>
         </p:nvSpPr>
         <p:spPr>
           <a:xfrm>
-            <a:off x="1188720" y="2286000"/>
+            <a:off x="1097280" y="2176272"/>
             <a:ext cx="457200" cy="457200"/>
           </a:xfrm>
           <a:prstGeom prst="rect">
@@ -5874,7 +6003,7 @@
           <a:lstStyle/>
           <a:p>
             <a:pPr algn="l">
-              <a:defRPr sz="1200" b="1">
+              <a:defRPr sz="1100" b="1">
                 <a:solidFill>
                   <a:srgbClr val="10B981"/>
                 </a:solidFill>
@@ -5889,14 +6018,14 @@
       </p:sp>
       <p:sp>
         <p:nvSpPr>
-          <p:cNvPr id="13" name="TextBox 12"/>
+          <p:cNvPr id="14" name="TextBox 13"/>
           <p:cNvSpPr txBox="1"/>
           <p:nvPr/>
         </p:nvSpPr>
         <p:spPr>
           <a:xfrm>
-            <a:off x="1645920" y="2286000"/>
-            <a:ext cx="9601200" cy="502920"/>
+            <a:off x="1554480" y="2176272"/>
+            <a:ext cx="9601200" cy="457200"/>
           </a:xfrm>
           <a:prstGeom prst="rect">
             <a:avLst/>
@@ -5910,9 +6039,9 @@
           <a:lstStyle/>
           <a:p>
             <a:pPr algn="l">
-              <a:defRPr sz="1500" b="0">
+              <a:defRPr sz="1400" b="0">
                 <a:solidFill>
-                  <a:srgbClr val="CBD5E8"/>
+                  <a:srgbClr val="A0AEC4"/>
                 </a:solidFill>
                 <a:latin typeface="Microsoft YaHei"/>
               </a:defRPr>
@@ -5925,20 +6054,20 @@
       </p:sp>
       <p:sp>
         <p:nvSpPr>
-          <p:cNvPr id="14" name="Rounded Rectangle 13"/>
-          <p:cNvSpPr/>
-          <p:nvPr/>
-        </p:nvSpPr>
-        <p:spPr>
-          <a:xfrm>
-            <a:off x="457200" y="3017520"/>
-            <a:ext cx="11247120" cy="685800"/>
+          <p:cNvPr id="15" name="Rounded Rectangle 14"/>
+          <p:cNvSpPr/>
+          <p:nvPr/>
+        </p:nvSpPr>
+        <p:spPr>
+          <a:xfrm>
+            <a:off x="457200" y="2889504"/>
+            <a:ext cx="11247120" cy="658368"/>
           </a:xfrm>
           <a:prstGeom prst="roundRect">
             <a:avLst/>
           </a:prstGeom>
           <a:solidFill>
-            <a:srgbClr val="141E33"/>
+            <a:srgbClr val="161F35"/>
           </a:solidFill>
           <a:ln>
             <a:noFill/>
@@ -5968,20 +6097,20 @@
       </p:sp>
       <p:sp>
         <p:nvSpPr>
-          <p:cNvPr id="15" name="Rounded Rectangle 14"/>
-          <p:cNvSpPr/>
-          <p:nvPr/>
-        </p:nvSpPr>
-        <p:spPr>
-          <a:xfrm>
-            <a:off x="640080" y="3154680"/>
-            <a:ext cx="365760" cy="365760"/>
+          <p:cNvPr id="16" name="Rounded Rectangle 15"/>
+          <p:cNvSpPr/>
+          <p:nvPr/>
+        </p:nvSpPr>
+        <p:spPr>
+          <a:xfrm>
+            <a:off x="640080" y="3035808"/>
+            <a:ext cx="320040" cy="320040"/>
           </a:xfrm>
           <a:prstGeom prst="roundRect">
             <a:avLst/>
           </a:prstGeom>
           <a:noFill/>
-          <a:ln w="19050">
+          <a:ln w="12700">
             <a:solidFill>
               <a:srgbClr val="10B981"/>
             </a:solidFill>
@@ -6011,13 +6140,13 @@
       </p:sp>
       <p:sp>
         <p:nvSpPr>
-          <p:cNvPr id="16" name="TextBox 15"/>
+          <p:cNvPr id="17" name="TextBox 16"/>
           <p:cNvSpPr txBox="1"/>
           <p:nvPr/>
         </p:nvSpPr>
         <p:spPr>
           <a:xfrm>
-            <a:off x="1188720" y="3108960"/>
+            <a:off x="1097280" y="2980944"/>
             <a:ext cx="457200" cy="457200"/>
           </a:xfrm>
           <a:prstGeom prst="rect">
@@ -6032,7 +6161,7 @@
           <a:lstStyle/>
           <a:p>
             <a:pPr algn="l">
-              <a:defRPr sz="1200" b="1">
+              <a:defRPr sz="1100" b="1">
                 <a:solidFill>
                   <a:srgbClr val="10B981"/>
                 </a:solidFill>
@@ -6047,14 +6176,14 @@
       </p:sp>
       <p:sp>
         <p:nvSpPr>
-          <p:cNvPr id="17" name="TextBox 16"/>
+          <p:cNvPr id="18" name="TextBox 17"/>
           <p:cNvSpPr txBox="1"/>
           <p:nvPr/>
         </p:nvSpPr>
         <p:spPr>
           <a:xfrm>
-            <a:off x="1645920" y="3108960"/>
-            <a:ext cx="9601200" cy="502920"/>
+            <a:off x="1554480" y="2980944"/>
+            <a:ext cx="9601200" cy="457200"/>
           </a:xfrm>
           <a:prstGeom prst="rect">
             <a:avLst/>
@@ -6068,9 +6197,9 @@
           <a:lstStyle/>
           <a:p>
             <a:pPr algn="l">
-              <a:defRPr sz="1500" b="0">
+              <a:defRPr sz="1400" b="0">
                 <a:solidFill>
-                  <a:srgbClr val="CBD5E8"/>
+                  <a:srgbClr val="A0AEC4"/>
                 </a:solidFill>
                 <a:latin typeface="Microsoft YaHei"/>
               </a:defRPr>
@@ -6083,20 +6212,20 @@
       </p:sp>
       <p:sp>
         <p:nvSpPr>
-          <p:cNvPr id="18" name="Rounded Rectangle 17"/>
-          <p:cNvSpPr/>
-          <p:nvPr/>
-        </p:nvSpPr>
-        <p:spPr>
-          <a:xfrm>
-            <a:off x="457200" y="3840480"/>
-            <a:ext cx="11247120" cy="685800"/>
+          <p:cNvPr id="19" name="Rounded Rectangle 18"/>
+          <p:cNvSpPr/>
+          <p:nvPr/>
+        </p:nvSpPr>
+        <p:spPr>
+          <a:xfrm>
+            <a:off x="457200" y="3694176"/>
+            <a:ext cx="11247120" cy="658368"/>
           </a:xfrm>
           <a:prstGeom prst="roundRect">
             <a:avLst/>
           </a:prstGeom>
           <a:solidFill>
-            <a:srgbClr val="141E33"/>
+            <a:srgbClr val="161F35"/>
           </a:solidFill>
           <a:ln>
             <a:noFill/>
@@ -6126,20 +6255,20 @@
       </p:sp>
       <p:sp>
         <p:nvSpPr>
-          <p:cNvPr id="19" name="Rounded Rectangle 18"/>
-          <p:cNvSpPr/>
-          <p:nvPr/>
-        </p:nvSpPr>
-        <p:spPr>
-          <a:xfrm>
-            <a:off x="640080" y="3977640"/>
-            <a:ext cx="365760" cy="365760"/>
+          <p:cNvPr id="20" name="Rounded Rectangle 19"/>
+          <p:cNvSpPr/>
+          <p:nvPr/>
+        </p:nvSpPr>
+        <p:spPr>
+          <a:xfrm>
+            <a:off x="640080" y="3840480"/>
+            <a:ext cx="320040" cy="320040"/>
           </a:xfrm>
           <a:prstGeom prst="roundRect">
             <a:avLst/>
           </a:prstGeom>
           <a:noFill/>
-          <a:ln w="19050">
+          <a:ln w="12700">
             <a:solidFill>
               <a:srgbClr val="10B981"/>
             </a:solidFill>
@@ -6169,13 +6298,13 @@
       </p:sp>
       <p:sp>
         <p:nvSpPr>
-          <p:cNvPr id="20" name="TextBox 19"/>
+          <p:cNvPr id="21" name="TextBox 20"/>
           <p:cNvSpPr txBox="1"/>
           <p:nvPr/>
         </p:nvSpPr>
         <p:spPr>
           <a:xfrm>
-            <a:off x="1188720" y="3931920"/>
+            <a:off x="1097280" y="3785616"/>
             <a:ext cx="457200" cy="457200"/>
           </a:xfrm>
           <a:prstGeom prst="rect">
@@ -6190,7 +6319,7 @@
           <a:lstStyle/>
           <a:p>
             <a:pPr algn="l">
-              <a:defRPr sz="1200" b="1">
+              <a:defRPr sz="1100" b="1">
                 <a:solidFill>
                   <a:srgbClr val="10B981"/>
                 </a:solidFill>
@@ -6205,14 +6334,14 @@
       </p:sp>
       <p:sp>
         <p:nvSpPr>
-          <p:cNvPr id="21" name="TextBox 20"/>
+          <p:cNvPr id="22" name="TextBox 21"/>
           <p:cNvSpPr txBox="1"/>
           <p:nvPr/>
         </p:nvSpPr>
         <p:spPr>
           <a:xfrm>
-            <a:off x="1645920" y="3931920"/>
-            <a:ext cx="9601200" cy="502920"/>
+            <a:off x="1554480" y="3785616"/>
+            <a:ext cx="9601200" cy="457200"/>
           </a:xfrm>
           <a:prstGeom prst="rect">
             <a:avLst/>
@@ -6226,9 +6355,9 @@
           <a:lstStyle/>
           <a:p>
             <a:pPr algn="l">
-              <a:defRPr sz="1500" b="0">
+              <a:defRPr sz="1400" b="0">
                 <a:solidFill>
-                  <a:srgbClr val="CBD5E8"/>
+                  <a:srgbClr val="A0AEC4"/>
                 </a:solidFill>
                 <a:latin typeface="Microsoft YaHei"/>
               </a:defRPr>
@@ -6241,20 +6370,20 @@
       </p:sp>
       <p:sp>
         <p:nvSpPr>
-          <p:cNvPr id="22" name="Rounded Rectangle 21"/>
-          <p:cNvSpPr/>
-          <p:nvPr/>
-        </p:nvSpPr>
-        <p:spPr>
-          <a:xfrm>
-            <a:off x="457200" y="4663440"/>
-            <a:ext cx="11247120" cy="685800"/>
+          <p:cNvPr id="23" name="Rounded Rectangle 22"/>
+          <p:cNvSpPr/>
+          <p:nvPr/>
+        </p:nvSpPr>
+        <p:spPr>
+          <a:xfrm>
+            <a:off x="457200" y="4498848"/>
+            <a:ext cx="11247120" cy="658368"/>
           </a:xfrm>
           <a:prstGeom prst="roundRect">
             <a:avLst/>
           </a:prstGeom>
           <a:solidFill>
-            <a:srgbClr val="141E33"/>
+            <a:srgbClr val="161F35"/>
           </a:solidFill>
           <a:ln>
             <a:noFill/>
@@ -6284,20 +6413,20 @@
       </p:sp>
       <p:sp>
         <p:nvSpPr>
-          <p:cNvPr id="23" name="Rounded Rectangle 22"/>
-          <p:cNvSpPr/>
-          <p:nvPr/>
-        </p:nvSpPr>
-        <p:spPr>
-          <a:xfrm>
-            <a:off x="640080" y="4800600"/>
-            <a:ext cx="365760" cy="365760"/>
+          <p:cNvPr id="24" name="Rounded Rectangle 23"/>
+          <p:cNvSpPr/>
+          <p:nvPr/>
+        </p:nvSpPr>
+        <p:spPr>
+          <a:xfrm>
+            <a:off x="640080" y="4645152"/>
+            <a:ext cx="320040" cy="320040"/>
           </a:xfrm>
           <a:prstGeom prst="roundRect">
             <a:avLst/>
           </a:prstGeom>
           <a:noFill/>
-          <a:ln w="19050">
+          <a:ln w="12700">
             <a:solidFill>
               <a:srgbClr val="10B981"/>
             </a:solidFill>
@@ -6327,13 +6456,13 @@
       </p:sp>
       <p:sp>
         <p:nvSpPr>
-          <p:cNvPr id="24" name="TextBox 23"/>
+          <p:cNvPr id="25" name="TextBox 24"/>
           <p:cNvSpPr txBox="1"/>
           <p:nvPr/>
         </p:nvSpPr>
         <p:spPr>
           <a:xfrm>
-            <a:off x="1188720" y="4754880"/>
+            <a:off x="1097280" y="4590288"/>
             <a:ext cx="457200" cy="457200"/>
           </a:xfrm>
           <a:prstGeom prst="rect">
@@ -6348,7 +6477,7 @@
           <a:lstStyle/>
           <a:p>
             <a:pPr algn="l">
-              <a:defRPr sz="1200" b="1">
+              <a:defRPr sz="1100" b="1">
                 <a:solidFill>
                   <a:srgbClr val="10B981"/>
                 </a:solidFill>
@@ -6363,14 +6492,14 @@
       </p:sp>
       <p:sp>
         <p:nvSpPr>
-          <p:cNvPr id="25" name="TextBox 24"/>
+          <p:cNvPr id="26" name="TextBox 25"/>
           <p:cNvSpPr txBox="1"/>
           <p:nvPr/>
         </p:nvSpPr>
         <p:spPr>
           <a:xfrm>
-            <a:off x="1645920" y="4754880"/>
-            <a:ext cx="9601200" cy="502920"/>
+            <a:off x="1554480" y="4590288"/>
+            <a:ext cx="9601200" cy="457200"/>
           </a:xfrm>
           <a:prstGeom prst="rect">
             <a:avLst/>
@@ -6384,9 +6513,9 @@
           <a:lstStyle/>
           <a:p>
             <a:pPr algn="l">
-              <a:defRPr sz="1500" b="0">
+              <a:defRPr sz="1400" b="0">
                 <a:solidFill>
-                  <a:srgbClr val="CBD5E8"/>
+                  <a:srgbClr val="A0AEC4"/>
                 </a:solidFill>
                 <a:latin typeface="Microsoft YaHei"/>
               </a:defRPr>
@@ -6399,20 +6528,20 @@
       </p:sp>
       <p:sp>
         <p:nvSpPr>
-          <p:cNvPr id="26" name="Rounded Rectangle 25"/>
-          <p:cNvSpPr/>
-          <p:nvPr/>
-        </p:nvSpPr>
-        <p:spPr>
-          <a:xfrm>
-            <a:off x="457200" y="5486400"/>
-            <a:ext cx="11247120" cy="685800"/>
+          <p:cNvPr id="27" name="Rounded Rectangle 26"/>
+          <p:cNvSpPr/>
+          <p:nvPr/>
+        </p:nvSpPr>
+        <p:spPr>
+          <a:xfrm>
+            <a:off x="457200" y="5303520"/>
+            <a:ext cx="11247120" cy="658368"/>
           </a:xfrm>
           <a:prstGeom prst="roundRect">
             <a:avLst/>
           </a:prstGeom>
           <a:solidFill>
-            <a:srgbClr val="141E33"/>
+            <a:srgbClr val="161F35"/>
           </a:solidFill>
           <a:ln>
             <a:noFill/>
@@ -6442,20 +6571,20 @@
       </p:sp>
       <p:sp>
         <p:nvSpPr>
-          <p:cNvPr id="27" name="Rounded Rectangle 26"/>
-          <p:cNvSpPr/>
-          <p:nvPr/>
-        </p:nvSpPr>
-        <p:spPr>
-          <a:xfrm>
-            <a:off x="640080" y="5623560"/>
-            <a:ext cx="365760" cy="365760"/>
+          <p:cNvPr id="28" name="Rounded Rectangle 27"/>
+          <p:cNvSpPr/>
+          <p:nvPr/>
+        </p:nvSpPr>
+        <p:spPr>
+          <a:xfrm>
+            <a:off x="640080" y="5449824"/>
+            <a:ext cx="320040" cy="320040"/>
           </a:xfrm>
           <a:prstGeom prst="roundRect">
             <a:avLst/>
           </a:prstGeom>
           <a:noFill/>
-          <a:ln w="19050">
+          <a:ln w="12700">
             <a:solidFill>
               <a:srgbClr val="10B981"/>
             </a:solidFill>
@@ -6485,13 +6614,13 @@
       </p:sp>
       <p:sp>
         <p:nvSpPr>
-          <p:cNvPr id="28" name="TextBox 27"/>
+          <p:cNvPr id="29" name="TextBox 28"/>
           <p:cNvSpPr txBox="1"/>
           <p:nvPr/>
         </p:nvSpPr>
         <p:spPr>
           <a:xfrm>
-            <a:off x="1188720" y="5577840"/>
+            <a:off x="1097280" y="5394960"/>
             <a:ext cx="457200" cy="457200"/>
           </a:xfrm>
           <a:prstGeom prst="rect">
@@ -6506,7 +6635,7 @@
           <a:lstStyle/>
           <a:p>
             <a:pPr algn="l">
-              <a:defRPr sz="1200" b="1">
+              <a:defRPr sz="1100" b="1">
                 <a:solidFill>
                   <a:srgbClr val="10B981"/>
                 </a:solidFill>
@@ -6521,14 +6650,14 @@
       </p:sp>
       <p:sp>
         <p:nvSpPr>
-          <p:cNvPr id="29" name="TextBox 28"/>
+          <p:cNvPr id="30" name="TextBox 29"/>
           <p:cNvSpPr txBox="1"/>
           <p:nvPr/>
         </p:nvSpPr>
         <p:spPr>
           <a:xfrm>
-            <a:off x="1645920" y="5577840"/>
-            <a:ext cx="9601200" cy="502920"/>
+            <a:off x="1554480" y="5394960"/>
+            <a:ext cx="9601200" cy="457200"/>
           </a:xfrm>
           <a:prstGeom prst="rect">
             <a:avLst/>
@@ -6542,9 +6671,9 @@
           <a:lstStyle/>
           <a:p>
             <a:pPr algn="l">
-              <a:defRPr sz="1500" b="0">
+              <a:defRPr sz="1400" b="0">
                 <a:solidFill>
-                  <a:srgbClr val="CBD5E8"/>
+                  <a:srgbClr val="A0AEC4"/>
                 </a:solidFill>
                 <a:latin typeface="Microsoft YaHei"/>
               </a:defRPr>
@@ -6557,20 +6686,20 @@
       </p:sp>
       <p:sp>
         <p:nvSpPr>
-          <p:cNvPr id="30" name="Rectangle 29"/>
+          <p:cNvPr id="31" name="Rectangle 30"/>
           <p:cNvSpPr/>
           <p:nvPr/>
         </p:nvSpPr>
         <p:spPr>
           <a:xfrm>
             <a:off x="0" y="6446520"/>
-            <a:ext cx="12191695" cy="19050"/>
-          </a:xfrm>
-          <a:prstGeom prst="rect">
-            <a:avLst/>
-          </a:prstGeom>
-          <a:solidFill>
-            <a:srgbClr val="2D3B55"/>
+            <a:ext cx="12191695" cy="12700"/>
+          </a:xfrm>
+          <a:prstGeom prst="rect">
+            <a:avLst/>
+          </a:prstGeom>
+          <a:solidFill>
+            <a:srgbClr val="253350"/>
           </a:solidFill>
           <a:ln>
             <a:noFill/>
@@ -6600,14 +6729,14 @@
       </p:sp>
       <p:sp>
         <p:nvSpPr>
-          <p:cNvPr id="31" name="TextBox 30"/>
+          <p:cNvPr id="32" name="TextBox 31"/>
           <p:cNvSpPr txBox="1"/>
           <p:nvPr/>
         </p:nvSpPr>
         <p:spPr>
           <a:xfrm>
-            <a:off x="457200" y="6492240"/>
-            <a:ext cx="5486400" cy="274320"/>
+            <a:off x="731520" y="6492240"/>
+            <a:ext cx="4572000" cy="274320"/>
           </a:xfrm>
           <a:prstGeom prst="rect">
             <a:avLst/>
@@ -6623,20 +6752,20 @@
             <a:pPr algn="l">
               <a:defRPr sz="900" b="0">
                 <a:solidFill>
-                  <a:srgbClr val="6B7B9E"/>
+                  <a:srgbClr val="607090"/>
                 </a:solidFill>
                 <a:latin typeface="Microsoft YaHei"/>
               </a:defRPr>
             </a:pPr>
             <a:r>
-              <a:t>模块14：工业化生产</a:t>
-            </a:r>
-          </a:p>
-        </p:txBody>
-      </p:sp>
-      <p:sp>
-        <p:nvSpPr>
-          <p:cNvPr id="32" name="TextBox 31"/>
+              <a:t>模块14 · 工业化生产</a:t>
+            </a:r>
+          </a:p>
+        </p:txBody>
+      </p:sp>
+      <p:sp>
+        <p:nvSpPr>
+          <p:cNvPr id="33" name="TextBox 32"/>
           <p:cNvSpPr txBox="1"/>
           <p:nvPr/>
         </p:nvSpPr>
@@ -6659,7 +6788,7 @@
             <a:pPr algn="r">
               <a:defRPr sz="900" b="0">
                 <a:solidFill>
-                  <a:srgbClr val="6B7B9E"/>
+                  <a:srgbClr val="607090"/>
                 </a:solidFill>
                 <a:latin typeface="Microsoft YaHei"/>
               </a:defRPr>
@@ -6684,7 +6813,7 @@
     <p:bg>
       <p:bgPr>
         <a:solidFill>
-          <a:srgbClr val="0B1120"/>
+          <a:srgbClr val="0A0E1A"/>
         </a:solidFill>
         <a:effectLst/>
       </p:bgPr>
@@ -6704,8 +6833,8 @@
         </p:nvSpPr>
         <p:spPr>
           <a:xfrm>
-            <a:off x="5029200" y="1371600"/>
-            <a:ext cx="2103120" cy="2103120"/>
+            <a:off x="5181447" y="1645920"/>
+            <a:ext cx="1828800" cy="1828800"/>
           </a:xfrm>
           <a:prstGeom prst="ellipse">
             <a:avLst/>
@@ -6747,8 +6876,8 @@
         </p:nvSpPr>
         <p:spPr>
           <a:xfrm>
-            <a:off x="5029200" y="1645920"/>
-            <a:ext cx="2103120" cy="1645920"/>
+            <a:off x="5181447" y="1920240"/>
+            <a:ext cx="1828800" cy="1371600"/>
           </a:xfrm>
           <a:prstGeom prst="rect">
             <a:avLst/>
@@ -6762,15 +6891,15 @@
           <a:lstStyle/>
           <a:p>
             <a:pPr algn="ctr">
-              <a:defRPr sz="6000" b="0">
+              <a:defRPr sz="5600" b="1">
                 <a:solidFill>
-                  <a:srgbClr val="FFFFFF"/>
+                  <a:srgbClr val="F0F4FC"/>
                 </a:solidFill>
                 <a:latin typeface="Microsoft YaHei"/>
               </a:defRPr>
             </a:pPr>
             <a:r>
-              <a:t>✅</a:t>
+              <a:t>✓</a:t>
             </a:r>
           </a:p>
         </p:txBody>
@@ -6784,7 +6913,7 @@
         <p:spPr>
           <a:xfrm>
             <a:off x="0" y="3840480"/>
-            <a:ext cx="12191695" cy="731520"/>
+            <a:ext cx="12191695" cy="640080"/>
           </a:xfrm>
           <a:prstGeom prst="rect">
             <a:avLst/>
@@ -6800,7 +6929,7 @@
             <a:pPr algn="ctr">
               <a:defRPr sz="3200" b="1">
                 <a:solidFill>
-                  <a:srgbClr val="FFFFFF"/>
+                  <a:srgbClr val="F0F4FC"/>
                 </a:solidFill>
                 <a:latin typeface="Microsoft YaHei"/>
               </a:defRPr>
@@ -6819,8 +6948,8 @@
         </p:nvSpPr>
         <p:spPr>
           <a:xfrm>
-            <a:off x="5029200" y="4754880"/>
-            <a:ext cx="2103120" cy="38100"/>
+            <a:off x="5029200" y="4663440"/>
+            <a:ext cx="2103120" cy="25400"/>
           </a:xfrm>
           <a:prstGeom prst="rect">
             <a:avLst/>
@@ -6862,7 +6991,7 @@
         </p:nvSpPr>
         <p:spPr>
           <a:xfrm>
-            <a:off x="0" y="5029200"/>
+            <a:off x="0" y="4937760"/>
             <a:ext cx="12191695" cy="457200"/>
           </a:xfrm>
           <a:prstGeom prst="rect">
@@ -6877,9 +7006,9 @@
           <a:lstStyle/>
           <a:p>
             <a:pPr algn="ctr">
-              <a:defRPr sz="1800" b="0">
+              <a:defRPr sz="1600" b="0">
                 <a:solidFill>
-                  <a:srgbClr val="CBD5E8"/>
+                  <a:srgbClr val="A0AEC4"/>
                 </a:solidFill>
                 <a:latin typeface="Microsoft YaHei"/>
               </a:defRPr>
@@ -6913,9 +7042,9 @@
           <a:lstStyle/>
           <a:p>
             <a:pPr algn="ctr">
-              <a:defRPr sz="1200" b="0">
+              <a:defRPr sz="1100" b="0">
                 <a:solidFill>
-                  <a:srgbClr val="6B7B9E"/>
+                  <a:srgbClr val="607090"/>
                 </a:solidFill>
                 <a:latin typeface="Microsoft YaHei"/>
               </a:defRPr>
@@ -6940,7 +7069,7 @@
     <p:bg>
       <p:bgPr>
         <a:solidFill>
-          <a:srgbClr val="0B1120"/>
+          <a:srgbClr val="0A0E1A"/>
         </a:solidFill>
         <a:effectLst/>
       </p:bgPr>
@@ -6961,13 +7090,13 @@
         <p:spPr>
           <a:xfrm>
             <a:off x="0" y="0"/>
-            <a:ext cx="12191695" cy="1051560"/>
-          </a:xfrm>
-          <a:prstGeom prst="rect">
-            <a:avLst/>
-          </a:prstGeom>
-          <a:solidFill>
-            <a:srgbClr val="141E33"/>
+            <a:ext cx="12191695" cy="38100"/>
+          </a:xfrm>
+          <a:prstGeom prst="rect">
+            <a:avLst/>
+          </a:prstGeom>
+          <a:solidFill>
+            <a:srgbClr val="F59E0B"/>
           </a:solidFill>
           <a:ln>
             <a:noFill/>
@@ -7003,14 +7132,14 @@
         </p:nvSpPr>
         <p:spPr>
           <a:xfrm>
-            <a:off x="0" y="0"/>
-            <a:ext cx="109728" cy="1051560"/>
-          </a:xfrm>
-          <a:prstGeom prst="rect">
-            <a:avLst/>
-          </a:prstGeom>
-          <a:solidFill>
-            <a:srgbClr val="F59E0B"/>
+            <a:off x="0" y="38100"/>
+            <a:ext cx="12191695" cy="914400"/>
+          </a:xfrm>
+          <a:prstGeom prst="rect">
+            <a:avLst/>
+          </a:prstGeom>
+          <a:solidFill>
+            <a:srgbClr val="161F35"/>
           </a:solidFill>
           <a:ln>
             <a:noFill/>
@@ -7040,14 +7169,57 @@
       </p:sp>
       <p:sp>
         <p:nvSpPr>
-          <p:cNvPr id="4" name="TextBox 3"/>
+          <p:cNvPr id="4" name="Rectangle 3"/>
+          <p:cNvSpPr/>
+          <p:nvPr/>
+        </p:nvSpPr>
+        <p:spPr>
+          <a:xfrm>
+            <a:off x="0" y="38100"/>
+            <a:ext cx="91440" cy="914400"/>
+          </a:xfrm>
+          <a:prstGeom prst="rect">
+            <a:avLst/>
+          </a:prstGeom>
+          <a:solidFill>
+            <a:srgbClr val="F59E0B"/>
+          </a:solidFill>
+          <a:ln>
+            <a:noFill/>
+          </a:ln>
+        </p:spPr>
+        <p:style>
+          <a:lnRef idx="1">
+            <a:schemeClr val="accent1"/>
+          </a:lnRef>
+          <a:fillRef idx="3">
+            <a:schemeClr val="accent1"/>
+          </a:fillRef>
+          <a:effectRef idx="2">
+            <a:schemeClr val="accent1"/>
+          </a:effectRef>
+          <a:fontRef idx="minor">
+            <a:schemeClr val="lt1"/>
+          </a:fontRef>
+        </p:style>
+        <p:txBody>
+          <a:bodyPr rtlCol="0" anchor="ctr"/>
+          <a:lstStyle/>
+          <a:p>
+            <a:pPr algn="ctr"/>
+          </a:p>
+        </p:txBody>
+      </p:sp>
+      <p:sp>
+        <p:nvSpPr>
+          <p:cNvPr id="5" name="TextBox 4"/>
           <p:cNvSpPr txBox="1"/>
           <p:nvPr/>
         </p:nvSpPr>
         <p:spPr>
           <a:xfrm>
-            <a:off x="548640" y="182880"/>
-            <a:ext cx="10058400" cy="640080"/>
+            <a:off x="731520" y="137160"/>
+            <a:ext cx="10728655" cy="640080"/>
           </a:xfrm>
           <a:prstGeom prst="rect">
             <a:avLst/>
@@ -7061,9 +7233,9 @@
           <a:lstStyle/>
           <a:p>
             <a:pPr algn="l">
-              <a:defRPr sz="2600" b="1">
+              <a:defRPr sz="2400" b="1">
                 <a:solidFill>
-                  <a:srgbClr val="FFFFFF"/>
+                  <a:srgbClr val="F0F4FC"/>
                 </a:solidFill>
                 <a:latin typeface="Microsoft YaHei"/>
               </a:defRPr>
@@ -7076,20 +7248,20 @@
       </p:sp>
       <p:sp>
         <p:nvSpPr>
-          <p:cNvPr id="5" name="Rectangle 4"/>
-          <p:cNvSpPr/>
-          <p:nvPr/>
-        </p:nvSpPr>
-        <p:spPr>
-          <a:xfrm>
-            <a:off x="0" y="1051560"/>
-            <a:ext cx="12191695" cy="25400"/>
-          </a:xfrm>
-          <a:prstGeom prst="rect">
-            <a:avLst/>
-          </a:prstGeom>
-          <a:solidFill>
-            <a:srgbClr val="F59E0B"/>
+          <p:cNvPr id="6" name="Rectangle 5"/>
+          <p:cNvSpPr/>
+          <p:nvPr/>
+        </p:nvSpPr>
+        <p:spPr>
+          <a:xfrm>
+            <a:off x="0" y="1078992"/>
+            <a:ext cx="12191695" cy="12700"/>
+          </a:xfrm>
+          <a:prstGeom prst="rect">
+            <a:avLst/>
+          </a:prstGeom>
+          <a:solidFill>
+            <a:srgbClr val="253350"/>
           </a:solidFill>
           <a:ln>
             <a:noFill/>
@@ -7119,24 +7291,24 @@
       </p:sp>
       <p:sp>
         <p:nvSpPr>
-          <p:cNvPr id="6" name="Rounded Rectangle 5"/>
-          <p:cNvSpPr/>
-          <p:nvPr/>
-        </p:nvSpPr>
-        <p:spPr>
-          <a:xfrm>
-            <a:off x="548640" y="1371600"/>
-            <a:ext cx="3383280" cy="1005840"/>
+          <p:cNvPr id="7" name="Rounded Rectangle 6"/>
+          <p:cNvSpPr/>
+          <p:nvPr/>
+        </p:nvSpPr>
+        <p:spPr>
+          <a:xfrm>
+            <a:off x="594360" y="1371600"/>
+            <a:ext cx="3383280" cy="960120"/>
           </a:xfrm>
           <a:prstGeom prst="roundRect">
             <a:avLst/>
           </a:prstGeom>
           <a:solidFill>
-            <a:srgbClr val="141E33"/>
-          </a:solidFill>
-          <a:ln w="19050">
+            <a:srgbClr val="161F35"/>
+          </a:solidFill>
+          <a:ln w="12700">
             <a:solidFill>
-              <a:srgbClr val="F59E0B"/>
+              <a:srgbClr val="253350"/>
             </a:solidFill>
           </a:ln>
         </p:spPr>
@@ -7164,14 +7336,14 @@
       </p:sp>
       <p:sp>
         <p:nvSpPr>
-          <p:cNvPr id="7" name="Oval 6"/>
-          <p:cNvSpPr/>
-          <p:nvPr/>
-        </p:nvSpPr>
-        <p:spPr>
-          <a:xfrm>
-            <a:off x="685800" y="1600200"/>
-            <a:ext cx="457200" cy="457200"/>
+          <p:cNvPr id="8" name="Oval 7"/>
+          <p:cNvSpPr/>
+          <p:nvPr/>
+        </p:nvSpPr>
+        <p:spPr>
+          <a:xfrm>
+            <a:off x="704088" y="1572768"/>
+            <a:ext cx="411480" cy="411480"/>
           </a:xfrm>
           <a:prstGeom prst="ellipse">
             <a:avLst/>
@@ -7207,14 +7379,14 @@
       </p:sp>
       <p:sp>
         <p:nvSpPr>
-          <p:cNvPr id="8" name="TextBox 7"/>
+          <p:cNvPr id="9" name="TextBox 8"/>
           <p:cNvSpPr txBox="1"/>
           <p:nvPr/>
         </p:nvSpPr>
         <p:spPr>
           <a:xfrm>
-            <a:off x="685800" y="1600200"/>
-            <a:ext cx="457200" cy="457200"/>
+            <a:off x="704088" y="1572768"/>
+            <a:ext cx="411480" cy="411480"/>
           </a:xfrm>
           <a:prstGeom prst="rect">
             <a:avLst/>
@@ -7228,9 +7400,9 @@
           <a:lstStyle/>
           <a:p>
             <a:pPr algn="ctr">
-              <a:defRPr sz="1400" b="1">
+              <a:defRPr sz="1200" b="1">
                 <a:solidFill>
-                  <a:srgbClr val="FFFFFF"/>
+                  <a:srgbClr val="F0F4FC"/>
                 </a:solidFill>
                 <a:latin typeface="Microsoft YaHei"/>
               </a:defRPr>
@@ -7243,14 +7415,14 @@
       </p:sp>
       <p:sp>
         <p:nvSpPr>
-          <p:cNvPr id="9" name="TextBox 8"/>
+          <p:cNvPr id="10" name="TextBox 9"/>
           <p:cNvSpPr txBox="1"/>
           <p:nvPr/>
         </p:nvSpPr>
         <p:spPr>
           <a:xfrm>
-            <a:off x="1280160" y="1554480"/>
-            <a:ext cx="2468880" cy="640080"/>
+            <a:off x="1234440" y="1536192"/>
+            <a:ext cx="2560320" cy="594360"/>
           </a:xfrm>
           <a:prstGeom prst="rect">
             <a:avLst/>
@@ -7264,9 +7436,9 @@
           <a:lstStyle/>
           <a:p>
             <a:pPr algn="l">
-              <a:defRPr sz="1300" b="0">
+              <a:defRPr sz="1200" b="0">
                 <a:solidFill>
-                  <a:srgbClr val="CBD5E8"/>
+                  <a:srgbClr val="A0AEC4"/>
                 </a:solidFill>
                 <a:latin typeface="Microsoft YaHei"/>
               </a:defRPr>
@@ -7279,24 +7451,24 @@
       </p:sp>
       <p:sp>
         <p:nvSpPr>
-          <p:cNvPr id="10" name="Rounded Rectangle 9"/>
+          <p:cNvPr id="11" name="Rounded Rectangle 10"/>
           <p:cNvSpPr/>
           <p:nvPr/>
         </p:nvSpPr>
         <p:spPr>
           <a:xfrm>
             <a:off x="4251960" y="1371600"/>
-            <a:ext cx="3383280" cy="1005840"/>
+            <a:ext cx="3383280" cy="960120"/>
           </a:xfrm>
           <a:prstGeom prst="roundRect">
             <a:avLst/>
           </a:prstGeom>
           <a:solidFill>
-            <a:srgbClr val="141E33"/>
-          </a:solidFill>
-          <a:ln w="19050">
+            <a:srgbClr val="161F35"/>
+          </a:solidFill>
+          <a:ln w="12700">
             <a:solidFill>
-              <a:srgbClr val="F59E0B"/>
+              <a:srgbClr val="253350"/>
             </a:solidFill>
           </a:ln>
         </p:spPr>
@@ -7324,14 +7496,14 @@
       </p:sp>
       <p:sp>
         <p:nvSpPr>
-          <p:cNvPr id="11" name="Oval 10"/>
-          <p:cNvSpPr/>
-          <p:nvPr/>
-        </p:nvSpPr>
-        <p:spPr>
-          <a:xfrm>
-            <a:off x="4389120" y="1600200"/>
-            <a:ext cx="457200" cy="457200"/>
+          <p:cNvPr id="12" name="Oval 11"/>
+          <p:cNvSpPr/>
+          <p:nvPr/>
+        </p:nvSpPr>
+        <p:spPr>
+          <a:xfrm>
+            <a:off x="4361688" y="1572768"/>
+            <a:ext cx="411480" cy="411480"/>
           </a:xfrm>
           <a:prstGeom prst="ellipse">
             <a:avLst/>
@@ -7367,14 +7539,14 @@
       </p:sp>
       <p:sp>
         <p:nvSpPr>
-          <p:cNvPr id="12" name="TextBox 11"/>
+          <p:cNvPr id="13" name="TextBox 12"/>
           <p:cNvSpPr txBox="1"/>
           <p:nvPr/>
         </p:nvSpPr>
         <p:spPr>
           <a:xfrm>
-            <a:off x="4389120" y="1600200"/>
-            <a:ext cx="457200" cy="457200"/>
+            <a:off x="4361688" y="1572768"/>
+            <a:ext cx="411480" cy="411480"/>
           </a:xfrm>
           <a:prstGeom prst="rect">
             <a:avLst/>
@@ -7388,9 +7560,9 @@
           <a:lstStyle/>
           <a:p>
             <a:pPr algn="ctr">
-              <a:defRPr sz="1400" b="1">
+              <a:defRPr sz="1200" b="1">
                 <a:solidFill>
-                  <a:srgbClr val="FFFFFF"/>
+                  <a:srgbClr val="F0F4FC"/>
                 </a:solidFill>
                 <a:latin typeface="Microsoft YaHei"/>
               </a:defRPr>
@@ -7403,14 +7575,14 @@
       </p:sp>
       <p:sp>
         <p:nvSpPr>
-          <p:cNvPr id="13" name="TextBox 12"/>
+          <p:cNvPr id="14" name="TextBox 13"/>
           <p:cNvSpPr txBox="1"/>
           <p:nvPr/>
         </p:nvSpPr>
         <p:spPr>
           <a:xfrm>
-            <a:off x="4983480" y="1554480"/>
-            <a:ext cx="2468880" cy="640080"/>
+            <a:off x="4892040" y="1536192"/>
+            <a:ext cx="2560320" cy="594360"/>
           </a:xfrm>
           <a:prstGeom prst="rect">
             <a:avLst/>
@@ -7424,9 +7596,9 @@
           <a:lstStyle/>
           <a:p>
             <a:pPr algn="l">
-              <a:defRPr sz="1300" b="0">
+              <a:defRPr sz="1200" b="0">
                 <a:solidFill>
-                  <a:srgbClr val="CBD5E8"/>
+                  <a:srgbClr val="A0AEC4"/>
                 </a:solidFill>
                 <a:latin typeface="Microsoft YaHei"/>
               </a:defRPr>
@@ -7439,24 +7611,24 @@
       </p:sp>
       <p:sp>
         <p:nvSpPr>
-          <p:cNvPr id="14" name="Rounded Rectangle 13"/>
-          <p:cNvSpPr/>
-          <p:nvPr/>
-        </p:nvSpPr>
-        <p:spPr>
-          <a:xfrm>
-            <a:off x="7955280" y="1371600"/>
-            <a:ext cx="3383280" cy="1005840"/>
+          <p:cNvPr id="15" name="Rounded Rectangle 14"/>
+          <p:cNvSpPr/>
+          <p:nvPr/>
+        </p:nvSpPr>
+        <p:spPr>
+          <a:xfrm>
+            <a:off x="7909560" y="1371600"/>
+            <a:ext cx="3383280" cy="960120"/>
           </a:xfrm>
           <a:prstGeom prst="roundRect">
             <a:avLst/>
           </a:prstGeom>
           <a:solidFill>
-            <a:srgbClr val="141E33"/>
-          </a:solidFill>
-          <a:ln w="19050">
+            <a:srgbClr val="161F35"/>
+          </a:solidFill>
+          <a:ln w="12700">
             <a:solidFill>
-              <a:srgbClr val="F59E0B"/>
+              <a:srgbClr val="253350"/>
             </a:solidFill>
           </a:ln>
         </p:spPr>
@@ -7484,14 +7656,14 @@
       </p:sp>
       <p:sp>
         <p:nvSpPr>
-          <p:cNvPr id="15" name="Oval 14"/>
-          <p:cNvSpPr/>
-          <p:nvPr/>
-        </p:nvSpPr>
-        <p:spPr>
-          <a:xfrm>
-            <a:off x="8092440" y="1600200"/>
-            <a:ext cx="457200" cy="457200"/>
+          <p:cNvPr id="16" name="Oval 15"/>
+          <p:cNvSpPr/>
+          <p:nvPr/>
+        </p:nvSpPr>
+        <p:spPr>
+          <a:xfrm>
+            <a:off x="8019288" y="1572768"/>
+            <a:ext cx="411480" cy="411480"/>
           </a:xfrm>
           <a:prstGeom prst="ellipse">
             <a:avLst/>
@@ -7527,14 +7699,14 @@
       </p:sp>
       <p:sp>
         <p:nvSpPr>
-          <p:cNvPr id="16" name="TextBox 15"/>
+          <p:cNvPr id="17" name="TextBox 16"/>
           <p:cNvSpPr txBox="1"/>
           <p:nvPr/>
         </p:nvSpPr>
         <p:spPr>
           <a:xfrm>
-            <a:off x="8092440" y="1600200"/>
-            <a:ext cx="457200" cy="457200"/>
+            <a:off x="8019288" y="1572768"/>
+            <a:ext cx="411480" cy="411480"/>
           </a:xfrm>
           <a:prstGeom prst="rect">
             <a:avLst/>
@@ -7548,9 +7720,9 @@
           <a:lstStyle/>
           <a:p>
             <a:pPr algn="ctr">
-              <a:defRPr sz="1400" b="1">
+              <a:defRPr sz="1200" b="1">
                 <a:solidFill>
-                  <a:srgbClr val="FFFFFF"/>
+                  <a:srgbClr val="F0F4FC"/>
                 </a:solidFill>
                 <a:latin typeface="Microsoft YaHei"/>
               </a:defRPr>
@@ -7563,14 +7735,14 @@
       </p:sp>
       <p:sp>
         <p:nvSpPr>
-          <p:cNvPr id="17" name="TextBox 16"/>
+          <p:cNvPr id="18" name="TextBox 17"/>
           <p:cNvSpPr txBox="1"/>
           <p:nvPr/>
         </p:nvSpPr>
         <p:spPr>
           <a:xfrm>
-            <a:off x="8686800" y="1554480"/>
-            <a:ext cx="2468880" cy="640080"/>
+            <a:off x="8549640" y="1536192"/>
+            <a:ext cx="2560320" cy="594360"/>
           </a:xfrm>
           <a:prstGeom prst="rect">
             <a:avLst/>
@@ -7584,9 +7756,9 @@
           <a:lstStyle/>
           <a:p>
             <a:pPr algn="l">
-              <a:defRPr sz="1300" b="0">
+              <a:defRPr sz="1200" b="0">
                 <a:solidFill>
-                  <a:srgbClr val="CBD5E8"/>
+                  <a:srgbClr val="A0AEC4"/>
                 </a:solidFill>
                 <a:latin typeface="Microsoft YaHei"/>
               </a:defRPr>
@@ -7599,24 +7771,24 @@
       </p:sp>
       <p:sp>
         <p:nvSpPr>
-          <p:cNvPr id="18" name="Rounded Rectangle 17"/>
-          <p:cNvSpPr/>
-          <p:nvPr/>
-        </p:nvSpPr>
-        <p:spPr>
-          <a:xfrm>
-            <a:off x="548640" y="2606040"/>
-            <a:ext cx="3383280" cy="1005840"/>
+          <p:cNvPr id="19" name="Rounded Rectangle 18"/>
+          <p:cNvSpPr/>
+          <p:nvPr/>
+        </p:nvSpPr>
+        <p:spPr>
+          <a:xfrm>
+            <a:off x="594360" y="2606040"/>
+            <a:ext cx="3383280" cy="960120"/>
           </a:xfrm>
           <a:prstGeom prst="roundRect">
             <a:avLst/>
           </a:prstGeom>
           <a:solidFill>
-            <a:srgbClr val="141E33"/>
-          </a:solidFill>
-          <a:ln w="19050">
+            <a:srgbClr val="161F35"/>
+          </a:solidFill>
+          <a:ln w="12700">
             <a:solidFill>
-              <a:srgbClr val="F59E0B"/>
+              <a:srgbClr val="253350"/>
             </a:solidFill>
           </a:ln>
         </p:spPr>
@@ -7644,14 +7816,14 @@
       </p:sp>
       <p:sp>
         <p:nvSpPr>
-          <p:cNvPr id="19" name="Oval 18"/>
-          <p:cNvSpPr/>
-          <p:nvPr/>
-        </p:nvSpPr>
-        <p:spPr>
-          <a:xfrm>
-            <a:off x="685800" y="2834640"/>
-            <a:ext cx="457200" cy="457200"/>
+          <p:cNvPr id="20" name="Oval 19"/>
+          <p:cNvSpPr/>
+          <p:nvPr/>
+        </p:nvSpPr>
+        <p:spPr>
+          <a:xfrm>
+            <a:off x="704088" y="2807208"/>
+            <a:ext cx="411480" cy="411480"/>
           </a:xfrm>
           <a:prstGeom prst="ellipse">
             <a:avLst/>
@@ -7687,14 +7859,14 @@
       </p:sp>
       <p:sp>
         <p:nvSpPr>
-          <p:cNvPr id="20" name="TextBox 19"/>
+          <p:cNvPr id="21" name="TextBox 20"/>
           <p:cNvSpPr txBox="1"/>
           <p:nvPr/>
         </p:nvSpPr>
         <p:spPr>
           <a:xfrm>
-            <a:off x="685800" y="2834640"/>
-            <a:ext cx="457200" cy="457200"/>
+            <a:off x="704088" y="2807208"/>
+            <a:ext cx="411480" cy="411480"/>
           </a:xfrm>
           <a:prstGeom prst="rect">
             <a:avLst/>
@@ -7708,9 +7880,9 @@
           <a:lstStyle/>
           <a:p>
             <a:pPr algn="ctr">
-              <a:defRPr sz="1400" b="1">
+              <a:defRPr sz="1200" b="1">
                 <a:solidFill>
-                  <a:srgbClr val="FFFFFF"/>
+                  <a:srgbClr val="F0F4FC"/>
                 </a:solidFill>
                 <a:latin typeface="Microsoft YaHei"/>
               </a:defRPr>
@@ -7723,14 +7895,14 @@
       </p:sp>
       <p:sp>
         <p:nvSpPr>
-          <p:cNvPr id="21" name="TextBox 20"/>
+          <p:cNvPr id="22" name="TextBox 21"/>
           <p:cNvSpPr txBox="1"/>
           <p:nvPr/>
         </p:nvSpPr>
         <p:spPr>
           <a:xfrm>
-            <a:off x="1280160" y="2788920"/>
-            <a:ext cx="2468880" cy="640080"/>
+            <a:off x="1234440" y="2770632"/>
+            <a:ext cx="2560320" cy="594360"/>
           </a:xfrm>
           <a:prstGeom prst="rect">
             <a:avLst/>
@@ -7744,9 +7916,9 @@
           <a:lstStyle/>
           <a:p>
             <a:pPr algn="l">
-              <a:defRPr sz="1300" b="0">
+              <a:defRPr sz="1200" b="0">
                 <a:solidFill>
-                  <a:srgbClr val="CBD5E8"/>
+                  <a:srgbClr val="A0AEC4"/>
                 </a:solidFill>
                 <a:latin typeface="Microsoft YaHei"/>
               </a:defRPr>
@@ -7759,24 +7931,24 @@
       </p:sp>
       <p:sp>
         <p:nvSpPr>
-          <p:cNvPr id="22" name="Rounded Rectangle 21"/>
+          <p:cNvPr id="23" name="Rounded Rectangle 22"/>
           <p:cNvSpPr/>
           <p:nvPr/>
         </p:nvSpPr>
         <p:spPr>
           <a:xfrm>
             <a:off x="4251960" y="2606040"/>
-            <a:ext cx="3383280" cy="1005840"/>
+            <a:ext cx="3383280" cy="960120"/>
           </a:xfrm>
           <a:prstGeom prst="roundRect">
             <a:avLst/>
           </a:prstGeom>
           <a:solidFill>
-            <a:srgbClr val="141E33"/>
-          </a:solidFill>
-          <a:ln w="19050">
+            <a:srgbClr val="161F35"/>
+          </a:solidFill>
+          <a:ln w="12700">
             <a:solidFill>
-              <a:srgbClr val="F59E0B"/>
+              <a:srgbClr val="253350"/>
             </a:solidFill>
           </a:ln>
         </p:spPr>
@@ -7804,14 +7976,14 @@
       </p:sp>
       <p:sp>
         <p:nvSpPr>
-          <p:cNvPr id="23" name="Oval 22"/>
-          <p:cNvSpPr/>
-          <p:nvPr/>
-        </p:nvSpPr>
-        <p:spPr>
-          <a:xfrm>
-            <a:off x="4389120" y="2834640"/>
-            <a:ext cx="457200" cy="457200"/>
+          <p:cNvPr id="24" name="Oval 23"/>
+          <p:cNvSpPr/>
+          <p:nvPr/>
+        </p:nvSpPr>
+        <p:spPr>
+          <a:xfrm>
+            <a:off x="4361688" y="2807208"/>
+            <a:ext cx="411480" cy="411480"/>
           </a:xfrm>
           <a:prstGeom prst="ellipse">
             <a:avLst/>
@@ -7847,14 +8019,14 @@
       </p:sp>
       <p:sp>
         <p:nvSpPr>
-          <p:cNvPr id="24" name="TextBox 23"/>
+          <p:cNvPr id="25" name="TextBox 24"/>
           <p:cNvSpPr txBox="1"/>
           <p:nvPr/>
         </p:nvSpPr>
         <p:spPr>
           <a:xfrm>
-            <a:off x="4389120" y="2834640"/>
-            <a:ext cx="457200" cy="457200"/>
+            <a:off x="4361688" y="2807208"/>
+            <a:ext cx="411480" cy="411480"/>
           </a:xfrm>
           <a:prstGeom prst="rect">
             <a:avLst/>
@@ -7868,9 +8040,9 @@
           <a:lstStyle/>
           <a:p>
             <a:pPr algn="ctr">
-              <a:defRPr sz="1400" b="1">
+              <a:defRPr sz="1200" b="1">
                 <a:solidFill>
-                  <a:srgbClr val="FFFFFF"/>
+                  <a:srgbClr val="F0F4FC"/>
                 </a:solidFill>
                 <a:latin typeface="Microsoft YaHei"/>
               </a:defRPr>
@@ -7883,14 +8055,14 @@
       </p:sp>
       <p:sp>
         <p:nvSpPr>
-          <p:cNvPr id="25" name="TextBox 24"/>
+          <p:cNvPr id="26" name="TextBox 25"/>
           <p:cNvSpPr txBox="1"/>
           <p:nvPr/>
         </p:nvSpPr>
         <p:spPr>
           <a:xfrm>
-            <a:off x="4983480" y="2788920"/>
-            <a:ext cx="2468880" cy="640080"/>
+            <a:off x="4892040" y="2770632"/>
+            <a:ext cx="2560320" cy="594360"/>
           </a:xfrm>
           <a:prstGeom prst="rect">
             <a:avLst/>
@@ -7904,9 +8076,9 @@
           <a:lstStyle/>
           <a:p>
             <a:pPr algn="l">
-              <a:defRPr sz="1300" b="0">
+              <a:defRPr sz="1200" b="0">
                 <a:solidFill>
-                  <a:srgbClr val="CBD5E8"/>
+                  <a:srgbClr val="A0AEC4"/>
                 </a:solidFill>
                 <a:latin typeface="Microsoft YaHei"/>
               </a:defRPr>
@@ -7919,24 +8091,24 @@
       </p:sp>
       <p:sp>
         <p:nvSpPr>
-          <p:cNvPr id="26" name="Rounded Rectangle 25"/>
-          <p:cNvSpPr/>
-          <p:nvPr/>
-        </p:nvSpPr>
-        <p:spPr>
-          <a:xfrm>
-            <a:off x="7955280" y="2606040"/>
-            <a:ext cx="3383280" cy="1005840"/>
+          <p:cNvPr id="27" name="Rounded Rectangle 26"/>
+          <p:cNvSpPr/>
+          <p:nvPr/>
+        </p:nvSpPr>
+        <p:spPr>
+          <a:xfrm>
+            <a:off x="7909560" y="2606040"/>
+            <a:ext cx="3383280" cy="960120"/>
           </a:xfrm>
           <a:prstGeom prst="roundRect">
             <a:avLst/>
           </a:prstGeom>
           <a:solidFill>
-            <a:srgbClr val="141E33"/>
-          </a:solidFill>
-          <a:ln w="19050">
+            <a:srgbClr val="161F35"/>
+          </a:solidFill>
+          <a:ln w="12700">
             <a:solidFill>
-              <a:srgbClr val="F59E0B"/>
+              <a:srgbClr val="253350"/>
             </a:solidFill>
           </a:ln>
         </p:spPr>
@@ -7964,14 +8136,14 @@
       </p:sp>
       <p:sp>
         <p:nvSpPr>
-          <p:cNvPr id="27" name="Oval 26"/>
-          <p:cNvSpPr/>
-          <p:nvPr/>
-        </p:nvSpPr>
-        <p:spPr>
-          <a:xfrm>
-            <a:off x="8092440" y="2834640"/>
-            <a:ext cx="457200" cy="457200"/>
+          <p:cNvPr id="28" name="Oval 27"/>
+          <p:cNvSpPr/>
+          <p:nvPr/>
+        </p:nvSpPr>
+        <p:spPr>
+          <a:xfrm>
+            <a:off x="8019288" y="2807208"/>
+            <a:ext cx="411480" cy="411480"/>
           </a:xfrm>
           <a:prstGeom prst="ellipse">
             <a:avLst/>
@@ -8007,14 +8179,14 @@
       </p:sp>
       <p:sp>
         <p:nvSpPr>
-          <p:cNvPr id="28" name="TextBox 27"/>
+          <p:cNvPr id="29" name="TextBox 28"/>
           <p:cNvSpPr txBox="1"/>
           <p:nvPr/>
         </p:nvSpPr>
         <p:spPr>
           <a:xfrm>
-            <a:off x="8092440" y="2834640"/>
-            <a:ext cx="457200" cy="457200"/>
+            <a:off x="8019288" y="2807208"/>
+            <a:ext cx="411480" cy="411480"/>
           </a:xfrm>
           <a:prstGeom prst="rect">
             <a:avLst/>
@@ -8028,9 +8200,9 @@
           <a:lstStyle/>
           <a:p>
             <a:pPr algn="ctr">
-              <a:defRPr sz="1400" b="1">
+              <a:defRPr sz="1200" b="1">
                 <a:solidFill>
-                  <a:srgbClr val="FFFFFF"/>
+                  <a:srgbClr val="F0F4FC"/>
                 </a:solidFill>
                 <a:latin typeface="Microsoft YaHei"/>
               </a:defRPr>
@@ -8043,14 +8215,14 @@
       </p:sp>
       <p:sp>
         <p:nvSpPr>
-          <p:cNvPr id="29" name="TextBox 28"/>
+          <p:cNvPr id="30" name="TextBox 29"/>
           <p:cNvSpPr txBox="1"/>
           <p:nvPr/>
         </p:nvSpPr>
         <p:spPr>
           <a:xfrm>
-            <a:off x="8686800" y="2788920"/>
-            <a:ext cx="2468880" cy="640080"/>
+            <a:off x="8549640" y="2770632"/>
+            <a:ext cx="2560320" cy="594360"/>
           </a:xfrm>
           <a:prstGeom prst="rect">
             <a:avLst/>
@@ -8064,9 +8236,9 @@
           <a:lstStyle/>
           <a:p>
             <a:pPr algn="l">
-              <a:defRPr sz="1300" b="0">
+              <a:defRPr sz="1200" b="0">
                 <a:solidFill>
-                  <a:srgbClr val="CBD5E8"/>
+                  <a:srgbClr val="A0AEC4"/>
                 </a:solidFill>
                 <a:latin typeface="Microsoft YaHei"/>
               </a:defRPr>
@@ -8079,20 +8251,20 @@
       </p:sp>
       <p:sp>
         <p:nvSpPr>
-          <p:cNvPr id="30" name="Rectangle 29"/>
+          <p:cNvPr id="31" name="Rectangle 30"/>
           <p:cNvSpPr/>
           <p:nvPr/>
         </p:nvSpPr>
         <p:spPr>
           <a:xfrm>
             <a:off x="0" y="6446520"/>
-            <a:ext cx="12191695" cy="19050"/>
-          </a:xfrm>
-          <a:prstGeom prst="rect">
-            <a:avLst/>
-          </a:prstGeom>
-          <a:solidFill>
-            <a:srgbClr val="2D3B55"/>
+            <a:ext cx="12191695" cy="12700"/>
+          </a:xfrm>
+          <a:prstGeom prst="rect">
+            <a:avLst/>
+          </a:prstGeom>
+          <a:solidFill>
+            <a:srgbClr val="253350"/>
           </a:solidFill>
           <a:ln>
             <a:noFill/>
@@ -8122,14 +8294,14 @@
       </p:sp>
       <p:sp>
         <p:nvSpPr>
-          <p:cNvPr id="31" name="TextBox 30"/>
+          <p:cNvPr id="32" name="TextBox 31"/>
           <p:cNvSpPr txBox="1"/>
           <p:nvPr/>
         </p:nvSpPr>
         <p:spPr>
           <a:xfrm>
-            <a:off x="457200" y="6492240"/>
-            <a:ext cx="5486400" cy="274320"/>
+            <a:off x="731520" y="6492240"/>
+            <a:ext cx="4572000" cy="274320"/>
           </a:xfrm>
           <a:prstGeom prst="rect">
             <a:avLst/>
@@ -8145,20 +8317,20 @@
             <a:pPr algn="l">
               <a:defRPr sz="900" b="0">
                 <a:solidFill>
-                  <a:srgbClr val="6B7B9E"/>
+                  <a:srgbClr val="607090"/>
                 </a:solidFill>
                 <a:latin typeface="Microsoft YaHei"/>
               </a:defRPr>
             </a:pPr>
             <a:r>
-              <a:t>模块14：工业化生产</a:t>
-            </a:r>
-          </a:p>
-        </p:txBody>
-      </p:sp>
-      <p:sp>
-        <p:nvSpPr>
-          <p:cNvPr id="32" name="TextBox 31"/>
+              <a:t>模块14 · 工业化生产</a:t>
+            </a:r>
+          </a:p>
+        </p:txBody>
+      </p:sp>
+      <p:sp>
+        <p:nvSpPr>
+          <p:cNvPr id="33" name="TextBox 32"/>
           <p:cNvSpPr txBox="1"/>
           <p:nvPr/>
         </p:nvSpPr>
@@ -8181,7 +8353,7 @@
             <a:pPr algn="r">
               <a:defRPr sz="900" b="0">
                 <a:solidFill>
-                  <a:srgbClr val="6B7B9E"/>
+                  <a:srgbClr val="607090"/>
                 </a:solidFill>
                 <a:latin typeface="Microsoft YaHei"/>
               </a:defRPr>
@@ -8206,7 +8378,7 @@
     <p:bg>
       <p:bgPr>
         <a:solidFill>
-          <a:srgbClr val="0B1120"/>
+          <a:srgbClr val="0A0E1A"/>
         </a:solidFill>
         <a:effectLst/>
       </p:bgPr>
@@ -8227,13 +8399,13 @@
         <p:spPr>
           <a:xfrm>
             <a:off x="0" y="0"/>
-            <a:ext cx="12191695" cy="1051560"/>
-          </a:xfrm>
-          <a:prstGeom prst="rect">
-            <a:avLst/>
-          </a:prstGeom>
-          <a:solidFill>
-            <a:srgbClr val="141E33"/>
+            <a:ext cx="12191695" cy="38100"/>
+          </a:xfrm>
+          <a:prstGeom prst="rect">
+            <a:avLst/>
+          </a:prstGeom>
+          <a:solidFill>
+            <a:srgbClr val="F59E0B"/>
           </a:solidFill>
           <a:ln>
             <a:noFill/>
@@ -8269,14 +8441,14 @@
         </p:nvSpPr>
         <p:spPr>
           <a:xfrm>
-            <a:off x="0" y="0"/>
-            <a:ext cx="109728" cy="1051560"/>
-          </a:xfrm>
-          <a:prstGeom prst="rect">
-            <a:avLst/>
-          </a:prstGeom>
-          <a:solidFill>
-            <a:srgbClr val="F59E0B"/>
+            <a:off x="0" y="38100"/>
+            <a:ext cx="12191695" cy="914400"/>
+          </a:xfrm>
+          <a:prstGeom prst="rect">
+            <a:avLst/>
+          </a:prstGeom>
+          <a:solidFill>
+            <a:srgbClr val="161F35"/>
           </a:solidFill>
           <a:ln>
             <a:noFill/>
@@ -8306,14 +8478,57 @@
       </p:sp>
       <p:sp>
         <p:nvSpPr>
-          <p:cNvPr id="4" name="TextBox 3"/>
+          <p:cNvPr id="4" name="Rectangle 3"/>
+          <p:cNvSpPr/>
+          <p:nvPr/>
+        </p:nvSpPr>
+        <p:spPr>
+          <a:xfrm>
+            <a:off x="0" y="38100"/>
+            <a:ext cx="91440" cy="914400"/>
+          </a:xfrm>
+          <a:prstGeom prst="rect">
+            <a:avLst/>
+          </a:prstGeom>
+          <a:solidFill>
+            <a:srgbClr val="F59E0B"/>
+          </a:solidFill>
+          <a:ln>
+            <a:noFill/>
+          </a:ln>
+        </p:spPr>
+        <p:style>
+          <a:lnRef idx="1">
+            <a:schemeClr val="accent1"/>
+          </a:lnRef>
+          <a:fillRef idx="3">
+            <a:schemeClr val="accent1"/>
+          </a:fillRef>
+          <a:effectRef idx="2">
+            <a:schemeClr val="accent1"/>
+          </a:effectRef>
+          <a:fontRef idx="minor">
+            <a:schemeClr val="lt1"/>
+          </a:fontRef>
+        </p:style>
+        <p:txBody>
+          <a:bodyPr rtlCol="0" anchor="ctr"/>
+          <a:lstStyle/>
+          <a:p>
+            <a:pPr algn="ctr"/>
+          </a:p>
+        </p:txBody>
+      </p:sp>
+      <p:sp>
+        <p:nvSpPr>
+          <p:cNvPr id="5" name="TextBox 4"/>
           <p:cNvSpPr txBox="1"/>
           <p:nvPr/>
         </p:nvSpPr>
         <p:spPr>
           <a:xfrm>
-            <a:off x="548640" y="182880"/>
-            <a:ext cx="10058400" cy="640080"/>
+            <a:off x="731520" y="137160"/>
+            <a:ext cx="10728655" cy="640080"/>
           </a:xfrm>
           <a:prstGeom prst="rect">
             <a:avLst/>
@@ -8327,35 +8542,35 @@
           <a:lstStyle/>
           <a:p>
             <a:pPr algn="l">
-              <a:defRPr sz="2600" b="1">
+              <a:defRPr sz="2400" b="1">
                 <a:solidFill>
-                  <a:srgbClr val="FFFFFF"/>
+                  <a:srgbClr val="F0F4FC"/>
                 </a:solidFill>
                 <a:latin typeface="Microsoft YaHei"/>
               </a:defRPr>
             </a:pPr>
             <a:r>
-              <a:t>⏱️ AI漫剧工业化流水线</a:t>
-            </a:r>
-          </a:p>
-        </p:txBody>
-      </p:sp>
-      <p:sp>
-        <p:nvSpPr>
-          <p:cNvPr id="5" name="Rectangle 4"/>
-          <p:cNvSpPr/>
-          <p:nvPr/>
-        </p:nvSpPr>
-        <p:spPr>
-          <a:xfrm>
-            <a:off x="0" y="1051560"/>
-            <a:ext cx="12191695" cy="25400"/>
-          </a:xfrm>
-          <a:prstGeom prst="rect">
-            <a:avLst/>
-          </a:prstGeom>
-          <a:solidFill>
-            <a:srgbClr val="F59E0B"/>
+              <a:t>⏱️ ⏱️ AI漫剧工业化流水线</a:t>
+            </a:r>
+          </a:p>
+        </p:txBody>
+      </p:sp>
+      <p:sp>
+        <p:nvSpPr>
+          <p:cNvPr id="6" name="Rectangle 5"/>
+          <p:cNvSpPr/>
+          <p:nvPr/>
+        </p:nvSpPr>
+        <p:spPr>
+          <a:xfrm>
+            <a:off x="0" y="1078992"/>
+            <a:ext cx="12191695" cy="12700"/>
+          </a:xfrm>
+          <a:prstGeom prst="rect">
+            <a:avLst/>
+          </a:prstGeom>
+          <a:solidFill>
+            <a:srgbClr val="253350"/>
           </a:solidFill>
           <a:ln>
             <a:noFill/>
@@ -8385,20 +8600,20 @@
       </p:sp>
       <p:sp>
         <p:nvSpPr>
-          <p:cNvPr id="6" name="Rectangle 5"/>
-          <p:cNvSpPr/>
-          <p:nvPr/>
-        </p:nvSpPr>
-        <p:spPr>
-          <a:xfrm>
-            <a:off x="731520" y="3200400"/>
-            <a:ext cx="10698480" cy="38100"/>
-          </a:xfrm>
-          <a:prstGeom prst="rect">
-            <a:avLst/>
-          </a:prstGeom>
-          <a:solidFill>
-            <a:srgbClr val="2D3B55"/>
+          <p:cNvPr id="7" name="Rectangle 6"/>
+          <p:cNvSpPr/>
+          <p:nvPr/>
+        </p:nvSpPr>
+        <p:spPr>
+          <a:xfrm>
+            <a:off x="914400" y="3200400"/>
+            <a:ext cx="10332720" cy="25400"/>
+          </a:xfrm>
+          <a:prstGeom prst="rect">
+            <a:avLst/>
+          </a:prstGeom>
+          <a:solidFill>
+            <a:srgbClr val="253350"/>
           </a:solidFill>
           <a:ln>
             <a:noFill/>
@@ -8428,20 +8643,20 @@
       </p:sp>
       <p:sp>
         <p:nvSpPr>
-          <p:cNvPr id="7" name="Oval 6"/>
-          <p:cNvSpPr/>
-          <p:nvPr/>
-        </p:nvSpPr>
-        <p:spPr>
-          <a:xfrm>
-            <a:off x="1005840" y="3063240"/>
-            <a:ext cx="274320" cy="274320"/>
+          <p:cNvPr id="8" name="Oval 7"/>
+          <p:cNvSpPr/>
+          <p:nvPr/>
+        </p:nvSpPr>
+        <p:spPr>
+          <a:xfrm>
+            <a:off x="1234440" y="3090672"/>
+            <a:ext cx="228600" cy="228600"/>
           </a:xfrm>
           <a:prstGeom prst="ellipse">
             <a:avLst/>
           </a:prstGeom>
           <a:solidFill>
-            <a:srgbClr val="00D4FF"/>
+            <a:srgbClr val="00C8F0"/>
           </a:solidFill>
           <a:ln>
             <a:noFill/>
@@ -8471,14 +8686,14 @@
       </p:sp>
       <p:sp>
         <p:nvSpPr>
-          <p:cNvPr id="8" name="TextBox 7"/>
+          <p:cNvPr id="9" name="TextBox 8"/>
           <p:cNvSpPr txBox="1"/>
           <p:nvPr/>
         </p:nvSpPr>
         <p:spPr>
           <a:xfrm>
-            <a:off x="731520" y="2468880"/>
-            <a:ext cx="1371600" cy="457200"/>
+            <a:off x="914400" y="2560320"/>
+            <a:ext cx="1097280" cy="365760"/>
           </a:xfrm>
           <a:prstGeom prst="rect">
             <a:avLst/>
@@ -8494,7 +8709,7 @@
             <a:pPr algn="ctr">
               <a:defRPr sz="1400" b="1">
                 <a:solidFill>
-                  <a:srgbClr val="00D4FF"/>
+                  <a:srgbClr val="00C8F0"/>
                 </a:solidFill>
                 <a:latin typeface="Microsoft YaHei"/>
               </a:defRPr>
@@ -8507,20 +8722,20 @@
       </p:sp>
       <p:sp>
         <p:nvSpPr>
-          <p:cNvPr id="9" name="Rounded Rectangle 8"/>
-          <p:cNvSpPr/>
-          <p:nvPr/>
-        </p:nvSpPr>
-        <p:spPr>
-          <a:xfrm>
-            <a:off x="548640" y="1463040"/>
-            <a:ext cx="1737360" cy="1097280"/>
+          <p:cNvPr id="10" name="Rounded Rectangle 9"/>
+          <p:cNvSpPr/>
+          <p:nvPr/>
+        </p:nvSpPr>
+        <p:spPr>
+          <a:xfrm>
+            <a:off x="822960" y="1371600"/>
+            <a:ext cx="1463040" cy="1188720"/>
           </a:xfrm>
           <a:prstGeom prst="roundRect">
             <a:avLst/>
           </a:prstGeom>
           <a:solidFill>
-            <a:srgbClr val="141E33"/>
+            <a:srgbClr val="161F35"/>
           </a:solidFill>
           <a:ln>
             <a:noFill/>
@@ -8550,14 +8765,14 @@
       </p:sp>
       <p:sp>
         <p:nvSpPr>
-          <p:cNvPr id="10" name="TextBox 9"/>
+          <p:cNvPr id="11" name="TextBox 10"/>
           <p:cNvSpPr txBox="1"/>
           <p:nvPr/>
         </p:nvSpPr>
         <p:spPr>
           <a:xfrm>
-            <a:off x="640080" y="1554480"/>
-            <a:ext cx="1554480" cy="914400"/>
+            <a:off x="914400" y="1463040"/>
+            <a:ext cx="1280160" cy="1005840"/>
           </a:xfrm>
           <a:prstGeom prst="rect">
             <a:avLst/>
@@ -8573,7 +8788,7 @@
             <a:pPr algn="l">
               <a:defRPr sz="1100" b="0">
                 <a:solidFill>
-                  <a:srgbClr val="CBD5E8"/>
+                  <a:srgbClr val="A0AEC4"/>
                 </a:solidFill>
                 <a:latin typeface="Microsoft YaHei"/>
               </a:defRPr>
@@ -8590,20 +8805,20 @@
       </p:sp>
       <p:sp>
         <p:nvSpPr>
-          <p:cNvPr id="11" name="Oval 10"/>
-          <p:cNvSpPr/>
-          <p:nvPr/>
-        </p:nvSpPr>
-        <p:spPr>
-          <a:xfrm>
-            <a:off x="3145536" y="3063240"/>
-            <a:ext cx="274320" cy="274320"/>
+          <p:cNvPr id="12" name="Oval 11"/>
+          <p:cNvSpPr/>
+          <p:nvPr/>
+        </p:nvSpPr>
+        <p:spPr>
+          <a:xfrm>
+            <a:off x="3300984" y="3090672"/>
+            <a:ext cx="228600" cy="228600"/>
           </a:xfrm>
           <a:prstGeom prst="ellipse">
             <a:avLst/>
           </a:prstGeom>
           <a:solidFill>
-            <a:srgbClr val="7C3AED"/>
+            <a:srgbClr val="8B5CF6"/>
           </a:solidFill>
           <a:ln>
             <a:noFill/>
@@ -8633,14 +8848,14 @@
       </p:sp>
       <p:sp>
         <p:nvSpPr>
-          <p:cNvPr id="12" name="TextBox 11"/>
+          <p:cNvPr id="13" name="TextBox 12"/>
           <p:cNvSpPr txBox="1"/>
           <p:nvPr/>
         </p:nvSpPr>
         <p:spPr>
           <a:xfrm>
-            <a:off x="2871216" y="2468880"/>
-            <a:ext cx="1371600" cy="457200"/>
+            <a:off x="2980944" y="2560320"/>
+            <a:ext cx="1097280" cy="365760"/>
           </a:xfrm>
           <a:prstGeom prst="rect">
             <a:avLst/>
@@ -8656,7 +8871,7 @@
             <a:pPr algn="ctr">
               <a:defRPr sz="1400" b="1">
                 <a:solidFill>
-                  <a:srgbClr val="7C3AED"/>
+                  <a:srgbClr val="8B5CF6"/>
                 </a:solidFill>
                 <a:latin typeface="Microsoft YaHei"/>
               </a:defRPr>
@@ -8669,20 +8884,20 @@
       </p:sp>
       <p:sp>
         <p:nvSpPr>
-          <p:cNvPr id="13" name="Rounded Rectangle 12"/>
-          <p:cNvSpPr/>
-          <p:nvPr/>
-        </p:nvSpPr>
-        <p:spPr>
-          <a:xfrm>
-            <a:off x="2688336" y="3657600"/>
-            <a:ext cx="1737360" cy="1097280"/>
+          <p:cNvPr id="14" name="Rounded Rectangle 13"/>
+          <p:cNvSpPr/>
+          <p:nvPr/>
+        </p:nvSpPr>
+        <p:spPr>
+          <a:xfrm>
+            <a:off x="2889504" y="3657600"/>
+            <a:ext cx="1463040" cy="1188720"/>
           </a:xfrm>
           <a:prstGeom prst="roundRect">
             <a:avLst/>
           </a:prstGeom>
           <a:solidFill>
-            <a:srgbClr val="141E33"/>
+            <a:srgbClr val="161F35"/>
           </a:solidFill>
           <a:ln>
             <a:noFill/>
@@ -8712,14 +8927,14 @@
       </p:sp>
       <p:sp>
         <p:nvSpPr>
-          <p:cNvPr id="14" name="TextBox 13"/>
+          <p:cNvPr id="15" name="TextBox 14"/>
           <p:cNvSpPr txBox="1"/>
           <p:nvPr/>
         </p:nvSpPr>
         <p:spPr>
           <a:xfrm>
-            <a:off x="2779776" y="3749039"/>
-            <a:ext cx="1554480" cy="914400"/>
+            <a:off x="2980944" y="3749039"/>
+            <a:ext cx="1280160" cy="1005840"/>
           </a:xfrm>
           <a:prstGeom prst="rect">
             <a:avLst/>
@@ -8735,7 +8950,7 @@
             <a:pPr algn="l">
               <a:defRPr sz="1100" b="0">
                 <a:solidFill>
-                  <a:srgbClr val="CBD5E8"/>
+                  <a:srgbClr val="A0AEC4"/>
                 </a:solidFill>
                 <a:latin typeface="Microsoft YaHei"/>
               </a:defRPr>
@@ -8752,20 +8967,20 @@
       </p:sp>
       <p:sp>
         <p:nvSpPr>
-          <p:cNvPr id="15" name="Oval 14"/>
-          <p:cNvSpPr/>
-          <p:nvPr/>
-        </p:nvSpPr>
-        <p:spPr>
-          <a:xfrm>
-            <a:off x="5285232" y="3063240"/>
-            <a:ext cx="274320" cy="274320"/>
+          <p:cNvPr id="16" name="Oval 15"/>
+          <p:cNvSpPr/>
+          <p:nvPr/>
+        </p:nvSpPr>
+        <p:spPr>
+          <a:xfrm>
+            <a:off x="5367528" y="3090672"/>
+            <a:ext cx="228600" cy="228600"/>
           </a:xfrm>
           <a:prstGeom prst="ellipse">
             <a:avLst/>
           </a:prstGeom>
           <a:solidFill>
-            <a:srgbClr val="FF6B35"/>
+            <a:srgbClr val="F07A35"/>
           </a:solidFill>
           <a:ln>
             <a:noFill/>
@@ -8795,14 +9010,14 @@
       </p:sp>
       <p:sp>
         <p:nvSpPr>
-          <p:cNvPr id="16" name="TextBox 15"/>
+          <p:cNvPr id="17" name="TextBox 16"/>
           <p:cNvSpPr txBox="1"/>
           <p:nvPr/>
         </p:nvSpPr>
         <p:spPr>
           <a:xfrm>
-            <a:off x="5010912" y="2468880"/>
-            <a:ext cx="1371600" cy="457200"/>
+            <a:off x="5047488" y="2560320"/>
+            <a:ext cx="1097280" cy="365760"/>
           </a:xfrm>
           <a:prstGeom prst="rect">
             <a:avLst/>
@@ -8818,7 +9033,7 @@
             <a:pPr algn="ctr">
               <a:defRPr sz="1400" b="1">
                 <a:solidFill>
-                  <a:srgbClr val="FF6B35"/>
+                  <a:srgbClr val="F07A35"/>
                 </a:solidFill>
                 <a:latin typeface="Microsoft YaHei"/>
               </a:defRPr>
@@ -8831,20 +9046,20 @@
       </p:sp>
       <p:sp>
         <p:nvSpPr>
-          <p:cNvPr id="17" name="Rounded Rectangle 16"/>
-          <p:cNvSpPr/>
-          <p:nvPr/>
-        </p:nvSpPr>
-        <p:spPr>
-          <a:xfrm>
-            <a:off x="4828032" y="1463040"/>
-            <a:ext cx="1737360" cy="1097280"/>
+          <p:cNvPr id="18" name="Rounded Rectangle 17"/>
+          <p:cNvSpPr/>
+          <p:nvPr/>
+        </p:nvSpPr>
+        <p:spPr>
+          <a:xfrm>
+            <a:off x="4956048" y="1371600"/>
+            <a:ext cx="1463040" cy="1188720"/>
           </a:xfrm>
           <a:prstGeom prst="roundRect">
             <a:avLst/>
           </a:prstGeom>
           <a:solidFill>
-            <a:srgbClr val="141E33"/>
+            <a:srgbClr val="161F35"/>
           </a:solidFill>
           <a:ln>
             <a:noFill/>
@@ -8874,14 +9089,14 @@
       </p:sp>
       <p:sp>
         <p:nvSpPr>
-          <p:cNvPr id="18" name="TextBox 17"/>
+          <p:cNvPr id="19" name="TextBox 18"/>
           <p:cNvSpPr txBox="1"/>
           <p:nvPr/>
         </p:nvSpPr>
         <p:spPr>
           <a:xfrm>
-            <a:off x="4919472" y="1554480"/>
-            <a:ext cx="1554480" cy="914400"/>
+            <a:off x="5047488" y="1463040"/>
+            <a:ext cx="1280160" cy="1005840"/>
           </a:xfrm>
           <a:prstGeom prst="rect">
             <a:avLst/>
@@ -8897,7 +9112,7 @@
             <a:pPr algn="l">
               <a:defRPr sz="1100" b="0">
                 <a:solidFill>
-                  <a:srgbClr val="CBD5E8"/>
+                  <a:srgbClr val="A0AEC4"/>
                 </a:solidFill>
                 <a:latin typeface="Microsoft YaHei"/>
               </a:defRPr>
@@ -8914,14 +9129,14 @@
       </p:sp>
       <p:sp>
         <p:nvSpPr>
-          <p:cNvPr id="19" name="Oval 18"/>
-          <p:cNvSpPr/>
-          <p:nvPr/>
-        </p:nvSpPr>
-        <p:spPr>
-          <a:xfrm>
-            <a:off x="7424928" y="3063240"/>
-            <a:ext cx="274320" cy="274320"/>
+          <p:cNvPr id="20" name="Oval 19"/>
+          <p:cNvSpPr/>
+          <p:nvPr/>
+        </p:nvSpPr>
+        <p:spPr>
+          <a:xfrm>
+            <a:off x="7434072" y="3090672"/>
+            <a:ext cx="228600" cy="228600"/>
           </a:xfrm>
           <a:prstGeom prst="ellipse">
             <a:avLst/>
@@ -8957,14 +9172,14 @@
       </p:sp>
       <p:sp>
         <p:nvSpPr>
-          <p:cNvPr id="20" name="TextBox 19"/>
+          <p:cNvPr id="21" name="TextBox 20"/>
           <p:cNvSpPr txBox="1"/>
           <p:nvPr/>
         </p:nvSpPr>
         <p:spPr>
           <a:xfrm>
-            <a:off x="7150608" y="2468880"/>
-            <a:ext cx="1371600" cy="457200"/>
+            <a:off x="7114032" y="2560320"/>
+            <a:ext cx="1097280" cy="365760"/>
           </a:xfrm>
           <a:prstGeom prst="rect">
             <a:avLst/>
@@ -8993,20 +9208,20 @@
       </p:sp>
       <p:sp>
         <p:nvSpPr>
-          <p:cNvPr id="21" name="Rounded Rectangle 20"/>
-          <p:cNvSpPr/>
-          <p:nvPr/>
-        </p:nvSpPr>
-        <p:spPr>
-          <a:xfrm>
-            <a:off x="6967728" y="3657600"/>
-            <a:ext cx="1737360" cy="1097280"/>
+          <p:cNvPr id="22" name="Rounded Rectangle 21"/>
+          <p:cNvSpPr/>
+          <p:nvPr/>
+        </p:nvSpPr>
+        <p:spPr>
+          <a:xfrm>
+            <a:off x="7022592" y="3657600"/>
+            <a:ext cx="1463040" cy="1188720"/>
           </a:xfrm>
           <a:prstGeom prst="roundRect">
             <a:avLst/>
           </a:prstGeom>
           <a:solidFill>
-            <a:srgbClr val="141E33"/>
+            <a:srgbClr val="161F35"/>
           </a:solidFill>
           <a:ln>
             <a:noFill/>
@@ -9036,14 +9251,14 @@
       </p:sp>
       <p:sp>
         <p:nvSpPr>
-          <p:cNvPr id="22" name="TextBox 21"/>
+          <p:cNvPr id="23" name="TextBox 22"/>
           <p:cNvSpPr txBox="1"/>
           <p:nvPr/>
         </p:nvSpPr>
         <p:spPr>
           <a:xfrm>
-            <a:off x="7059168" y="3749039"/>
-            <a:ext cx="1554480" cy="914400"/>
+            <a:off x="7114032" y="3749039"/>
+            <a:ext cx="1280160" cy="1005840"/>
           </a:xfrm>
           <a:prstGeom prst="rect">
             <a:avLst/>
@@ -9059,7 +9274,7 @@
             <a:pPr algn="l">
               <a:defRPr sz="1100" b="0">
                 <a:solidFill>
-                  <a:srgbClr val="CBD5E8"/>
+                  <a:srgbClr val="A0AEC4"/>
                 </a:solidFill>
                 <a:latin typeface="Microsoft YaHei"/>
               </a:defRPr>
@@ -9076,14 +9291,14 @@
       </p:sp>
       <p:sp>
         <p:nvSpPr>
-          <p:cNvPr id="23" name="Oval 22"/>
-          <p:cNvSpPr/>
-          <p:nvPr/>
-        </p:nvSpPr>
-        <p:spPr>
-          <a:xfrm>
-            <a:off x="9564624" y="3063240"/>
-            <a:ext cx="274320" cy="274320"/>
+          <p:cNvPr id="24" name="Oval 23"/>
+          <p:cNvSpPr/>
+          <p:nvPr/>
+        </p:nvSpPr>
+        <p:spPr>
+          <a:xfrm>
+            <a:off x="9500616" y="3090672"/>
+            <a:ext cx="228600" cy="228600"/>
           </a:xfrm>
           <a:prstGeom prst="ellipse">
             <a:avLst/>
@@ -9119,14 +9334,14 @@
       </p:sp>
       <p:sp>
         <p:nvSpPr>
-          <p:cNvPr id="24" name="TextBox 23"/>
+          <p:cNvPr id="25" name="TextBox 24"/>
           <p:cNvSpPr txBox="1"/>
           <p:nvPr/>
         </p:nvSpPr>
         <p:spPr>
           <a:xfrm>
-            <a:off x="9290304" y="2468880"/>
-            <a:ext cx="1371600" cy="457200"/>
+            <a:off x="9180576" y="2560320"/>
+            <a:ext cx="1097280" cy="365760"/>
           </a:xfrm>
           <a:prstGeom prst="rect">
             <a:avLst/>
@@ -9155,20 +9370,20 @@
       </p:sp>
       <p:sp>
         <p:nvSpPr>
-          <p:cNvPr id="25" name="Rounded Rectangle 24"/>
-          <p:cNvSpPr/>
-          <p:nvPr/>
-        </p:nvSpPr>
-        <p:spPr>
-          <a:xfrm>
-            <a:off x="9107424" y="1463040"/>
-            <a:ext cx="1737360" cy="1097280"/>
+          <p:cNvPr id="26" name="Rounded Rectangle 25"/>
+          <p:cNvSpPr/>
+          <p:nvPr/>
+        </p:nvSpPr>
+        <p:spPr>
+          <a:xfrm>
+            <a:off x="9089136" y="1371600"/>
+            <a:ext cx="1463040" cy="1188720"/>
           </a:xfrm>
           <a:prstGeom prst="roundRect">
             <a:avLst/>
           </a:prstGeom>
           <a:solidFill>
-            <a:srgbClr val="141E33"/>
+            <a:srgbClr val="161F35"/>
           </a:solidFill>
           <a:ln>
             <a:noFill/>
@@ -9198,14 +9413,14 @@
       </p:sp>
       <p:sp>
         <p:nvSpPr>
-          <p:cNvPr id="26" name="TextBox 25"/>
+          <p:cNvPr id="27" name="TextBox 26"/>
           <p:cNvSpPr txBox="1"/>
           <p:nvPr/>
         </p:nvSpPr>
         <p:spPr>
           <a:xfrm>
-            <a:off x="9198864" y="1554480"/>
-            <a:ext cx="1554480" cy="914400"/>
+            <a:off x="9180576" y="1463040"/>
+            <a:ext cx="1280160" cy="1005840"/>
           </a:xfrm>
           <a:prstGeom prst="rect">
             <a:avLst/>
@@ -9221,7 +9436,7 @@
             <a:pPr algn="l">
               <a:defRPr sz="1100" b="0">
                 <a:solidFill>
-                  <a:srgbClr val="CBD5E8"/>
+                  <a:srgbClr val="A0AEC4"/>
                 </a:solidFill>
                 <a:latin typeface="Microsoft YaHei"/>
               </a:defRPr>
@@ -9238,20 +9453,20 @@
       </p:sp>
       <p:sp>
         <p:nvSpPr>
-          <p:cNvPr id="27" name="Rectangle 26"/>
+          <p:cNvPr id="28" name="Rectangle 27"/>
           <p:cNvSpPr/>
           <p:nvPr/>
         </p:nvSpPr>
         <p:spPr>
           <a:xfrm>
             <a:off x="0" y="6446520"/>
-            <a:ext cx="12191695" cy="19050"/>
-          </a:xfrm>
-          <a:prstGeom prst="rect">
-            <a:avLst/>
-          </a:prstGeom>
-          <a:solidFill>
-            <a:srgbClr val="2D3B55"/>
+            <a:ext cx="12191695" cy="12700"/>
+          </a:xfrm>
+          <a:prstGeom prst="rect">
+            <a:avLst/>
+          </a:prstGeom>
+          <a:solidFill>
+            <a:srgbClr val="253350"/>
           </a:solidFill>
           <a:ln>
             <a:noFill/>
@@ -9281,14 +9496,14 @@
       </p:sp>
       <p:sp>
         <p:nvSpPr>
-          <p:cNvPr id="28" name="TextBox 27"/>
+          <p:cNvPr id="29" name="TextBox 28"/>
           <p:cNvSpPr txBox="1"/>
           <p:nvPr/>
         </p:nvSpPr>
         <p:spPr>
           <a:xfrm>
-            <a:off x="457200" y="6492240"/>
-            <a:ext cx="5486400" cy="274320"/>
+            <a:off x="731520" y="6492240"/>
+            <a:ext cx="4572000" cy="274320"/>
           </a:xfrm>
           <a:prstGeom prst="rect">
             <a:avLst/>
@@ -9304,20 +9519,20 @@
             <a:pPr algn="l">
               <a:defRPr sz="900" b="0">
                 <a:solidFill>
-                  <a:srgbClr val="6B7B9E"/>
+                  <a:srgbClr val="607090"/>
                 </a:solidFill>
                 <a:latin typeface="Microsoft YaHei"/>
               </a:defRPr>
             </a:pPr>
             <a:r>
-              <a:t>模块14：工业化生产</a:t>
-            </a:r>
-          </a:p>
-        </p:txBody>
-      </p:sp>
-      <p:sp>
-        <p:nvSpPr>
-          <p:cNvPr id="29" name="TextBox 28"/>
+              <a:t>模块14 · 工业化生产</a:t>
+            </a:r>
+          </a:p>
+        </p:txBody>
+      </p:sp>
+      <p:sp>
+        <p:nvSpPr>
+          <p:cNvPr id="30" name="TextBox 29"/>
           <p:cNvSpPr txBox="1"/>
           <p:nvPr/>
         </p:nvSpPr>
@@ -9340,7 +9555,7 @@
             <a:pPr algn="r">
               <a:defRPr sz="900" b="0">
                 <a:solidFill>
-                  <a:srgbClr val="6B7B9E"/>
+                  <a:srgbClr val="607090"/>
                 </a:solidFill>
                 <a:latin typeface="Microsoft YaHei"/>
               </a:defRPr>
@@ -9365,7 +9580,7 @@
     <p:bg>
       <p:bgPr>
         <a:solidFill>
-          <a:srgbClr val="0B1120"/>
+          <a:srgbClr val="0A0E1A"/>
         </a:solidFill>
         <a:effectLst/>
       </p:bgPr>
@@ -9386,13 +9601,13 @@
         <p:spPr>
           <a:xfrm>
             <a:off x="0" y="0"/>
-            <a:ext cx="12191695" cy="1051560"/>
-          </a:xfrm>
-          <a:prstGeom prst="rect">
-            <a:avLst/>
-          </a:prstGeom>
-          <a:solidFill>
-            <a:srgbClr val="141E33"/>
+            <a:ext cx="12191695" cy="38100"/>
+          </a:xfrm>
+          <a:prstGeom prst="rect">
+            <a:avLst/>
+          </a:prstGeom>
+          <a:solidFill>
+            <a:srgbClr val="F59E0B"/>
           </a:solidFill>
           <a:ln>
             <a:noFill/>
@@ -9428,14 +9643,14 @@
         </p:nvSpPr>
         <p:spPr>
           <a:xfrm>
-            <a:off x="0" y="0"/>
-            <a:ext cx="109728" cy="1051560"/>
-          </a:xfrm>
-          <a:prstGeom prst="rect">
-            <a:avLst/>
-          </a:prstGeom>
-          <a:solidFill>
-            <a:srgbClr val="F59E0B"/>
+            <a:off x="0" y="38100"/>
+            <a:ext cx="12191695" cy="914400"/>
+          </a:xfrm>
+          <a:prstGeom prst="rect">
+            <a:avLst/>
+          </a:prstGeom>
+          <a:solidFill>
+            <a:srgbClr val="161F35"/>
           </a:solidFill>
           <a:ln>
             <a:noFill/>
@@ -9465,14 +9680,57 @@
       </p:sp>
       <p:sp>
         <p:nvSpPr>
-          <p:cNvPr id="4" name="TextBox 3"/>
+          <p:cNvPr id="4" name="Rectangle 3"/>
+          <p:cNvSpPr/>
+          <p:nvPr/>
+        </p:nvSpPr>
+        <p:spPr>
+          <a:xfrm>
+            <a:off x="0" y="38100"/>
+            <a:ext cx="91440" cy="914400"/>
+          </a:xfrm>
+          <a:prstGeom prst="rect">
+            <a:avLst/>
+          </a:prstGeom>
+          <a:solidFill>
+            <a:srgbClr val="F59E0B"/>
+          </a:solidFill>
+          <a:ln>
+            <a:noFill/>
+          </a:ln>
+        </p:spPr>
+        <p:style>
+          <a:lnRef idx="1">
+            <a:schemeClr val="accent1"/>
+          </a:lnRef>
+          <a:fillRef idx="3">
+            <a:schemeClr val="accent1"/>
+          </a:fillRef>
+          <a:effectRef idx="2">
+            <a:schemeClr val="accent1"/>
+          </a:effectRef>
+          <a:fontRef idx="minor">
+            <a:schemeClr val="lt1"/>
+          </a:fontRef>
+        </p:style>
+        <p:txBody>
+          <a:bodyPr rtlCol="0" anchor="ctr"/>
+          <a:lstStyle/>
+          <a:p>
+            <a:pPr algn="ctr"/>
+          </a:p>
+        </p:txBody>
+      </p:sp>
+      <p:sp>
+        <p:nvSpPr>
+          <p:cNvPr id="5" name="TextBox 4"/>
           <p:cNvSpPr txBox="1"/>
           <p:nvPr/>
         </p:nvSpPr>
         <p:spPr>
           <a:xfrm>
-            <a:off x="548640" y="182880"/>
-            <a:ext cx="10058400" cy="640080"/>
+            <a:off x="731520" y="137160"/>
+            <a:ext cx="10728655" cy="640080"/>
           </a:xfrm>
           <a:prstGeom prst="rect">
             <a:avLst/>
@@ -9486,9 +9744,9 @@
           <a:lstStyle/>
           <a:p>
             <a:pPr algn="l">
-              <a:defRPr sz="2600" b="1">
+              <a:defRPr sz="2400" b="1">
                 <a:solidFill>
-                  <a:srgbClr val="FFFFFF"/>
+                  <a:srgbClr val="F0F4FC"/>
                 </a:solidFill>
                 <a:latin typeface="Microsoft YaHei"/>
               </a:defRPr>
@@ -9501,20 +9759,20 @@
       </p:sp>
       <p:sp>
         <p:nvSpPr>
-          <p:cNvPr id="5" name="Rectangle 4"/>
-          <p:cNvSpPr/>
-          <p:nvPr/>
-        </p:nvSpPr>
-        <p:spPr>
-          <a:xfrm>
-            <a:off x="0" y="1051560"/>
-            <a:ext cx="12191695" cy="25400"/>
-          </a:xfrm>
-          <a:prstGeom prst="rect">
-            <a:avLst/>
-          </a:prstGeom>
-          <a:solidFill>
-            <a:srgbClr val="F59E0B"/>
+          <p:cNvPr id="6" name="Rectangle 5"/>
+          <p:cNvSpPr/>
+          <p:nvPr/>
+        </p:nvSpPr>
+        <p:spPr>
+          <a:xfrm>
+            <a:off x="0" y="1078992"/>
+            <a:ext cx="12191695" cy="12700"/>
+          </a:xfrm>
+          <a:prstGeom prst="rect">
+            <a:avLst/>
+          </a:prstGeom>
+          <a:solidFill>
+            <a:srgbClr val="253350"/>
           </a:solidFill>
           <a:ln>
             <a:noFill/>
@@ -9544,20 +9802,20 @@
       </p:sp>
       <p:sp>
         <p:nvSpPr>
-          <p:cNvPr id="6" name="Rounded Rectangle 5"/>
-          <p:cNvSpPr/>
-          <p:nvPr/>
-        </p:nvSpPr>
-        <p:spPr>
-          <a:xfrm>
-            <a:off x="457200" y="1325880"/>
-            <a:ext cx="11247120" cy="731520"/>
+          <p:cNvPr id="7" name="Rounded Rectangle 6"/>
+          <p:cNvSpPr/>
+          <p:nvPr/>
+        </p:nvSpPr>
+        <p:spPr>
+          <a:xfrm>
+            <a:off x="457200" y="1280160"/>
+            <a:ext cx="11247120" cy="685800"/>
           </a:xfrm>
           <a:prstGeom prst="roundRect">
             <a:avLst/>
           </a:prstGeom>
           <a:solidFill>
-            <a:srgbClr val="141E33"/>
+            <a:srgbClr val="161F35"/>
           </a:solidFill>
           <a:ln>
             <a:noFill/>
@@ -9587,14 +9845,14 @@
       </p:sp>
       <p:sp>
         <p:nvSpPr>
-          <p:cNvPr id="7" name="Rectangle 6"/>
-          <p:cNvSpPr/>
-          <p:nvPr/>
-        </p:nvSpPr>
-        <p:spPr>
-          <a:xfrm>
-            <a:off x="457200" y="1325880"/>
-            <a:ext cx="73152" cy="731520"/>
+          <p:cNvPr id="8" name="Rectangle 7"/>
+          <p:cNvSpPr/>
+          <p:nvPr/>
+        </p:nvSpPr>
+        <p:spPr>
+          <a:xfrm>
+            <a:off x="457200" y="1280160"/>
+            <a:ext cx="54864" cy="685800"/>
           </a:xfrm>
           <a:prstGeom prst="rect">
             <a:avLst/>
@@ -9630,14 +9888,14 @@
       </p:sp>
       <p:sp>
         <p:nvSpPr>
-          <p:cNvPr id="8" name="Oval 7"/>
-          <p:cNvSpPr/>
-          <p:nvPr/>
-        </p:nvSpPr>
-        <p:spPr>
-          <a:xfrm>
-            <a:off x="731520" y="1490472"/>
-            <a:ext cx="365760" cy="365760"/>
+          <p:cNvPr id="9" name="Oval 8"/>
+          <p:cNvSpPr/>
+          <p:nvPr/>
+        </p:nvSpPr>
+        <p:spPr>
+          <a:xfrm>
+            <a:off x="685800" y="1463040"/>
+            <a:ext cx="320040" cy="320040"/>
           </a:xfrm>
           <a:prstGeom prst="ellipse">
             <a:avLst/>
@@ -9673,14 +9931,14 @@
       </p:sp>
       <p:sp>
         <p:nvSpPr>
-          <p:cNvPr id="9" name="TextBox 8"/>
+          <p:cNvPr id="10" name="TextBox 9"/>
           <p:cNvSpPr txBox="1"/>
           <p:nvPr/>
         </p:nvSpPr>
         <p:spPr>
           <a:xfrm>
-            <a:off x="731520" y="1490472"/>
-            <a:ext cx="365760" cy="365760"/>
+            <a:off x="685800" y="1463040"/>
+            <a:ext cx="320040" cy="320040"/>
           </a:xfrm>
           <a:prstGeom prst="rect">
             <a:avLst/>
@@ -9694,9 +9952,9 @@
           <a:lstStyle/>
           <a:p>
             <a:pPr algn="ctr">
-              <a:defRPr sz="1100" b="1">
+              <a:defRPr sz="1000" b="1">
                 <a:solidFill>
-                  <a:srgbClr val="FFFFFF"/>
+                  <a:srgbClr val="F0F4FC"/>
                 </a:solidFill>
                 <a:latin typeface="Microsoft YaHei"/>
               </a:defRPr>
@@ -9709,14 +9967,14 @@
       </p:sp>
       <p:sp>
         <p:nvSpPr>
-          <p:cNvPr id="10" name="TextBox 9"/>
+          <p:cNvPr id="11" name="TextBox 10"/>
           <p:cNvSpPr txBox="1"/>
           <p:nvPr/>
         </p:nvSpPr>
         <p:spPr>
           <a:xfrm>
-            <a:off x="1280160" y="1417320"/>
-            <a:ext cx="10058400" cy="548640"/>
+            <a:off x="1188720" y="1440180"/>
+            <a:ext cx="10058400" cy="365760"/>
           </a:xfrm>
           <a:prstGeom prst="rect">
             <a:avLst/>
@@ -9730,9 +9988,9 @@
           <a:lstStyle/>
           <a:p>
             <a:pPr algn="l">
-              <a:defRPr sz="1500" b="0">
+              <a:defRPr sz="1400" b="0">
                 <a:solidFill>
-                  <a:srgbClr val="CBD5E8"/>
+                  <a:srgbClr val="A0AEC4"/>
                 </a:solidFill>
                 <a:latin typeface="Microsoft YaHei"/>
               </a:defRPr>
@@ -9745,20 +10003,20 @@
       </p:sp>
       <p:sp>
         <p:nvSpPr>
-          <p:cNvPr id="11" name="Rounded Rectangle 10"/>
-          <p:cNvSpPr/>
-          <p:nvPr/>
-        </p:nvSpPr>
-        <p:spPr>
-          <a:xfrm>
-            <a:off x="457200" y="2194560"/>
-            <a:ext cx="11247120" cy="731520"/>
+          <p:cNvPr id="12" name="Rounded Rectangle 11"/>
+          <p:cNvSpPr/>
+          <p:nvPr/>
+        </p:nvSpPr>
+        <p:spPr>
+          <a:xfrm>
+            <a:off x="457200" y="2297430"/>
+            <a:ext cx="11247120" cy="685800"/>
           </a:xfrm>
           <a:prstGeom prst="roundRect">
             <a:avLst/>
           </a:prstGeom>
           <a:solidFill>
-            <a:srgbClr val="141E33"/>
+            <a:srgbClr val="161F35"/>
           </a:solidFill>
           <a:ln>
             <a:noFill/>
@@ -9788,14 +10046,14 @@
       </p:sp>
       <p:sp>
         <p:nvSpPr>
-          <p:cNvPr id="12" name="Rectangle 11"/>
-          <p:cNvSpPr/>
-          <p:nvPr/>
-        </p:nvSpPr>
-        <p:spPr>
-          <a:xfrm>
-            <a:off x="457200" y="2194560"/>
-            <a:ext cx="73152" cy="731520"/>
+          <p:cNvPr id="13" name="Rectangle 12"/>
+          <p:cNvSpPr/>
+          <p:nvPr/>
+        </p:nvSpPr>
+        <p:spPr>
+          <a:xfrm>
+            <a:off x="457200" y="2297430"/>
+            <a:ext cx="54864" cy="685800"/>
           </a:xfrm>
           <a:prstGeom prst="rect">
             <a:avLst/>
@@ -9831,14 +10089,14 @@
       </p:sp>
       <p:sp>
         <p:nvSpPr>
-          <p:cNvPr id="13" name="Oval 12"/>
-          <p:cNvSpPr/>
-          <p:nvPr/>
-        </p:nvSpPr>
-        <p:spPr>
-          <a:xfrm>
-            <a:off x="731520" y="2359152"/>
-            <a:ext cx="365760" cy="365760"/>
+          <p:cNvPr id="14" name="Oval 13"/>
+          <p:cNvSpPr/>
+          <p:nvPr/>
+        </p:nvSpPr>
+        <p:spPr>
+          <a:xfrm>
+            <a:off x="685800" y="2480310"/>
+            <a:ext cx="320040" cy="320040"/>
           </a:xfrm>
           <a:prstGeom prst="ellipse">
             <a:avLst/>
@@ -9874,14 +10132,14 @@
       </p:sp>
       <p:sp>
         <p:nvSpPr>
-          <p:cNvPr id="14" name="TextBox 13"/>
+          <p:cNvPr id="15" name="TextBox 14"/>
           <p:cNvSpPr txBox="1"/>
           <p:nvPr/>
         </p:nvSpPr>
         <p:spPr>
           <a:xfrm>
-            <a:off x="731520" y="2359152"/>
-            <a:ext cx="365760" cy="365760"/>
+            <a:off x="685800" y="2480310"/>
+            <a:ext cx="320040" cy="320040"/>
           </a:xfrm>
           <a:prstGeom prst="rect">
             <a:avLst/>
@@ -9895,9 +10153,9 @@
           <a:lstStyle/>
           <a:p>
             <a:pPr algn="ctr">
-              <a:defRPr sz="1100" b="1">
+              <a:defRPr sz="1000" b="1">
                 <a:solidFill>
-                  <a:srgbClr val="FFFFFF"/>
+                  <a:srgbClr val="F0F4FC"/>
                 </a:solidFill>
                 <a:latin typeface="Microsoft YaHei"/>
               </a:defRPr>
@@ -9910,14 +10168,14 @@
       </p:sp>
       <p:sp>
         <p:nvSpPr>
-          <p:cNvPr id="15" name="TextBox 14"/>
+          <p:cNvPr id="16" name="TextBox 15"/>
           <p:cNvSpPr txBox="1"/>
           <p:nvPr/>
         </p:nvSpPr>
         <p:spPr>
           <a:xfrm>
-            <a:off x="1280160" y="2286000"/>
-            <a:ext cx="10058400" cy="548640"/>
+            <a:off x="1188720" y="2457450"/>
+            <a:ext cx="10058400" cy="365760"/>
           </a:xfrm>
           <a:prstGeom prst="rect">
             <a:avLst/>
@@ -9931,9 +10189,9 @@
           <a:lstStyle/>
           <a:p>
             <a:pPr algn="l">
-              <a:defRPr sz="1500" b="0">
+              <a:defRPr sz="1400" b="0">
                 <a:solidFill>
-                  <a:srgbClr val="CBD5E8"/>
+                  <a:srgbClr val="A0AEC4"/>
                 </a:solidFill>
                 <a:latin typeface="Microsoft YaHei"/>
               </a:defRPr>
@@ -9946,20 +10204,20 @@
       </p:sp>
       <p:sp>
         <p:nvSpPr>
-          <p:cNvPr id="16" name="Rounded Rectangle 15"/>
-          <p:cNvSpPr/>
-          <p:nvPr/>
-        </p:nvSpPr>
-        <p:spPr>
-          <a:xfrm>
-            <a:off x="457200" y="3063240"/>
-            <a:ext cx="11247120" cy="731520"/>
+          <p:cNvPr id="17" name="Rounded Rectangle 16"/>
+          <p:cNvSpPr/>
+          <p:nvPr/>
+        </p:nvSpPr>
+        <p:spPr>
+          <a:xfrm>
+            <a:off x="457200" y="3314700"/>
+            <a:ext cx="11247120" cy="685800"/>
           </a:xfrm>
           <a:prstGeom prst="roundRect">
             <a:avLst/>
           </a:prstGeom>
           <a:solidFill>
-            <a:srgbClr val="141E33"/>
+            <a:srgbClr val="161F35"/>
           </a:solidFill>
           <a:ln>
             <a:noFill/>
@@ -9989,14 +10247,14 @@
       </p:sp>
       <p:sp>
         <p:nvSpPr>
-          <p:cNvPr id="17" name="Rectangle 16"/>
-          <p:cNvSpPr/>
-          <p:nvPr/>
-        </p:nvSpPr>
-        <p:spPr>
-          <a:xfrm>
-            <a:off x="457200" y="3063240"/>
-            <a:ext cx="73152" cy="731520"/>
+          <p:cNvPr id="18" name="Rectangle 17"/>
+          <p:cNvSpPr/>
+          <p:nvPr/>
+        </p:nvSpPr>
+        <p:spPr>
+          <a:xfrm>
+            <a:off x="457200" y="3314700"/>
+            <a:ext cx="54864" cy="685800"/>
           </a:xfrm>
           <a:prstGeom prst="rect">
             <a:avLst/>
@@ -10032,14 +10290,14 @@
       </p:sp>
       <p:sp>
         <p:nvSpPr>
-          <p:cNvPr id="18" name="Oval 17"/>
-          <p:cNvSpPr/>
-          <p:nvPr/>
-        </p:nvSpPr>
-        <p:spPr>
-          <a:xfrm>
-            <a:off x="731520" y="3227832"/>
-            <a:ext cx="365760" cy="365760"/>
+          <p:cNvPr id="19" name="Oval 18"/>
+          <p:cNvSpPr/>
+          <p:nvPr/>
+        </p:nvSpPr>
+        <p:spPr>
+          <a:xfrm>
+            <a:off x="685800" y="3497580"/>
+            <a:ext cx="320040" cy="320040"/>
           </a:xfrm>
           <a:prstGeom prst="ellipse">
             <a:avLst/>
@@ -10075,14 +10333,14 @@
       </p:sp>
       <p:sp>
         <p:nvSpPr>
-          <p:cNvPr id="19" name="TextBox 18"/>
+          <p:cNvPr id="20" name="TextBox 19"/>
           <p:cNvSpPr txBox="1"/>
           <p:nvPr/>
         </p:nvSpPr>
         <p:spPr>
           <a:xfrm>
-            <a:off x="731520" y="3227832"/>
-            <a:ext cx="365760" cy="365760"/>
+            <a:off x="685800" y="3497580"/>
+            <a:ext cx="320040" cy="320040"/>
           </a:xfrm>
           <a:prstGeom prst="rect">
             <a:avLst/>
@@ -10096,9 +10354,9 @@
           <a:lstStyle/>
           <a:p>
             <a:pPr algn="ctr">
-              <a:defRPr sz="1100" b="1">
+              <a:defRPr sz="1000" b="1">
                 <a:solidFill>
-                  <a:srgbClr val="FFFFFF"/>
+                  <a:srgbClr val="F0F4FC"/>
                 </a:solidFill>
                 <a:latin typeface="Microsoft YaHei"/>
               </a:defRPr>
@@ -10111,14 +10369,14 @@
       </p:sp>
       <p:sp>
         <p:nvSpPr>
-          <p:cNvPr id="20" name="TextBox 19"/>
+          <p:cNvPr id="21" name="TextBox 20"/>
           <p:cNvSpPr txBox="1"/>
           <p:nvPr/>
         </p:nvSpPr>
         <p:spPr>
           <a:xfrm>
-            <a:off x="1280160" y="3154680"/>
-            <a:ext cx="10058400" cy="548640"/>
+            <a:off x="1188720" y="3474720"/>
+            <a:ext cx="10058400" cy="365760"/>
           </a:xfrm>
           <a:prstGeom prst="rect">
             <a:avLst/>
@@ -10132,9 +10390,9 @@
           <a:lstStyle/>
           <a:p>
             <a:pPr algn="l">
-              <a:defRPr sz="1500" b="0">
+              <a:defRPr sz="1400" b="0">
                 <a:solidFill>
-                  <a:srgbClr val="CBD5E8"/>
+                  <a:srgbClr val="A0AEC4"/>
                 </a:solidFill>
                 <a:latin typeface="Microsoft YaHei"/>
               </a:defRPr>
@@ -10147,20 +10405,20 @@
       </p:sp>
       <p:sp>
         <p:nvSpPr>
-          <p:cNvPr id="21" name="Rounded Rectangle 20"/>
-          <p:cNvSpPr/>
-          <p:nvPr/>
-        </p:nvSpPr>
-        <p:spPr>
-          <a:xfrm>
-            <a:off x="457200" y="3931919"/>
-            <a:ext cx="11247120" cy="731520"/>
+          <p:cNvPr id="22" name="Rounded Rectangle 21"/>
+          <p:cNvSpPr/>
+          <p:nvPr/>
+        </p:nvSpPr>
+        <p:spPr>
+          <a:xfrm>
+            <a:off x="457200" y="4331970"/>
+            <a:ext cx="11247120" cy="685800"/>
           </a:xfrm>
           <a:prstGeom prst="roundRect">
             <a:avLst/>
           </a:prstGeom>
           <a:solidFill>
-            <a:srgbClr val="141E33"/>
+            <a:srgbClr val="161F35"/>
           </a:solidFill>
           <a:ln>
             <a:noFill/>
@@ -10190,14 +10448,14 @@
       </p:sp>
       <p:sp>
         <p:nvSpPr>
-          <p:cNvPr id="22" name="Rectangle 21"/>
-          <p:cNvSpPr/>
-          <p:nvPr/>
-        </p:nvSpPr>
-        <p:spPr>
-          <a:xfrm>
-            <a:off x="457200" y="3931919"/>
-            <a:ext cx="73152" cy="731520"/>
+          <p:cNvPr id="23" name="Rectangle 22"/>
+          <p:cNvSpPr/>
+          <p:nvPr/>
+        </p:nvSpPr>
+        <p:spPr>
+          <a:xfrm>
+            <a:off x="457200" y="4331970"/>
+            <a:ext cx="54864" cy="685800"/>
           </a:xfrm>
           <a:prstGeom prst="rect">
             <a:avLst/>
@@ -10233,14 +10491,14 @@
       </p:sp>
       <p:sp>
         <p:nvSpPr>
-          <p:cNvPr id="23" name="Oval 22"/>
-          <p:cNvSpPr/>
-          <p:nvPr/>
-        </p:nvSpPr>
-        <p:spPr>
-          <a:xfrm>
-            <a:off x="731520" y="4096511"/>
-            <a:ext cx="365760" cy="365760"/>
+          <p:cNvPr id="24" name="Oval 23"/>
+          <p:cNvSpPr/>
+          <p:nvPr/>
+        </p:nvSpPr>
+        <p:spPr>
+          <a:xfrm>
+            <a:off x="685800" y="4514850"/>
+            <a:ext cx="320040" cy="320040"/>
           </a:xfrm>
           <a:prstGeom prst="ellipse">
             <a:avLst/>
@@ -10276,14 +10534,14 @@
       </p:sp>
       <p:sp>
         <p:nvSpPr>
-          <p:cNvPr id="24" name="TextBox 23"/>
+          <p:cNvPr id="25" name="TextBox 24"/>
           <p:cNvSpPr txBox="1"/>
           <p:nvPr/>
         </p:nvSpPr>
         <p:spPr>
           <a:xfrm>
-            <a:off x="731520" y="4096511"/>
-            <a:ext cx="365760" cy="365760"/>
+            <a:off x="685800" y="4514850"/>
+            <a:ext cx="320040" cy="320040"/>
           </a:xfrm>
           <a:prstGeom prst="rect">
             <a:avLst/>
@@ -10297,9 +10555,9 @@
           <a:lstStyle/>
           <a:p>
             <a:pPr algn="ctr">
-              <a:defRPr sz="1100" b="1">
+              <a:defRPr sz="1000" b="1">
                 <a:solidFill>
-                  <a:srgbClr val="FFFFFF"/>
+                  <a:srgbClr val="F0F4FC"/>
                 </a:solidFill>
                 <a:latin typeface="Microsoft YaHei"/>
               </a:defRPr>
@@ -10312,14 +10570,14 @@
       </p:sp>
       <p:sp>
         <p:nvSpPr>
-          <p:cNvPr id="25" name="TextBox 24"/>
+          <p:cNvPr id="26" name="TextBox 25"/>
           <p:cNvSpPr txBox="1"/>
           <p:nvPr/>
         </p:nvSpPr>
         <p:spPr>
           <a:xfrm>
-            <a:off x="1280160" y="4023359"/>
-            <a:ext cx="10058400" cy="548640"/>
+            <a:off x="1188720" y="4491990"/>
+            <a:ext cx="10058400" cy="365760"/>
           </a:xfrm>
           <a:prstGeom prst="rect">
             <a:avLst/>
@@ -10333,9 +10591,9 @@
           <a:lstStyle/>
           <a:p>
             <a:pPr algn="l">
-              <a:defRPr sz="1500" b="0">
+              <a:defRPr sz="1400" b="0">
                 <a:solidFill>
-                  <a:srgbClr val="CBD5E8"/>
+                  <a:srgbClr val="A0AEC4"/>
                 </a:solidFill>
                 <a:latin typeface="Microsoft YaHei"/>
               </a:defRPr>
@@ -10348,20 +10606,20 @@
       </p:sp>
       <p:sp>
         <p:nvSpPr>
-          <p:cNvPr id="26" name="Rounded Rectangle 25"/>
-          <p:cNvSpPr/>
-          <p:nvPr/>
-        </p:nvSpPr>
-        <p:spPr>
-          <a:xfrm>
-            <a:off x="457200" y="4800600"/>
-            <a:ext cx="11247120" cy="731520"/>
+          <p:cNvPr id="27" name="Rounded Rectangle 26"/>
+          <p:cNvSpPr/>
+          <p:nvPr/>
+        </p:nvSpPr>
+        <p:spPr>
+          <a:xfrm>
+            <a:off x="457200" y="5349240"/>
+            <a:ext cx="11247120" cy="685800"/>
           </a:xfrm>
           <a:prstGeom prst="roundRect">
             <a:avLst/>
           </a:prstGeom>
           <a:solidFill>
-            <a:srgbClr val="141E33"/>
+            <a:srgbClr val="161F35"/>
           </a:solidFill>
           <a:ln>
             <a:noFill/>
@@ -10391,14 +10649,14 @@
       </p:sp>
       <p:sp>
         <p:nvSpPr>
-          <p:cNvPr id="27" name="Rectangle 26"/>
-          <p:cNvSpPr/>
-          <p:nvPr/>
-        </p:nvSpPr>
-        <p:spPr>
-          <a:xfrm>
-            <a:off x="457200" y="4800600"/>
-            <a:ext cx="73152" cy="731520"/>
+          <p:cNvPr id="28" name="Rectangle 27"/>
+          <p:cNvSpPr/>
+          <p:nvPr/>
+        </p:nvSpPr>
+        <p:spPr>
+          <a:xfrm>
+            <a:off x="457200" y="5349240"/>
+            <a:ext cx="54864" cy="685800"/>
           </a:xfrm>
           <a:prstGeom prst="rect">
             <a:avLst/>
@@ -10434,14 +10692,14 @@
       </p:sp>
       <p:sp>
         <p:nvSpPr>
-          <p:cNvPr id="28" name="Oval 27"/>
-          <p:cNvSpPr/>
-          <p:nvPr/>
-        </p:nvSpPr>
-        <p:spPr>
-          <a:xfrm>
-            <a:off x="731520" y="4965192"/>
-            <a:ext cx="365760" cy="365760"/>
+          <p:cNvPr id="29" name="Oval 28"/>
+          <p:cNvSpPr/>
+          <p:nvPr/>
+        </p:nvSpPr>
+        <p:spPr>
+          <a:xfrm>
+            <a:off x="685800" y="5532120"/>
+            <a:ext cx="320040" cy="320040"/>
           </a:xfrm>
           <a:prstGeom prst="ellipse">
             <a:avLst/>
@@ -10477,14 +10735,14 @@
       </p:sp>
       <p:sp>
         <p:nvSpPr>
-          <p:cNvPr id="29" name="TextBox 28"/>
+          <p:cNvPr id="30" name="TextBox 29"/>
           <p:cNvSpPr txBox="1"/>
           <p:nvPr/>
         </p:nvSpPr>
         <p:spPr>
           <a:xfrm>
-            <a:off x="731520" y="4965192"/>
-            <a:ext cx="365760" cy="365760"/>
+            <a:off x="685800" y="5532120"/>
+            <a:ext cx="320040" cy="320040"/>
           </a:xfrm>
           <a:prstGeom prst="rect">
             <a:avLst/>
@@ -10498,9 +10756,9 @@
           <a:lstStyle/>
           <a:p>
             <a:pPr algn="ctr">
-              <a:defRPr sz="1100" b="1">
+              <a:defRPr sz="1000" b="1">
                 <a:solidFill>
-                  <a:srgbClr val="FFFFFF"/>
+                  <a:srgbClr val="F0F4FC"/>
                 </a:solidFill>
                 <a:latin typeface="Microsoft YaHei"/>
               </a:defRPr>
@@ -10513,14 +10771,14 @@
       </p:sp>
       <p:sp>
         <p:nvSpPr>
-          <p:cNvPr id="30" name="TextBox 29"/>
+          <p:cNvPr id="31" name="TextBox 30"/>
           <p:cNvSpPr txBox="1"/>
           <p:nvPr/>
         </p:nvSpPr>
         <p:spPr>
           <a:xfrm>
-            <a:off x="1280160" y="4892040"/>
-            <a:ext cx="10058400" cy="548640"/>
+            <a:off x="1188720" y="5509260"/>
+            <a:ext cx="10058400" cy="365760"/>
           </a:xfrm>
           <a:prstGeom prst="rect">
             <a:avLst/>
@@ -10534,9 +10792,9 @@
           <a:lstStyle/>
           <a:p>
             <a:pPr algn="l">
-              <a:defRPr sz="1500" b="0">
+              <a:defRPr sz="1400" b="0">
                 <a:solidFill>
-                  <a:srgbClr val="CBD5E8"/>
+                  <a:srgbClr val="A0AEC4"/>
                 </a:solidFill>
                 <a:latin typeface="Microsoft YaHei"/>
               </a:defRPr>
@@ -10549,20 +10807,20 @@
       </p:sp>
       <p:sp>
         <p:nvSpPr>
-          <p:cNvPr id="31" name="Rectangle 30"/>
+          <p:cNvPr id="32" name="Rectangle 31"/>
           <p:cNvSpPr/>
           <p:nvPr/>
         </p:nvSpPr>
         <p:spPr>
           <a:xfrm>
             <a:off x="0" y="6446520"/>
-            <a:ext cx="12191695" cy="19050"/>
-          </a:xfrm>
-          <a:prstGeom prst="rect">
-            <a:avLst/>
-          </a:prstGeom>
-          <a:solidFill>
-            <a:srgbClr val="2D3B55"/>
+            <a:ext cx="12191695" cy="12700"/>
+          </a:xfrm>
+          <a:prstGeom prst="rect">
+            <a:avLst/>
+          </a:prstGeom>
+          <a:solidFill>
+            <a:srgbClr val="253350"/>
           </a:solidFill>
           <a:ln>
             <a:noFill/>
@@ -10592,14 +10850,14 @@
       </p:sp>
       <p:sp>
         <p:nvSpPr>
-          <p:cNvPr id="32" name="TextBox 31"/>
+          <p:cNvPr id="33" name="TextBox 32"/>
           <p:cNvSpPr txBox="1"/>
           <p:nvPr/>
         </p:nvSpPr>
         <p:spPr>
           <a:xfrm>
-            <a:off x="457200" y="6492240"/>
-            <a:ext cx="5486400" cy="274320"/>
+            <a:off x="731520" y="6492240"/>
+            <a:ext cx="4572000" cy="274320"/>
           </a:xfrm>
           <a:prstGeom prst="rect">
             <a:avLst/>
@@ -10615,20 +10873,20 @@
             <a:pPr algn="l">
               <a:defRPr sz="900" b="0">
                 <a:solidFill>
-                  <a:srgbClr val="6B7B9E"/>
+                  <a:srgbClr val="607090"/>
                 </a:solidFill>
                 <a:latin typeface="Microsoft YaHei"/>
               </a:defRPr>
             </a:pPr>
             <a:r>
-              <a:t>模块14：工业化生产</a:t>
-            </a:r>
-          </a:p>
-        </p:txBody>
-      </p:sp>
-      <p:sp>
-        <p:nvSpPr>
-          <p:cNvPr id="33" name="TextBox 32"/>
+              <a:t>模块14 · 工业化生产</a:t>
+            </a:r>
+          </a:p>
+        </p:txBody>
+      </p:sp>
+      <p:sp>
+        <p:nvSpPr>
+          <p:cNvPr id="34" name="TextBox 33"/>
           <p:cNvSpPr txBox="1"/>
           <p:nvPr/>
         </p:nvSpPr>
@@ -10651,7 +10909,7 @@
             <a:pPr algn="r">
               <a:defRPr sz="900" b="0">
                 <a:solidFill>
-                  <a:srgbClr val="6B7B9E"/>
+                  <a:srgbClr val="607090"/>
                 </a:solidFill>
                 <a:latin typeface="Microsoft YaHei"/>
               </a:defRPr>
@@ -10676,7 +10934,7 @@
     <p:bg>
       <p:bgPr>
         <a:solidFill>
-          <a:srgbClr val="0B1120"/>
+          <a:srgbClr val="0A0E1A"/>
         </a:solidFill>
         <a:effectLst/>
       </p:bgPr>
@@ -10697,13 +10955,13 @@
         <p:spPr>
           <a:xfrm>
             <a:off x="0" y="0"/>
-            <a:ext cx="12191695" cy="1051560"/>
-          </a:xfrm>
-          <a:prstGeom prst="rect">
-            <a:avLst/>
-          </a:prstGeom>
-          <a:solidFill>
-            <a:srgbClr val="141E33"/>
+            <a:ext cx="12191695" cy="38100"/>
+          </a:xfrm>
+          <a:prstGeom prst="rect">
+            <a:avLst/>
+          </a:prstGeom>
+          <a:solidFill>
+            <a:srgbClr val="F59E0B"/>
           </a:solidFill>
           <a:ln>
             <a:noFill/>
@@ -10739,14 +10997,14 @@
         </p:nvSpPr>
         <p:spPr>
           <a:xfrm>
-            <a:off x="0" y="0"/>
-            <a:ext cx="109728" cy="1051560"/>
-          </a:xfrm>
-          <a:prstGeom prst="rect">
-            <a:avLst/>
-          </a:prstGeom>
-          <a:solidFill>
-            <a:srgbClr val="F59E0B"/>
+            <a:off x="0" y="38100"/>
+            <a:ext cx="12191695" cy="914400"/>
+          </a:xfrm>
+          <a:prstGeom prst="rect">
+            <a:avLst/>
+          </a:prstGeom>
+          <a:solidFill>
+            <a:srgbClr val="161F35"/>
           </a:solidFill>
           <a:ln>
             <a:noFill/>
@@ -10776,14 +11034,57 @@
       </p:sp>
       <p:sp>
         <p:nvSpPr>
-          <p:cNvPr id="4" name="TextBox 3"/>
+          <p:cNvPr id="4" name="Rectangle 3"/>
+          <p:cNvSpPr/>
+          <p:nvPr/>
+        </p:nvSpPr>
+        <p:spPr>
+          <a:xfrm>
+            <a:off x="0" y="38100"/>
+            <a:ext cx="91440" cy="914400"/>
+          </a:xfrm>
+          <a:prstGeom prst="rect">
+            <a:avLst/>
+          </a:prstGeom>
+          <a:solidFill>
+            <a:srgbClr val="F59E0B"/>
+          </a:solidFill>
+          <a:ln>
+            <a:noFill/>
+          </a:ln>
+        </p:spPr>
+        <p:style>
+          <a:lnRef idx="1">
+            <a:schemeClr val="accent1"/>
+          </a:lnRef>
+          <a:fillRef idx="3">
+            <a:schemeClr val="accent1"/>
+          </a:fillRef>
+          <a:effectRef idx="2">
+            <a:schemeClr val="accent1"/>
+          </a:effectRef>
+          <a:fontRef idx="minor">
+            <a:schemeClr val="lt1"/>
+          </a:fontRef>
+        </p:style>
+        <p:txBody>
+          <a:bodyPr rtlCol="0" anchor="ctr"/>
+          <a:lstStyle/>
+          <a:p>
+            <a:pPr algn="ctr"/>
+          </a:p>
+        </p:txBody>
+      </p:sp>
+      <p:sp>
+        <p:nvSpPr>
+          <p:cNvPr id="5" name="TextBox 4"/>
           <p:cNvSpPr txBox="1"/>
           <p:nvPr/>
         </p:nvSpPr>
         <p:spPr>
           <a:xfrm>
-            <a:off x="548640" y="182880"/>
-            <a:ext cx="10058400" cy="640080"/>
+            <a:off x="731520" y="137160"/>
+            <a:ext cx="10728655" cy="640080"/>
           </a:xfrm>
           <a:prstGeom prst="rect">
             <a:avLst/>
@@ -10797,9 +11098,9 @@
           <a:lstStyle/>
           <a:p>
             <a:pPr algn="l">
-              <a:defRPr sz="2600" b="1">
+              <a:defRPr sz="2400" b="1">
                 <a:solidFill>
-                  <a:srgbClr val="FFFFFF"/>
+                  <a:srgbClr val="F0F4FC"/>
                 </a:solidFill>
                 <a:latin typeface="Microsoft YaHei"/>
               </a:defRPr>
@@ -10812,20 +11113,20 @@
       </p:sp>
       <p:sp>
         <p:nvSpPr>
-          <p:cNvPr id="5" name="Rectangle 4"/>
-          <p:cNvSpPr/>
-          <p:nvPr/>
-        </p:nvSpPr>
-        <p:spPr>
-          <a:xfrm>
-            <a:off x="0" y="1051560"/>
-            <a:ext cx="12191695" cy="25400"/>
-          </a:xfrm>
-          <a:prstGeom prst="rect">
-            <a:avLst/>
-          </a:prstGeom>
-          <a:solidFill>
-            <a:srgbClr val="F59E0B"/>
+          <p:cNvPr id="6" name="Rectangle 5"/>
+          <p:cNvSpPr/>
+          <p:nvPr/>
+        </p:nvSpPr>
+        <p:spPr>
+          <a:xfrm>
+            <a:off x="0" y="1078992"/>
+            <a:ext cx="12191695" cy="12700"/>
+          </a:xfrm>
+          <a:prstGeom prst="rect">
+            <a:avLst/>
+          </a:prstGeom>
+          <a:solidFill>
+            <a:srgbClr val="253350"/>
           </a:solidFill>
           <a:ln>
             <a:noFill/>
@@ -10855,20 +11156,20 @@
       </p:sp>
       <p:sp>
         <p:nvSpPr>
-          <p:cNvPr id="6" name="Rounded Rectangle 5"/>
-          <p:cNvSpPr/>
-          <p:nvPr/>
-        </p:nvSpPr>
-        <p:spPr>
-          <a:xfrm>
-            <a:off x="365760" y="1371600"/>
-            <a:ext cx="5486400" cy="4846320"/>
+          <p:cNvPr id="7" name="Rounded Rectangle 6"/>
+          <p:cNvSpPr/>
+          <p:nvPr/>
+        </p:nvSpPr>
+        <p:spPr>
+          <a:xfrm>
+            <a:off x="457200" y="1371600"/>
+            <a:ext cx="5349240" cy="4754880"/>
           </a:xfrm>
           <a:prstGeom prst="roundRect">
             <a:avLst/>
           </a:prstGeom>
           <a:solidFill>
-            <a:srgbClr val="141E33"/>
+            <a:srgbClr val="161F35"/>
           </a:solidFill>
           <a:ln>
             <a:noFill/>
@@ -10898,14 +11199,14 @@
       </p:sp>
       <p:sp>
         <p:nvSpPr>
-          <p:cNvPr id="7" name="Rectangle 6"/>
-          <p:cNvSpPr/>
-          <p:nvPr/>
-        </p:nvSpPr>
-        <p:spPr>
-          <a:xfrm>
-            <a:off x="365760" y="1371600"/>
-            <a:ext cx="5486400" cy="73152"/>
+          <p:cNvPr id="8" name="Rectangle 7"/>
+          <p:cNvSpPr/>
+          <p:nvPr/>
+        </p:nvSpPr>
+        <p:spPr>
+          <a:xfrm>
+            <a:off x="457200" y="1371600"/>
+            <a:ext cx="5349240" cy="38100"/>
           </a:xfrm>
           <a:prstGeom prst="rect">
             <a:avLst/>
@@ -10941,14 +11242,14 @@
       </p:sp>
       <p:sp>
         <p:nvSpPr>
-          <p:cNvPr id="8" name="TextBox 7"/>
+          <p:cNvPr id="9" name="TextBox 8"/>
           <p:cNvSpPr txBox="1"/>
           <p:nvPr/>
         </p:nvSpPr>
         <p:spPr>
           <a:xfrm>
-            <a:off x="640080" y="1645920"/>
-            <a:ext cx="4937760" cy="457200"/>
+            <a:off x="731520" y="1600200"/>
+            <a:ext cx="4754880" cy="411480"/>
           </a:xfrm>
           <a:prstGeom prst="rect">
             <a:avLst/>
@@ -10962,7 +11263,7 @@
           <a:lstStyle/>
           <a:p>
             <a:pPr algn="l">
-              <a:defRPr sz="2000" b="1">
+              <a:defRPr sz="1800" b="1">
                 <a:solidFill>
                   <a:srgbClr val="F59E0B"/>
                 </a:solidFill>
@@ -10977,14 +11278,14 @@
       </p:sp>
       <p:sp>
         <p:nvSpPr>
-          <p:cNvPr id="9" name="Rectangle 8"/>
-          <p:cNvSpPr/>
-          <p:nvPr/>
-        </p:nvSpPr>
-        <p:spPr>
-          <a:xfrm>
-            <a:off x="640080" y="2194560"/>
-            <a:ext cx="1371600" cy="38100"/>
+          <p:cNvPr id="10" name="Rectangle 9"/>
+          <p:cNvSpPr/>
+          <p:nvPr/>
+        </p:nvSpPr>
+        <p:spPr>
+          <a:xfrm>
+            <a:off x="731520" y="2103120"/>
+            <a:ext cx="1097280" cy="25400"/>
           </a:xfrm>
           <a:prstGeom prst="rect">
             <a:avLst/>
@@ -11020,14 +11321,14 @@
       </p:sp>
       <p:sp>
         <p:nvSpPr>
-          <p:cNvPr id="10" name="Oval 9"/>
-          <p:cNvSpPr/>
-          <p:nvPr/>
-        </p:nvSpPr>
-        <p:spPr>
-          <a:xfrm>
-            <a:off x="731520" y="2542032"/>
-            <a:ext cx="182880" cy="182880"/>
+          <p:cNvPr id="11" name="Oval 10"/>
+          <p:cNvSpPr/>
+          <p:nvPr/>
+        </p:nvSpPr>
+        <p:spPr>
+          <a:xfrm>
+            <a:off x="731520" y="2432304"/>
+            <a:ext cx="164592" cy="164592"/>
           </a:xfrm>
           <a:prstGeom prst="ellipse">
             <a:avLst/>
@@ -11063,14 +11364,14 @@
       </p:sp>
       <p:sp>
         <p:nvSpPr>
-          <p:cNvPr id="11" name="TextBox 10"/>
+          <p:cNvPr id="12" name="TextBox 11"/>
           <p:cNvSpPr txBox="1"/>
           <p:nvPr/>
         </p:nvSpPr>
         <p:spPr>
           <a:xfrm>
-            <a:off x="1051560" y="2468880"/>
-            <a:ext cx="4572000" cy="502920"/>
+            <a:off x="1051560" y="2377440"/>
+            <a:ext cx="4572000" cy="411480"/>
           </a:xfrm>
           <a:prstGeom prst="rect">
             <a:avLst/>
@@ -11086,7 +11387,7 @@
             <a:pPr algn="l">
               <a:defRPr sz="1400" b="0">
                 <a:solidFill>
-                  <a:srgbClr val="CBD5E8"/>
+                  <a:srgbClr val="A0AEC4"/>
                 </a:solidFill>
                 <a:latin typeface="Microsoft YaHei"/>
               </a:defRPr>
@@ -11099,14 +11400,14 @@
       </p:sp>
       <p:sp>
         <p:nvSpPr>
-          <p:cNvPr id="12" name="Oval 11"/>
-          <p:cNvSpPr/>
-          <p:nvPr/>
-        </p:nvSpPr>
-        <p:spPr>
-          <a:xfrm>
-            <a:off x="731520" y="3136392"/>
-            <a:ext cx="182880" cy="182880"/>
+          <p:cNvPr id="13" name="Oval 12"/>
+          <p:cNvSpPr/>
+          <p:nvPr/>
+        </p:nvSpPr>
+        <p:spPr>
+          <a:xfrm>
+            <a:off x="731520" y="2935224"/>
+            <a:ext cx="164592" cy="164592"/>
           </a:xfrm>
           <a:prstGeom prst="ellipse">
             <a:avLst/>
@@ -11142,14 +11443,14 @@
       </p:sp>
       <p:sp>
         <p:nvSpPr>
-          <p:cNvPr id="13" name="TextBox 12"/>
+          <p:cNvPr id="14" name="TextBox 13"/>
           <p:cNvSpPr txBox="1"/>
           <p:nvPr/>
         </p:nvSpPr>
         <p:spPr>
           <a:xfrm>
-            <a:off x="1051560" y="3063240"/>
-            <a:ext cx="4572000" cy="502920"/>
+            <a:off x="1051560" y="2880360"/>
+            <a:ext cx="4572000" cy="411480"/>
           </a:xfrm>
           <a:prstGeom prst="rect">
             <a:avLst/>
@@ -11165,7 +11466,7 @@
             <a:pPr algn="l">
               <a:defRPr sz="1400" b="0">
                 <a:solidFill>
-                  <a:srgbClr val="CBD5E8"/>
+                  <a:srgbClr val="A0AEC4"/>
                 </a:solidFill>
                 <a:latin typeface="Microsoft YaHei"/>
               </a:defRPr>
@@ -11178,14 +11479,14 @@
       </p:sp>
       <p:sp>
         <p:nvSpPr>
-          <p:cNvPr id="14" name="Oval 13"/>
-          <p:cNvSpPr/>
-          <p:nvPr/>
-        </p:nvSpPr>
-        <p:spPr>
-          <a:xfrm>
-            <a:off x="731520" y="3730752"/>
-            <a:ext cx="182880" cy="182880"/>
+          <p:cNvPr id="15" name="Oval 14"/>
+          <p:cNvSpPr/>
+          <p:nvPr/>
+        </p:nvSpPr>
+        <p:spPr>
+          <a:xfrm>
+            <a:off x="731520" y="3438144"/>
+            <a:ext cx="164592" cy="164592"/>
           </a:xfrm>
           <a:prstGeom prst="ellipse">
             <a:avLst/>
@@ -11221,14 +11522,14 @@
       </p:sp>
       <p:sp>
         <p:nvSpPr>
-          <p:cNvPr id="15" name="TextBox 14"/>
+          <p:cNvPr id="16" name="TextBox 15"/>
           <p:cNvSpPr txBox="1"/>
           <p:nvPr/>
         </p:nvSpPr>
         <p:spPr>
           <a:xfrm>
-            <a:off x="1051560" y="3657600"/>
-            <a:ext cx="4572000" cy="502920"/>
+            <a:off x="1051560" y="3383280"/>
+            <a:ext cx="4572000" cy="411480"/>
           </a:xfrm>
           <a:prstGeom prst="rect">
             <a:avLst/>
@@ -11244,7 +11545,7 @@
             <a:pPr algn="l">
               <a:defRPr sz="1400" b="0">
                 <a:solidFill>
-                  <a:srgbClr val="CBD5E8"/>
+                  <a:srgbClr val="A0AEC4"/>
                 </a:solidFill>
                 <a:latin typeface="Microsoft YaHei"/>
               </a:defRPr>
@@ -11257,14 +11558,14 @@
       </p:sp>
       <p:sp>
         <p:nvSpPr>
-          <p:cNvPr id="16" name="Oval 15"/>
-          <p:cNvSpPr/>
-          <p:nvPr/>
-        </p:nvSpPr>
-        <p:spPr>
-          <a:xfrm>
-            <a:off x="731520" y="4325112"/>
-            <a:ext cx="182880" cy="182880"/>
+          <p:cNvPr id="17" name="Oval 16"/>
+          <p:cNvSpPr/>
+          <p:nvPr/>
+        </p:nvSpPr>
+        <p:spPr>
+          <a:xfrm>
+            <a:off x="731520" y="3941064"/>
+            <a:ext cx="164592" cy="164592"/>
           </a:xfrm>
           <a:prstGeom prst="ellipse">
             <a:avLst/>
@@ -11300,14 +11601,14 @@
       </p:sp>
       <p:sp>
         <p:nvSpPr>
-          <p:cNvPr id="17" name="TextBox 16"/>
+          <p:cNvPr id="18" name="TextBox 17"/>
           <p:cNvSpPr txBox="1"/>
           <p:nvPr/>
         </p:nvSpPr>
         <p:spPr>
           <a:xfrm>
-            <a:off x="1051560" y="4251960"/>
-            <a:ext cx="4572000" cy="502920"/>
+            <a:off x="1051560" y="3886200"/>
+            <a:ext cx="4572000" cy="411480"/>
           </a:xfrm>
           <a:prstGeom prst="rect">
             <a:avLst/>
@@ -11323,7 +11624,7 @@
             <a:pPr algn="l">
               <a:defRPr sz="1400" b="0">
                 <a:solidFill>
-                  <a:srgbClr val="CBD5E8"/>
+                  <a:srgbClr val="A0AEC4"/>
                 </a:solidFill>
                 <a:latin typeface="Microsoft YaHei"/>
               </a:defRPr>
@@ -11336,14 +11637,14 @@
       </p:sp>
       <p:sp>
         <p:nvSpPr>
-          <p:cNvPr id="18" name="Oval 17"/>
-          <p:cNvSpPr/>
-          <p:nvPr/>
-        </p:nvSpPr>
-        <p:spPr>
-          <a:xfrm>
-            <a:off x="731520" y="4919472"/>
-            <a:ext cx="182880" cy="182880"/>
+          <p:cNvPr id="19" name="Oval 18"/>
+          <p:cNvSpPr/>
+          <p:nvPr/>
+        </p:nvSpPr>
+        <p:spPr>
+          <a:xfrm>
+            <a:off x="731520" y="4443984"/>
+            <a:ext cx="164592" cy="164592"/>
           </a:xfrm>
           <a:prstGeom prst="ellipse">
             <a:avLst/>
@@ -11379,14 +11680,14 @@
       </p:sp>
       <p:sp>
         <p:nvSpPr>
-          <p:cNvPr id="19" name="TextBox 18"/>
+          <p:cNvPr id="20" name="TextBox 19"/>
           <p:cNvSpPr txBox="1"/>
           <p:nvPr/>
         </p:nvSpPr>
         <p:spPr>
           <a:xfrm>
-            <a:off x="1051560" y="4846320"/>
-            <a:ext cx="4572000" cy="502920"/>
+            <a:off x="1051560" y="4389120"/>
+            <a:ext cx="4572000" cy="411480"/>
           </a:xfrm>
           <a:prstGeom prst="rect">
             <a:avLst/>
@@ -11402,7 +11703,7 @@
             <a:pPr algn="l">
               <a:defRPr sz="1400" b="0">
                 <a:solidFill>
-                  <a:srgbClr val="CBD5E8"/>
+                  <a:srgbClr val="A0AEC4"/>
                 </a:solidFill>
                 <a:latin typeface="Microsoft YaHei"/>
               </a:defRPr>
@@ -11415,20 +11716,20 @@
       </p:sp>
       <p:sp>
         <p:nvSpPr>
-          <p:cNvPr id="20" name="Rounded Rectangle 19"/>
-          <p:cNvSpPr/>
-          <p:nvPr/>
-        </p:nvSpPr>
-        <p:spPr>
-          <a:xfrm>
-            <a:off x="6217920" y="1371600"/>
-            <a:ext cx="5486400" cy="4846320"/>
+          <p:cNvPr id="21" name="Rounded Rectangle 20"/>
+          <p:cNvSpPr/>
+          <p:nvPr/>
+        </p:nvSpPr>
+        <p:spPr>
+          <a:xfrm>
+            <a:off x="6263640" y="1371600"/>
+            <a:ext cx="5349240" cy="4754880"/>
           </a:xfrm>
           <a:prstGeom prst="roundRect">
             <a:avLst/>
           </a:prstGeom>
           <a:solidFill>
-            <a:srgbClr val="141E33"/>
+            <a:srgbClr val="161F35"/>
           </a:solidFill>
           <a:ln>
             <a:noFill/>
@@ -11458,20 +11759,20 @@
       </p:sp>
       <p:sp>
         <p:nvSpPr>
-          <p:cNvPr id="21" name="Rectangle 20"/>
-          <p:cNvSpPr/>
-          <p:nvPr/>
-        </p:nvSpPr>
-        <p:spPr>
-          <a:xfrm>
-            <a:off x="6217920" y="1371600"/>
-            <a:ext cx="5486400" cy="73152"/>
-          </a:xfrm>
-          <a:prstGeom prst="rect">
-            <a:avLst/>
-          </a:prstGeom>
-          <a:solidFill>
-            <a:srgbClr val="7C3AED"/>
+          <p:cNvPr id="22" name="Rectangle 21"/>
+          <p:cNvSpPr/>
+          <p:nvPr/>
+        </p:nvSpPr>
+        <p:spPr>
+          <a:xfrm>
+            <a:off x="6263640" y="1371600"/>
+            <a:ext cx="5349240" cy="38100"/>
+          </a:xfrm>
+          <a:prstGeom prst="rect">
+            <a:avLst/>
+          </a:prstGeom>
+          <a:solidFill>
+            <a:srgbClr val="8B5CF6"/>
           </a:solidFill>
           <a:ln>
             <a:noFill/>
@@ -11501,14 +11802,14 @@
       </p:sp>
       <p:sp>
         <p:nvSpPr>
-          <p:cNvPr id="22" name="TextBox 21"/>
+          <p:cNvPr id="23" name="TextBox 22"/>
           <p:cNvSpPr txBox="1"/>
           <p:nvPr/>
         </p:nvSpPr>
         <p:spPr>
           <a:xfrm>
-            <a:off x="6492240" y="1645920"/>
-            <a:ext cx="4937760" cy="457200"/>
+            <a:off x="6537960" y="1600200"/>
+            <a:ext cx="4754880" cy="411480"/>
           </a:xfrm>
           <a:prstGeom prst="rect">
             <a:avLst/>
@@ -11522,9 +11823,9 @@
           <a:lstStyle/>
           <a:p>
             <a:pPr algn="l">
-              <a:defRPr sz="2000" b="1">
+              <a:defRPr sz="1800" b="1">
                 <a:solidFill>
-                  <a:srgbClr val="7C3AED"/>
+                  <a:srgbClr val="8B5CF6"/>
                 </a:solidFill>
                 <a:latin typeface="Microsoft YaHei"/>
               </a:defRPr>
@@ -11537,20 +11838,20 @@
       </p:sp>
       <p:sp>
         <p:nvSpPr>
-          <p:cNvPr id="23" name="Rectangle 22"/>
-          <p:cNvSpPr/>
-          <p:nvPr/>
-        </p:nvSpPr>
-        <p:spPr>
-          <a:xfrm>
-            <a:off x="6492240" y="2194560"/>
-            <a:ext cx="1371600" cy="38100"/>
-          </a:xfrm>
-          <a:prstGeom prst="rect">
-            <a:avLst/>
-          </a:prstGeom>
-          <a:solidFill>
-            <a:srgbClr val="7C3AED"/>
+          <p:cNvPr id="24" name="Rectangle 23"/>
+          <p:cNvSpPr/>
+          <p:nvPr/>
+        </p:nvSpPr>
+        <p:spPr>
+          <a:xfrm>
+            <a:off x="6537960" y="2103120"/>
+            <a:ext cx="1097280" cy="25400"/>
+          </a:xfrm>
+          <a:prstGeom prst="rect">
+            <a:avLst/>
+          </a:prstGeom>
+          <a:solidFill>
+            <a:srgbClr val="8B5CF6"/>
           </a:solidFill>
           <a:ln>
             <a:noFill/>
@@ -11580,20 +11881,20 @@
       </p:sp>
       <p:sp>
         <p:nvSpPr>
-          <p:cNvPr id="24" name="Oval 23"/>
-          <p:cNvSpPr/>
-          <p:nvPr/>
-        </p:nvSpPr>
-        <p:spPr>
-          <a:xfrm>
-            <a:off x="6583680" y="2542032"/>
-            <a:ext cx="182880" cy="182880"/>
+          <p:cNvPr id="25" name="Oval 24"/>
+          <p:cNvSpPr/>
+          <p:nvPr/>
+        </p:nvSpPr>
+        <p:spPr>
+          <a:xfrm>
+            <a:off x="6537960" y="2432304"/>
+            <a:ext cx="164592" cy="164592"/>
           </a:xfrm>
           <a:prstGeom prst="ellipse">
             <a:avLst/>
           </a:prstGeom>
           <a:solidFill>
-            <a:srgbClr val="7C3AED"/>
+            <a:srgbClr val="8B5CF6"/>
           </a:solidFill>
           <a:ln>
             <a:noFill/>
@@ -11623,14 +11924,14 @@
       </p:sp>
       <p:sp>
         <p:nvSpPr>
-          <p:cNvPr id="25" name="TextBox 24"/>
+          <p:cNvPr id="26" name="TextBox 25"/>
           <p:cNvSpPr txBox="1"/>
           <p:nvPr/>
         </p:nvSpPr>
         <p:spPr>
           <a:xfrm>
-            <a:off x="6903720" y="2468880"/>
-            <a:ext cx="4572000" cy="502920"/>
+            <a:off x="6858000" y="2377440"/>
+            <a:ext cx="4572000" cy="411480"/>
           </a:xfrm>
           <a:prstGeom prst="rect">
             <a:avLst/>
@@ -11646,7 +11947,7 @@
             <a:pPr algn="l">
               <a:defRPr sz="1400" b="0">
                 <a:solidFill>
-                  <a:srgbClr val="CBD5E8"/>
+                  <a:srgbClr val="A0AEC4"/>
                 </a:solidFill>
                 <a:latin typeface="Microsoft YaHei"/>
               </a:defRPr>
@@ -11659,20 +11960,20 @@
       </p:sp>
       <p:sp>
         <p:nvSpPr>
-          <p:cNvPr id="26" name="Oval 25"/>
-          <p:cNvSpPr/>
-          <p:nvPr/>
-        </p:nvSpPr>
-        <p:spPr>
-          <a:xfrm>
-            <a:off x="6583680" y="3136392"/>
-            <a:ext cx="182880" cy="182880"/>
+          <p:cNvPr id="27" name="Oval 26"/>
+          <p:cNvSpPr/>
+          <p:nvPr/>
+        </p:nvSpPr>
+        <p:spPr>
+          <a:xfrm>
+            <a:off x="6537960" y="2935224"/>
+            <a:ext cx="164592" cy="164592"/>
           </a:xfrm>
           <a:prstGeom prst="ellipse">
             <a:avLst/>
           </a:prstGeom>
           <a:solidFill>
-            <a:srgbClr val="7C3AED"/>
+            <a:srgbClr val="8B5CF6"/>
           </a:solidFill>
           <a:ln>
             <a:noFill/>
@@ -11702,14 +12003,14 @@
       </p:sp>
       <p:sp>
         <p:nvSpPr>
-          <p:cNvPr id="27" name="TextBox 26"/>
+          <p:cNvPr id="28" name="TextBox 27"/>
           <p:cNvSpPr txBox="1"/>
           <p:nvPr/>
         </p:nvSpPr>
         <p:spPr>
           <a:xfrm>
-            <a:off x="6903720" y="3063240"/>
-            <a:ext cx="4572000" cy="502920"/>
+            <a:off x="6858000" y="2880360"/>
+            <a:ext cx="4572000" cy="411480"/>
           </a:xfrm>
           <a:prstGeom prst="rect">
             <a:avLst/>
@@ -11725,7 +12026,7 @@
             <a:pPr algn="l">
               <a:defRPr sz="1400" b="0">
                 <a:solidFill>
-                  <a:srgbClr val="CBD5E8"/>
+                  <a:srgbClr val="A0AEC4"/>
                 </a:solidFill>
                 <a:latin typeface="Microsoft YaHei"/>
               </a:defRPr>
@@ -11738,20 +12039,20 @@
       </p:sp>
       <p:sp>
         <p:nvSpPr>
-          <p:cNvPr id="28" name="Oval 27"/>
-          <p:cNvSpPr/>
-          <p:nvPr/>
-        </p:nvSpPr>
-        <p:spPr>
-          <a:xfrm>
-            <a:off x="6583680" y="3730752"/>
-            <a:ext cx="182880" cy="182880"/>
+          <p:cNvPr id="29" name="Oval 28"/>
+          <p:cNvSpPr/>
+          <p:nvPr/>
+        </p:nvSpPr>
+        <p:spPr>
+          <a:xfrm>
+            <a:off x="6537960" y="3438144"/>
+            <a:ext cx="164592" cy="164592"/>
           </a:xfrm>
           <a:prstGeom prst="ellipse">
             <a:avLst/>
           </a:prstGeom>
           <a:solidFill>
-            <a:srgbClr val="7C3AED"/>
+            <a:srgbClr val="8B5CF6"/>
           </a:solidFill>
           <a:ln>
             <a:noFill/>
@@ -11781,14 +12082,14 @@
       </p:sp>
       <p:sp>
         <p:nvSpPr>
-          <p:cNvPr id="29" name="TextBox 28"/>
+          <p:cNvPr id="30" name="TextBox 29"/>
           <p:cNvSpPr txBox="1"/>
           <p:nvPr/>
         </p:nvSpPr>
         <p:spPr>
           <a:xfrm>
-            <a:off x="6903720" y="3657600"/>
-            <a:ext cx="4572000" cy="502920"/>
+            <a:off x="6858000" y="3383280"/>
+            <a:ext cx="4572000" cy="411480"/>
           </a:xfrm>
           <a:prstGeom prst="rect">
             <a:avLst/>
@@ -11804,7 +12105,7 @@
             <a:pPr algn="l">
               <a:defRPr sz="1400" b="0">
                 <a:solidFill>
-                  <a:srgbClr val="CBD5E8"/>
+                  <a:srgbClr val="A0AEC4"/>
                 </a:solidFill>
                 <a:latin typeface="Microsoft YaHei"/>
               </a:defRPr>
@@ -11817,20 +12118,20 @@
       </p:sp>
       <p:sp>
         <p:nvSpPr>
-          <p:cNvPr id="30" name="Oval 29"/>
-          <p:cNvSpPr/>
-          <p:nvPr/>
-        </p:nvSpPr>
-        <p:spPr>
-          <a:xfrm>
-            <a:off x="6583680" y="4325112"/>
-            <a:ext cx="182880" cy="182880"/>
+          <p:cNvPr id="31" name="Oval 30"/>
+          <p:cNvSpPr/>
+          <p:nvPr/>
+        </p:nvSpPr>
+        <p:spPr>
+          <a:xfrm>
+            <a:off x="6537960" y="3941064"/>
+            <a:ext cx="164592" cy="164592"/>
           </a:xfrm>
           <a:prstGeom prst="ellipse">
             <a:avLst/>
           </a:prstGeom>
           <a:solidFill>
-            <a:srgbClr val="7C3AED"/>
+            <a:srgbClr val="8B5CF6"/>
           </a:solidFill>
           <a:ln>
             <a:noFill/>
@@ -11860,14 +12161,14 @@
       </p:sp>
       <p:sp>
         <p:nvSpPr>
-          <p:cNvPr id="31" name="TextBox 30"/>
+          <p:cNvPr id="32" name="TextBox 31"/>
           <p:cNvSpPr txBox="1"/>
           <p:nvPr/>
         </p:nvSpPr>
         <p:spPr>
           <a:xfrm>
-            <a:off x="6903720" y="4251960"/>
-            <a:ext cx="4572000" cy="502920"/>
+            <a:off x="6858000" y="3886200"/>
+            <a:ext cx="4572000" cy="411480"/>
           </a:xfrm>
           <a:prstGeom prst="rect">
             <a:avLst/>
@@ -11883,7 +12184,7 @@
             <a:pPr algn="l">
               <a:defRPr sz="1400" b="0">
                 <a:solidFill>
-                  <a:srgbClr val="CBD5E8"/>
+                  <a:srgbClr val="A0AEC4"/>
                 </a:solidFill>
                 <a:latin typeface="Microsoft YaHei"/>
               </a:defRPr>
@@ -11896,20 +12197,20 @@
       </p:sp>
       <p:sp>
         <p:nvSpPr>
-          <p:cNvPr id="32" name="Oval 31"/>
-          <p:cNvSpPr/>
-          <p:nvPr/>
-        </p:nvSpPr>
-        <p:spPr>
-          <a:xfrm>
-            <a:off x="6583680" y="4919472"/>
-            <a:ext cx="182880" cy="182880"/>
+          <p:cNvPr id="33" name="Oval 32"/>
+          <p:cNvSpPr/>
+          <p:nvPr/>
+        </p:nvSpPr>
+        <p:spPr>
+          <a:xfrm>
+            <a:off x="6537960" y="4443984"/>
+            <a:ext cx="164592" cy="164592"/>
           </a:xfrm>
           <a:prstGeom prst="ellipse">
             <a:avLst/>
           </a:prstGeom>
           <a:solidFill>
-            <a:srgbClr val="7C3AED"/>
+            <a:srgbClr val="8B5CF6"/>
           </a:solidFill>
           <a:ln>
             <a:noFill/>
@@ -11939,14 +12240,14 @@
       </p:sp>
       <p:sp>
         <p:nvSpPr>
-          <p:cNvPr id="33" name="TextBox 32"/>
+          <p:cNvPr id="34" name="TextBox 33"/>
           <p:cNvSpPr txBox="1"/>
           <p:nvPr/>
         </p:nvSpPr>
         <p:spPr>
           <a:xfrm>
-            <a:off x="6903720" y="4846320"/>
-            <a:ext cx="4572000" cy="502920"/>
+            <a:off x="6858000" y="4389120"/>
+            <a:ext cx="4572000" cy="411480"/>
           </a:xfrm>
           <a:prstGeom prst="rect">
             <a:avLst/>
@@ -11962,7 +12263,7 @@
             <a:pPr algn="l">
               <a:defRPr sz="1400" b="0">
                 <a:solidFill>
-                  <a:srgbClr val="CBD5E8"/>
+                  <a:srgbClr val="A0AEC4"/>
                 </a:solidFill>
                 <a:latin typeface="Microsoft YaHei"/>
               </a:defRPr>
@@ -11975,20 +12276,20 @@
       </p:sp>
       <p:sp>
         <p:nvSpPr>
-          <p:cNvPr id="34" name="Rectangle 33"/>
+          <p:cNvPr id="35" name="Rectangle 34"/>
           <p:cNvSpPr/>
           <p:nvPr/>
         </p:nvSpPr>
         <p:spPr>
           <a:xfrm>
             <a:off x="0" y="6446520"/>
-            <a:ext cx="12191695" cy="19050"/>
-          </a:xfrm>
-          <a:prstGeom prst="rect">
-            <a:avLst/>
-          </a:prstGeom>
-          <a:solidFill>
-            <a:srgbClr val="2D3B55"/>
+            <a:ext cx="12191695" cy="12700"/>
+          </a:xfrm>
+          <a:prstGeom prst="rect">
+            <a:avLst/>
+          </a:prstGeom>
+          <a:solidFill>
+            <a:srgbClr val="253350"/>
           </a:solidFill>
           <a:ln>
             <a:noFill/>
@@ -12018,14 +12319,14 @@
       </p:sp>
       <p:sp>
         <p:nvSpPr>
-          <p:cNvPr id="35" name="TextBox 34"/>
+          <p:cNvPr id="36" name="TextBox 35"/>
           <p:cNvSpPr txBox="1"/>
           <p:nvPr/>
         </p:nvSpPr>
         <p:spPr>
           <a:xfrm>
-            <a:off x="457200" y="6492240"/>
-            <a:ext cx="5486400" cy="274320"/>
+            <a:off x="731520" y="6492240"/>
+            <a:ext cx="4572000" cy="274320"/>
           </a:xfrm>
           <a:prstGeom prst="rect">
             <a:avLst/>
@@ -12041,20 +12342,20 @@
             <a:pPr algn="l">
               <a:defRPr sz="900" b="0">
                 <a:solidFill>
-                  <a:srgbClr val="6B7B9E"/>
+                  <a:srgbClr val="607090"/>
                 </a:solidFill>
                 <a:latin typeface="Microsoft YaHei"/>
               </a:defRPr>
             </a:pPr>
             <a:r>
-              <a:t>模块14：工业化生产</a:t>
-            </a:r>
-          </a:p>
-        </p:txBody>
-      </p:sp>
-      <p:sp>
-        <p:nvSpPr>
-          <p:cNvPr id="36" name="TextBox 35"/>
+              <a:t>模块14 · 工业化生产</a:t>
+            </a:r>
+          </a:p>
+        </p:txBody>
+      </p:sp>
+      <p:sp>
+        <p:nvSpPr>
+          <p:cNvPr id="37" name="TextBox 36"/>
           <p:cNvSpPr txBox="1"/>
           <p:nvPr/>
         </p:nvSpPr>
@@ -12077,7 +12378,7 @@
             <a:pPr algn="r">
               <a:defRPr sz="900" b="0">
                 <a:solidFill>
-                  <a:srgbClr val="6B7B9E"/>
+                  <a:srgbClr val="607090"/>
                 </a:solidFill>
                 <a:latin typeface="Microsoft YaHei"/>
               </a:defRPr>
@@ -12102,7 +12403,7 @@
     <p:bg>
       <p:bgPr>
         <a:solidFill>
-          <a:srgbClr val="0B1120"/>
+          <a:srgbClr val="0A0E1A"/>
         </a:solidFill>
         <a:effectLst/>
       </p:bgPr>
@@ -12123,13 +12424,13 @@
         <p:spPr>
           <a:xfrm>
             <a:off x="0" y="0"/>
-            <a:ext cx="12191695" cy="1051560"/>
-          </a:xfrm>
-          <a:prstGeom prst="rect">
-            <a:avLst/>
-          </a:prstGeom>
-          <a:solidFill>
-            <a:srgbClr val="141E33"/>
+            <a:ext cx="12191695" cy="38100"/>
+          </a:xfrm>
+          <a:prstGeom prst="rect">
+            <a:avLst/>
+          </a:prstGeom>
+          <a:solidFill>
+            <a:srgbClr val="F59E0B"/>
           </a:solidFill>
           <a:ln>
             <a:noFill/>
@@ -12165,14 +12466,14 @@
         </p:nvSpPr>
         <p:spPr>
           <a:xfrm>
-            <a:off x="0" y="0"/>
-            <a:ext cx="109728" cy="1051560"/>
-          </a:xfrm>
-          <a:prstGeom prst="rect">
-            <a:avLst/>
-          </a:prstGeom>
-          <a:solidFill>
-            <a:srgbClr val="F59E0B"/>
+            <a:off x="0" y="38100"/>
+            <a:ext cx="12191695" cy="914400"/>
+          </a:xfrm>
+          <a:prstGeom prst="rect">
+            <a:avLst/>
+          </a:prstGeom>
+          <a:solidFill>
+            <a:srgbClr val="161F35"/>
           </a:solidFill>
           <a:ln>
             <a:noFill/>
@@ -12202,14 +12503,57 @@
       </p:sp>
       <p:sp>
         <p:nvSpPr>
-          <p:cNvPr id="4" name="TextBox 3"/>
+          <p:cNvPr id="4" name="Rectangle 3"/>
+          <p:cNvSpPr/>
+          <p:nvPr/>
+        </p:nvSpPr>
+        <p:spPr>
+          <a:xfrm>
+            <a:off x="0" y="38100"/>
+            <a:ext cx="91440" cy="914400"/>
+          </a:xfrm>
+          <a:prstGeom prst="rect">
+            <a:avLst/>
+          </a:prstGeom>
+          <a:solidFill>
+            <a:srgbClr val="F59E0B"/>
+          </a:solidFill>
+          <a:ln>
+            <a:noFill/>
+          </a:ln>
+        </p:spPr>
+        <p:style>
+          <a:lnRef idx="1">
+            <a:schemeClr val="accent1"/>
+          </a:lnRef>
+          <a:fillRef idx="3">
+            <a:schemeClr val="accent1"/>
+          </a:fillRef>
+          <a:effectRef idx="2">
+            <a:schemeClr val="accent1"/>
+          </a:effectRef>
+          <a:fontRef idx="minor">
+            <a:schemeClr val="lt1"/>
+          </a:fontRef>
+        </p:style>
+        <p:txBody>
+          <a:bodyPr rtlCol="0" anchor="ctr"/>
+          <a:lstStyle/>
+          <a:p>
+            <a:pPr algn="ctr"/>
+          </a:p>
+        </p:txBody>
+      </p:sp>
+      <p:sp>
+        <p:nvSpPr>
+          <p:cNvPr id="5" name="TextBox 4"/>
           <p:cNvSpPr txBox="1"/>
           <p:nvPr/>
         </p:nvSpPr>
         <p:spPr>
           <a:xfrm>
-            <a:off x="548640" y="182880"/>
-            <a:ext cx="10058400" cy="640080"/>
+            <a:off x="731520" y="137160"/>
+            <a:ext cx="10728655" cy="640080"/>
           </a:xfrm>
           <a:prstGeom prst="rect">
             <a:avLst/>
@@ -12223,9 +12567,9 @@
           <a:lstStyle/>
           <a:p>
             <a:pPr algn="l">
-              <a:defRPr sz="2600" b="1">
+              <a:defRPr sz="2400" b="1">
                 <a:solidFill>
-                  <a:srgbClr val="FFFFFF"/>
+                  <a:srgbClr val="F0F4FC"/>
                 </a:solidFill>
                 <a:latin typeface="Microsoft YaHei"/>
               </a:defRPr>
@@ -12238,20 +12582,20 @@
       </p:sp>
       <p:sp>
         <p:nvSpPr>
-          <p:cNvPr id="5" name="Rectangle 4"/>
-          <p:cNvSpPr/>
-          <p:nvPr/>
-        </p:nvSpPr>
-        <p:spPr>
-          <a:xfrm>
-            <a:off x="0" y="1051560"/>
-            <a:ext cx="12191695" cy="25400"/>
-          </a:xfrm>
-          <a:prstGeom prst="rect">
-            <a:avLst/>
-          </a:prstGeom>
-          <a:solidFill>
-            <a:srgbClr val="F59E0B"/>
+          <p:cNvPr id="6" name="Rectangle 5"/>
+          <p:cNvSpPr/>
+          <p:nvPr/>
+        </p:nvSpPr>
+        <p:spPr>
+          <a:xfrm>
+            <a:off x="0" y="1078992"/>
+            <a:ext cx="12191695" cy="12700"/>
+          </a:xfrm>
+          <a:prstGeom prst="rect">
+            <a:avLst/>
+          </a:prstGeom>
+          <a:solidFill>
+            <a:srgbClr val="253350"/>
           </a:solidFill>
           <a:ln>
             <a:noFill/>
@@ -12281,15 +12625,15 @@
       </p:sp>
       <p:graphicFrame>
         <p:nvGraphicFramePr>
-          <p:cNvPr id="6" name="Table 5"/>
+          <p:cNvPr id="7" name="Table 6"/>
           <p:cNvGraphicFramePr>
             <a:graphicFrameLocks noGrp="1"/>
           </p:cNvGraphicFramePr>
           <p:nvPr/>
         </p:nvGraphicFramePr>
         <p:xfrm>
-          <a:off x="548640" y="1463040"/>
-          <a:ext cx="11064240" cy="4754880"/>
+          <a:off x="548640" y="1371600"/>
+          <a:ext cx="11064240" cy="4389120"/>
         </p:xfrm>
         <a:graphic>
           <a:graphicData uri="http://schemas.openxmlformats.org/drawingml/2006/table">
@@ -12302,16 +12646,16 @@
                 <a:gridCol w="3688080"/>
                 <a:gridCol w="3688080"/>
               </a:tblGrid>
-              <a:tr h="594360">
+              <a:tr h="548640">
                 <a:tc>
                   <a:txBody>
                     <a:bodyPr/>
                     <a:lstStyle/>
                     <a:p>
                       <a:pPr algn="ctr">
-                        <a:defRPr sz="1400" b="1">
+                        <a:defRPr sz="1300" b="1">
                           <a:solidFill>
-                            <a:srgbClr val="FFFFFF"/>
+                            <a:srgbClr val="F0F4FC"/>
                           </a:solidFill>
                           <a:latin typeface="Microsoft YaHei"/>
                         </a:defRPr>
@@ -12333,9 +12677,9 @@
                     <a:lstStyle/>
                     <a:p>
                       <a:pPr algn="ctr">
-                        <a:defRPr sz="1400" b="1">
+                        <a:defRPr sz="1300" b="1">
                           <a:solidFill>
-                            <a:srgbClr val="FFFFFF"/>
+                            <a:srgbClr val="F0F4FC"/>
                           </a:solidFill>
                           <a:latin typeface="Microsoft YaHei"/>
                         </a:defRPr>
@@ -12357,9 +12701,9 @@
                     <a:lstStyle/>
                     <a:p>
                       <a:pPr algn="ctr">
-                        <a:defRPr sz="1400" b="1">
+                        <a:defRPr sz="1300" b="1">
                           <a:solidFill>
-                            <a:srgbClr val="FFFFFF"/>
+                            <a:srgbClr val="F0F4FC"/>
                           </a:solidFill>
                           <a:latin typeface="Microsoft YaHei"/>
                         </a:defRPr>
@@ -12376,16 +12720,16 @@
                   </a:tcPr>
                 </a:tc>
               </a:tr>
-              <a:tr h="594360">
+              <a:tr h="548640">
                 <a:tc>
                   <a:txBody>
                     <a:bodyPr/>
                     <a:lstStyle/>
                     <a:p>
                       <a:pPr algn="ctr">
-                        <a:defRPr sz="1300">
+                        <a:defRPr sz="1200">
                           <a:solidFill>
-                            <a:srgbClr val="CBD5E8"/>
+                            <a:srgbClr val="A0AEC4"/>
                           </a:solidFill>
                           <a:latin typeface="Microsoft YaHei"/>
                         </a:defRPr>
@@ -12397,7 +12741,7 @@
                   </a:txBody>
                   <a:tcPr anchor="ctr">
                     <a:solidFill>
-                      <a:srgbClr val="141E33"/>
+                      <a:srgbClr val="161F35"/>
                     </a:solidFill>
                   </a:tcPr>
                 </a:tc>
@@ -12407,9 +12751,9 @@
                     <a:lstStyle/>
                     <a:p>
                       <a:pPr algn="ctr">
-                        <a:defRPr sz="1300">
+                        <a:defRPr sz="1200">
                           <a:solidFill>
-                            <a:srgbClr val="CBD5E8"/>
+                            <a:srgbClr val="A0AEC4"/>
                           </a:solidFill>
                           <a:latin typeface="Microsoft YaHei"/>
                         </a:defRPr>
@@ -12421,7 +12765,7 @@
                   </a:txBody>
                   <a:tcPr anchor="ctr">
                     <a:solidFill>
-                      <a:srgbClr val="141E33"/>
+                      <a:srgbClr val="161F35"/>
                     </a:solidFill>
                   </a:tcPr>
                 </a:tc>
@@ -12431,9 +12775,9 @@
                     <a:lstStyle/>
                     <a:p>
                       <a:pPr algn="ctr">
-                        <a:defRPr sz="1300">
+                        <a:defRPr sz="1200">
                           <a:solidFill>
-                            <a:srgbClr val="CBD5E8"/>
+                            <a:srgbClr val="A0AEC4"/>
                           </a:solidFill>
                           <a:latin typeface="Microsoft YaHei"/>
                         </a:defRPr>
@@ -12445,21 +12789,21 @@
                   </a:txBody>
                   <a:tcPr anchor="ctr">
                     <a:solidFill>
-                      <a:srgbClr val="141E33"/>
+                      <a:srgbClr val="161F35"/>
                     </a:solidFill>
                   </a:tcPr>
                 </a:tc>
               </a:tr>
-              <a:tr h="594360">
+              <a:tr h="548640">
                 <a:tc>
                   <a:txBody>
                     <a:bodyPr/>
                     <a:lstStyle/>
                     <a:p>
                       <a:pPr algn="ctr">
-                        <a:defRPr sz="1300">
+                        <a:defRPr sz="1200">
                           <a:solidFill>
-                            <a:srgbClr val="CBD5E8"/>
+                            <a:srgbClr val="A0AEC4"/>
                           </a:solidFill>
                           <a:latin typeface="Microsoft YaHei"/>
                         </a:defRPr>
@@ -12471,7 +12815,7 @@
                   </a:txBody>
                   <a:tcPr anchor="ctr">
                     <a:solidFill>
-                      <a:srgbClr val="1A2842"/>
+                      <a:srgbClr val="1C2842"/>
                     </a:solidFill>
                   </a:tcPr>
                 </a:tc>
@@ -12481,9 +12825,9 @@
                     <a:lstStyle/>
                     <a:p>
                       <a:pPr algn="ctr">
-                        <a:defRPr sz="1300">
+                        <a:defRPr sz="1200">
                           <a:solidFill>
-                            <a:srgbClr val="CBD5E8"/>
+                            <a:srgbClr val="A0AEC4"/>
                           </a:solidFill>
                           <a:latin typeface="Microsoft YaHei"/>
                         </a:defRPr>
@@ -12495,7 +12839,7 @@
                   </a:txBody>
                   <a:tcPr anchor="ctr">
                     <a:solidFill>
-                      <a:srgbClr val="1A2842"/>
+                      <a:srgbClr val="1C2842"/>
                     </a:solidFill>
                   </a:tcPr>
                 </a:tc>
@@ -12505,9 +12849,9 @@
                     <a:lstStyle/>
                     <a:p>
                       <a:pPr algn="ctr">
-                        <a:defRPr sz="1300">
+                        <a:defRPr sz="1200">
                           <a:solidFill>
-                            <a:srgbClr val="CBD5E8"/>
+                            <a:srgbClr val="A0AEC4"/>
                           </a:solidFill>
                           <a:latin typeface="Microsoft YaHei"/>
                         </a:defRPr>
@@ -12519,21 +12863,21 @@
                   </a:txBody>
                   <a:tcPr anchor="ctr">
                     <a:solidFill>
-                      <a:srgbClr val="1A2842"/>
+                      <a:srgbClr val="1C2842"/>
                     </a:solidFill>
                   </a:tcPr>
                 </a:tc>
               </a:tr>
-              <a:tr h="594360">
+              <a:tr h="548640">
                 <a:tc>
                   <a:txBody>
                     <a:bodyPr/>
                     <a:lstStyle/>
                     <a:p>
                       <a:pPr algn="ctr">
-                        <a:defRPr sz="1300">
+                        <a:defRPr sz="1200">
                           <a:solidFill>
-                            <a:srgbClr val="CBD5E8"/>
+                            <a:srgbClr val="A0AEC4"/>
                           </a:solidFill>
                           <a:latin typeface="Microsoft YaHei"/>
                         </a:defRPr>
@@ -12545,7 +12889,7 @@
                   </a:txBody>
                   <a:tcPr anchor="ctr">
                     <a:solidFill>
-                      <a:srgbClr val="141E33"/>
+                      <a:srgbClr val="161F35"/>
                     </a:solidFill>
                   </a:tcPr>
                 </a:tc>
@@ -12555,9 +12899,9 @@
                     <a:lstStyle/>
                     <a:p>
                       <a:pPr algn="ctr">
-                        <a:defRPr sz="1300">
+                        <a:defRPr sz="1200">
                           <a:solidFill>
-                            <a:srgbClr val="CBD5E8"/>
+                            <a:srgbClr val="A0AEC4"/>
                           </a:solidFill>
                           <a:latin typeface="Microsoft YaHei"/>
                         </a:defRPr>
@@ -12569,7 +12913,7 @@
                   </a:txBody>
                   <a:tcPr anchor="ctr">
                     <a:solidFill>
-                      <a:srgbClr val="141E33"/>
+                      <a:srgbClr val="161F35"/>
                     </a:solidFill>
                   </a:tcPr>
                 </a:tc>
@@ -12579,9 +12923,9 @@
                     <a:lstStyle/>
                     <a:p>
                       <a:pPr algn="ctr">
-                        <a:defRPr sz="1300">
+                        <a:defRPr sz="1200">
                           <a:solidFill>
-                            <a:srgbClr val="CBD5E8"/>
+                            <a:srgbClr val="A0AEC4"/>
                           </a:solidFill>
                           <a:latin typeface="Microsoft YaHei"/>
                         </a:defRPr>
@@ -12593,21 +12937,21 @@
                   </a:txBody>
                   <a:tcPr anchor="ctr">
                     <a:solidFill>
-                      <a:srgbClr val="141E33"/>
+                      <a:srgbClr val="161F35"/>
                     </a:solidFill>
                   </a:tcPr>
                 </a:tc>
               </a:tr>
-              <a:tr h="594360">
+              <a:tr h="548640">
                 <a:tc>
                   <a:txBody>
                     <a:bodyPr/>
                     <a:lstStyle/>
                     <a:p>
                       <a:pPr algn="ctr">
-                        <a:defRPr sz="1300">
+                        <a:defRPr sz="1200">
                           <a:solidFill>
-                            <a:srgbClr val="CBD5E8"/>
+                            <a:srgbClr val="A0AEC4"/>
                           </a:solidFill>
                           <a:latin typeface="Microsoft YaHei"/>
                         </a:defRPr>
@@ -12619,7 +12963,7 @@
                   </a:txBody>
                   <a:tcPr anchor="ctr">
                     <a:solidFill>
-                      <a:srgbClr val="1A2842"/>
+                      <a:srgbClr val="1C2842"/>
                     </a:solidFill>
                   </a:tcPr>
                 </a:tc>
@@ -12629,9 +12973,9 @@
                     <a:lstStyle/>
                     <a:p>
                       <a:pPr algn="ctr">
-                        <a:defRPr sz="1300">
+                        <a:defRPr sz="1200">
                           <a:solidFill>
-                            <a:srgbClr val="CBD5E8"/>
+                            <a:srgbClr val="A0AEC4"/>
                           </a:solidFill>
                           <a:latin typeface="Microsoft YaHei"/>
                         </a:defRPr>
@@ -12643,7 +12987,7 @@
                   </a:txBody>
                   <a:tcPr anchor="ctr">
                     <a:solidFill>
-                      <a:srgbClr val="1A2842"/>
+                      <a:srgbClr val="1C2842"/>
                     </a:solidFill>
                   </a:tcPr>
                 </a:tc>
@@ -12653,9 +12997,9 @@
                     <a:lstStyle/>
                     <a:p>
                       <a:pPr algn="ctr">
-                        <a:defRPr sz="1300">
+                        <a:defRPr sz="1200">
                           <a:solidFill>
-                            <a:srgbClr val="CBD5E8"/>
+                            <a:srgbClr val="A0AEC4"/>
                           </a:solidFill>
                           <a:latin typeface="Microsoft YaHei"/>
                         </a:defRPr>
@@ -12667,21 +13011,21 @@
                   </a:txBody>
                   <a:tcPr anchor="ctr">
                     <a:solidFill>
-                      <a:srgbClr val="1A2842"/>
+                      <a:srgbClr val="1C2842"/>
                     </a:solidFill>
                   </a:tcPr>
                 </a:tc>
               </a:tr>
-              <a:tr h="594360">
+              <a:tr h="548640">
                 <a:tc>
                   <a:txBody>
                     <a:bodyPr/>
                     <a:lstStyle/>
                     <a:p>
                       <a:pPr algn="ctr">
-                        <a:defRPr sz="1300">
+                        <a:defRPr sz="1200">
                           <a:solidFill>
-                            <a:srgbClr val="CBD5E8"/>
+                            <a:srgbClr val="A0AEC4"/>
                           </a:solidFill>
                           <a:latin typeface="Microsoft YaHei"/>
                         </a:defRPr>
@@ -12693,7 +13037,7 @@
                   </a:txBody>
                   <a:tcPr anchor="ctr">
                     <a:solidFill>
-                      <a:srgbClr val="141E33"/>
+                      <a:srgbClr val="161F35"/>
                     </a:solidFill>
                   </a:tcPr>
                 </a:tc>
@@ -12703,9 +13047,9 @@
                     <a:lstStyle/>
                     <a:p>
                       <a:pPr algn="ctr">
-                        <a:defRPr sz="1300">
+                        <a:defRPr sz="1200">
                           <a:solidFill>
-                            <a:srgbClr val="CBD5E8"/>
+                            <a:srgbClr val="A0AEC4"/>
                           </a:solidFill>
                           <a:latin typeface="Microsoft YaHei"/>
                         </a:defRPr>
@@ -12717,7 +13061,7 @@
                   </a:txBody>
                   <a:tcPr anchor="ctr">
                     <a:solidFill>
-                      <a:srgbClr val="141E33"/>
+                      <a:srgbClr val="161F35"/>
                     </a:solidFill>
                   </a:tcPr>
                 </a:tc>
@@ -12727,9 +13071,9 @@
                     <a:lstStyle/>
                     <a:p>
                       <a:pPr algn="ctr">
-                        <a:defRPr sz="1300">
+                        <a:defRPr sz="1200">
                           <a:solidFill>
-                            <a:srgbClr val="CBD5E8"/>
+                            <a:srgbClr val="A0AEC4"/>
                           </a:solidFill>
                           <a:latin typeface="Microsoft YaHei"/>
                         </a:defRPr>
@@ -12741,21 +13085,21 @@
                   </a:txBody>
                   <a:tcPr anchor="ctr">
                     <a:solidFill>
-                      <a:srgbClr val="141E33"/>
+                      <a:srgbClr val="161F35"/>
                     </a:solidFill>
                   </a:tcPr>
                 </a:tc>
               </a:tr>
-              <a:tr h="594360">
+              <a:tr h="548640">
                 <a:tc>
                   <a:txBody>
                     <a:bodyPr/>
                     <a:lstStyle/>
                     <a:p>
                       <a:pPr algn="ctr">
-                        <a:defRPr sz="1300">
+                        <a:defRPr sz="1200">
                           <a:solidFill>
-                            <a:srgbClr val="CBD5E8"/>
+                            <a:srgbClr val="A0AEC4"/>
                           </a:solidFill>
                           <a:latin typeface="Microsoft YaHei"/>
                         </a:defRPr>
@@ -12767,7 +13111,7 @@
                   </a:txBody>
                   <a:tcPr anchor="ctr">
                     <a:solidFill>
-                      <a:srgbClr val="1A2842"/>
+                      <a:srgbClr val="1C2842"/>
                     </a:solidFill>
                   </a:tcPr>
                 </a:tc>
@@ -12777,9 +13121,9 @@
                     <a:lstStyle/>
                     <a:p>
                       <a:pPr algn="ctr">
-                        <a:defRPr sz="1300">
+                        <a:defRPr sz="1200">
                           <a:solidFill>
-                            <a:srgbClr val="CBD5E8"/>
+                            <a:srgbClr val="A0AEC4"/>
                           </a:solidFill>
                           <a:latin typeface="Microsoft YaHei"/>
                         </a:defRPr>
@@ -12791,7 +13135,7 @@
                   </a:txBody>
                   <a:tcPr anchor="ctr">
                     <a:solidFill>
-                      <a:srgbClr val="1A2842"/>
+                      <a:srgbClr val="1C2842"/>
                     </a:solidFill>
                   </a:tcPr>
                 </a:tc>
@@ -12801,9 +13145,9 @@
                     <a:lstStyle/>
                     <a:p>
                       <a:pPr algn="ctr">
-                        <a:defRPr sz="1300">
+                        <a:defRPr sz="1200">
                           <a:solidFill>
-                            <a:srgbClr val="CBD5E8"/>
+                            <a:srgbClr val="A0AEC4"/>
                           </a:solidFill>
                           <a:latin typeface="Microsoft YaHei"/>
                         </a:defRPr>
@@ -12815,21 +13159,21 @@
                   </a:txBody>
                   <a:tcPr anchor="ctr">
                     <a:solidFill>
-                      <a:srgbClr val="1A2842"/>
+                      <a:srgbClr val="1C2842"/>
                     </a:solidFill>
                   </a:tcPr>
                 </a:tc>
               </a:tr>
-              <a:tr h="594360">
+              <a:tr h="548640">
                 <a:tc>
                   <a:txBody>
                     <a:bodyPr/>
                     <a:lstStyle/>
                     <a:p>
                       <a:pPr algn="ctr">
-                        <a:defRPr sz="1300">
+                        <a:defRPr sz="1200">
                           <a:solidFill>
-                            <a:srgbClr val="CBD5E8"/>
+                            <a:srgbClr val="A0AEC4"/>
                           </a:solidFill>
                           <a:latin typeface="Microsoft YaHei"/>
                         </a:defRPr>
@@ -12841,7 +13185,7 @@
                   </a:txBody>
                   <a:tcPr anchor="ctr">
                     <a:solidFill>
-                      <a:srgbClr val="141E33"/>
+                      <a:srgbClr val="161F35"/>
                     </a:solidFill>
                   </a:tcPr>
                 </a:tc>
@@ -12851,9 +13195,9 @@
                     <a:lstStyle/>
                     <a:p>
                       <a:pPr algn="ctr">
-                        <a:defRPr sz="1300">
+                        <a:defRPr sz="1200">
                           <a:solidFill>
-                            <a:srgbClr val="CBD5E8"/>
+                            <a:srgbClr val="A0AEC4"/>
                           </a:solidFill>
                           <a:latin typeface="Microsoft YaHei"/>
                         </a:defRPr>
@@ -12865,7 +13209,7 @@
                   </a:txBody>
                   <a:tcPr anchor="ctr">
                     <a:solidFill>
-                      <a:srgbClr val="141E33"/>
+                      <a:srgbClr val="161F35"/>
                     </a:solidFill>
                   </a:tcPr>
                 </a:tc>
@@ -12875,9 +13219,9 @@
                     <a:lstStyle/>
                     <a:p>
                       <a:pPr algn="ctr">
-                        <a:defRPr sz="1300">
+                        <a:defRPr sz="1200">
                           <a:solidFill>
-                            <a:srgbClr val="CBD5E8"/>
+                            <a:srgbClr val="A0AEC4"/>
                           </a:solidFill>
                           <a:latin typeface="Microsoft YaHei"/>
                         </a:defRPr>
@@ -12889,7 +13233,7 @@
                   </a:txBody>
                   <a:tcPr anchor="ctr">
                     <a:solidFill>
-                      <a:srgbClr val="141E33"/>
+                      <a:srgbClr val="161F35"/>
                     </a:solidFill>
                   </a:tcPr>
                 </a:tc>
@@ -12900,20 +13244,20 @@
       </p:graphicFrame>
       <p:sp>
         <p:nvSpPr>
-          <p:cNvPr id="7" name="Rectangle 6"/>
+          <p:cNvPr id="8" name="Rectangle 7"/>
           <p:cNvSpPr/>
           <p:nvPr/>
         </p:nvSpPr>
         <p:spPr>
           <a:xfrm>
             <a:off x="0" y="6446520"/>
-            <a:ext cx="12191695" cy="19050"/>
-          </a:xfrm>
-          <a:prstGeom prst="rect">
-            <a:avLst/>
-          </a:prstGeom>
-          <a:solidFill>
-            <a:srgbClr val="2D3B55"/>
+            <a:ext cx="12191695" cy="12700"/>
+          </a:xfrm>
+          <a:prstGeom prst="rect">
+            <a:avLst/>
+          </a:prstGeom>
+          <a:solidFill>
+            <a:srgbClr val="253350"/>
           </a:solidFill>
           <a:ln>
             <a:noFill/>
@@ -12943,14 +13287,14 @@
       </p:sp>
       <p:sp>
         <p:nvSpPr>
-          <p:cNvPr id="8" name="TextBox 7"/>
+          <p:cNvPr id="9" name="TextBox 8"/>
           <p:cNvSpPr txBox="1"/>
           <p:nvPr/>
         </p:nvSpPr>
         <p:spPr>
           <a:xfrm>
-            <a:off x="457200" y="6492240"/>
-            <a:ext cx="5486400" cy="274320"/>
+            <a:off x="731520" y="6492240"/>
+            <a:ext cx="4572000" cy="274320"/>
           </a:xfrm>
           <a:prstGeom prst="rect">
             <a:avLst/>
@@ -12966,20 +13310,20 @@
             <a:pPr algn="l">
               <a:defRPr sz="900" b="0">
                 <a:solidFill>
-                  <a:srgbClr val="6B7B9E"/>
+                  <a:srgbClr val="607090"/>
                 </a:solidFill>
                 <a:latin typeface="Microsoft YaHei"/>
               </a:defRPr>
             </a:pPr>
             <a:r>
-              <a:t>模块14：工业化生产</a:t>
-            </a:r>
-          </a:p>
-        </p:txBody>
-      </p:sp>
-      <p:sp>
-        <p:nvSpPr>
-          <p:cNvPr id="9" name="TextBox 8"/>
+              <a:t>模块14 · 工业化生产</a:t>
+            </a:r>
+          </a:p>
+        </p:txBody>
+      </p:sp>
+      <p:sp>
+        <p:nvSpPr>
+          <p:cNvPr id="10" name="TextBox 9"/>
           <p:cNvSpPr txBox="1"/>
           <p:nvPr/>
         </p:nvSpPr>
@@ -13002,7 +13346,7 @@
             <a:pPr algn="r">
               <a:defRPr sz="900" b="0">
                 <a:solidFill>
-                  <a:srgbClr val="6B7B9E"/>
+                  <a:srgbClr val="607090"/>
                 </a:solidFill>
                 <a:latin typeface="Microsoft YaHei"/>
               </a:defRPr>
@@ -13027,7 +13371,7 @@
     <p:bg>
       <p:bgPr>
         <a:solidFill>
-          <a:srgbClr val="0B1120"/>
+          <a:srgbClr val="0A0E1A"/>
         </a:solidFill>
         <a:effectLst/>
       </p:bgPr>
@@ -13048,13 +13392,13 @@
         <p:spPr>
           <a:xfrm>
             <a:off x="0" y="0"/>
-            <a:ext cx="12191695" cy="1051560"/>
-          </a:xfrm>
-          <a:prstGeom prst="rect">
-            <a:avLst/>
-          </a:prstGeom>
-          <a:solidFill>
-            <a:srgbClr val="141E33"/>
+            <a:ext cx="12191695" cy="38100"/>
+          </a:xfrm>
+          <a:prstGeom prst="rect">
+            <a:avLst/>
+          </a:prstGeom>
+          <a:solidFill>
+            <a:srgbClr val="F59E0B"/>
           </a:solidFill>
           <a:ln>
             <a:noFill/>
@@ -13090,14 +13434,14 @@
         </p:nvSpPr>
         <p:spPr>
           <a:xfrm>
-            <a:off x="0" y="0"/>
-            <a:ext cx="109728" cy="1051560"/>
-          </a:xfrm>
-          <a:prstGeom prst="rect">
-            <a:avLst/>
-          </a:prstGeom>
-          <a:solidFill>
-            <a:srgbClr val="F59E0B"/>
+            <a:off x="0" y="38100"/>
+            <a:ext cx="12191695" cy="914400"/>
+          </a:xfrm>
+          <a:prstGeom prst="rect">
+            <a:avLst/>
+          </a:prstGeom>
+          <a:solidFill>
+            <a:srgbClr val="161F35"/>
           </a:solidFill>
           <a:ln>
             <a:noFill/>
@@ -13127,14 +13471,57 @@
       </p:sp>
       <p:sp>
         <p:nvSpPr>
-          <p:cNvPr id="4" name="TextBox 3"/>
+          <p:cNvPr id="4" name="Rectangle 3"/>
+          <p:cNvSpPr/>
+          <p:nvPr/>
+        </p:nvSpPr>
+        <p:spPr>
+          <a:xfrm>
+            <a:off x="0" y="38100"/>
+            <a:ext cx="91440" cy="914400"/>
+          </a:xfrm>
+          <a:prstGeom prst="rect">
+            <a:avLst/>
+          </a:prstGeom>
+          <a:solidFill>
+            <a:srgbClr val="F59E0B"/>
+          </a:solidFill>
+          <a:ln>
+            <a:noFill/>
+          </a:ln>
+        </p:spPr>
+        <p:style>
+          <a:lnRef idx="1">
+            <a:schemeClr val="accent1"/>
+          </a:lnRef>
+          <a:fillRef idx="3">
+            <a:schemeClr val="accent1"/>
+          </a:fillRef>
+          <a:effectRef idx="2">
+            <a:schemeClr val="accent1"/>
+          </a:effectRef>
+          <a:fontRef idx="minor">
+            <a:schemeClr val="lt1"/>
+          </a:fontRef>
+        </p:style>
+        <p:txBody>
+          <a:bodyPr rtlCol="0" anchor="ctr"/>
+          <a:lstStyle/>
+          <a:p>
+            <a:pPr algn="ctr"/>
+          </a:p>
+        </p:txBody>
+      </p:sp>
+      <p:sp>
+        <p:nvSpPr>
+          <p:cNvPr id="5" name="TextBox 4"/>
           <p:cNvSpPr txBox="1"/>
           <p:nvPr/>
         </p:nvSpPr>
         <p:spPr>
           <a:xfrm>
-            <a:off x="548640" y="182880"/>
-            <a:ext cx="10058400" cy="640080"/>
+            <a:off x="731520" y="137160"/>
+            <a:ext cx="10728655" cy="640080"/>
           </a:xfrm>
           <a:prstGeom prst="rect">
             <a:avLst/>
@@ -13148,9 +13535,9 @@
           <a:lstStyle/>
           <a:p>
             <a:pPr algn="l">
-              <a:defRPr sz="2600" b="1">
+              <a:defRPr sz="2400" b="1">
                 <a:solidFill>
-                  <a:srgbClr val="FFFFFF"/>
+                  <a:srgbClr val="F0F4FC"/>
                 </a:solidFill>
                 <a:latin typeface="Microsoft YaHei"/>
               </a:defRPr>
@@ -13163,20 +13550,20 @@
       </p:sp>
       <p:sp>
         <p:nvSpPr>
-          <p:cNvPr id="5" name="Rectangle 4"/>
-          <p:cNvSpPr/>
-          <p:nvPr/>
-        </p:nvSpPr>
-        <p:spPr>
-          <a:xfrm>
-            <a:off x="0" y="1051560"/>
-            <a:ext cx="12191695" cy="25400"/>
-          </a:xfrm>
-          <a:prstGeom prst="rect">
-            <a:avLst/>
-          </a:prstGeom>
-          <a:solidFill>
-            <a:srgbClr val="F59E0B"/>
+          <p:cNvPr id="6" name="Rectangle 5"/>
+          <p:cNvSpPr/>
+          <p:nvPr/>
+        </p:nvSpPr>
+        <p:spPr>
+          <a:xfrm>
+            <a:off x="0" y="1078992"/>
+            <a:ext cx="12191695" cy="12700"/>
+          </a:xfrm>
+          <a:prstGeom prst="rect">
+            <a:avLst/>
+          </a:prstGeom>
+          <a:solidFill>
+            <a:srgbClr val="253350"/>
           </a:solidFill>
           <a:ln>
             <a:noFill/>
@@ -13206,20 +13593,20 @@
       </p:sp>
       <p:sp>
         <p:nvSpPr>
-          <p:cNvPr id="6" name="Rounded Rectangle 5"/>
-          <p:cNvSpPr/>
-          <p:nvPr/>
-        </p:nvSpPr>
-        <p:spPr>
-          <a:xfrm>
-            <a:off x="457200" y="1325880"/>
-            <a:ext cx="11247120" cy="731520"/>
+          <p:cNvPr id="7" name="Rounded Rectangle 6"/>
+          <p:cNvSpPr/>
+          <p:nvPr/>
+        </p:nvSpPr>
+        <p:spPr>
+          <a:xfrm>
+            <a:off x="457200" y="1280160"/>
+            <a:ext cx="11247120" cy="685800"/>
           </a:xfrm>
           <a:prstGeom prst="roundRect">
             <a:avLst/>
           </a:prstGeom>
           <a:solidFill>
-            <a:srgbClr val="141E33"/>
+            <a:srgbClr val="161F35"/>
           </a:solidFill>
           <a:ln>
             <a:noFill/>
@@ -13249,14 +13636,14 @@
       </p:sp>
       <p:sp>
         <p:nvSpPr>
-          <p:cNvPr id="7" name="Rectangle 6"/>
-          <p:cNvSpPr/>
-          <p:nvPr/>
-        </p:nvSpPr>
-        <p:spPr>
-          <a:xfrm>
-            <a:off x="457200" y="1325880"/>
-            <a:ext cx="73152" cy="731520"/>
+          <p:cNvPr id="8" name="Rectangle 7"/>
+          <p:cNvSpPr/>
+          <p:nvPr/>
+        </p:nvSpPr>
+        <p:spPr>
+          <a:xfrm>
+            <a:off x="457200" y="1280160"/>
+            <a:ext cx="54864" cy="685800"/>
           </a:xfrm>
           <a:prstGeom prst="rect">
             <a:avLst/>
@@ -13292,14 +13679,14 @@
       </p:sp>
       <p:sp>
         <p:nvSpPr>
-          <p:cNvPr id="8" name="Oval 7"/>
-          <p:cNvSpPr/>
-          <p:nvPr/>
-        </p:nvSpPr>
-        <p:spPr>
-          <a:xfrm>
-            <a:off x="731520" y="1490472"/>
-            <a:ext cx="365760" cy="365760"/>
+          <p:cNvPr id="9" name="Oval 8"/>
+          <p:cNvSpPr/>
+          <p:nvPr/>
+        </p:nvSpPr>
+        <p:spPr>
+          <a:xfrm>
+            <a:off x="685800" y="1463040"/>
+            <a:ext cx="320040" cy="320040"/>
           </a:xfrm>
           <a:prstGeom prst="ellipse">
             <a:avLst/>
@@ -13335,14 +13722,14 @@
       </p:sp>
       <p:sp>
         <p:nvSpPr>
-          <p:cNvPr id="9" name="TextBox 8"/>
+          <p:cNvPr id="10" name="TextBox 9"/>
           <p:cNvSpPr txBox="1"/>
           <p:nvPr/>
         </p:nvSpPr>
         <p:spPr>
           <a:xfrm>
-            <a:off x="731520" y="1490472"/>
-            <a:ext cx="365760" cy="365760"/>
+            <a:off x="685800" y="1463040"/>
+            <a:ext cx="320040" cy="320040"/>
           </a:xfrm>
           <a:prstGeom prst="rect">
             <a:avLst/>
@@ -13356,9 +13743,9 @@
           <a:lstStyle/>
           <a:p>
             <a:pPr algn="ctr">
-              <a:defRPr sz="1100" b="1">
+              <a:defRPr sz="1000" b="1">
                 <a:solidFill>
-                  <a:srgbClr val="FFFFFF"/>
+                  <a:srgbClr val="F0F4FC"/>
                 </a:solidFill>
                 <a:latin typeface="Microsoft YaHei"/>
               </a:defRPr>
@@ -13371,14 +13758,14 @@
       </p:sp>
       <p:sp>
         <p:nvSpPr>
-          <p:cNvPr id="10" name="TextBox 9"/>
+          <p:cNvPr id="11" name="TextBox 10"/>
           <p:cNvSpPr txBox="1"/>
           <p:nvPr/>
         </p:nvSpPr>
         <p:spPr>
           <a:xfrm>
-            <a:off x="1280160" y="1417320"/>
-            <a:ext cx="10058400" cy="548640"/>
+            <a:off x="1188720" y="1440180"/>
+            <a:ext cx="10058400" cy="365760"/>
           </a:xfrm>
           <a:prstGeom prst="rect">
             <a:avLst/>
@@ -13392,9 +13779,9 @@
           <a:lstStyle/>
           <a:p>
             <a:pPr algn="l">
-              <a:defRPr sz="1500" b="0">
+              <a:defRPr sz="1400" b="0">
                 <a:solidFill>
-                  <a:srgbClr val="CBD5E8"/>
+                  <a:srgbClr val="A0AEC4"/>
                 </a:solidFill>
                 <a:latin typeface="Microsoft YaHei"/>
               </a:defRPr>
@@ -13407,20 +13794,20 @@
       </p:sp>
       <p:sp>
         <p:nvSpPr>
-          <p:cNvPr id="11" name="Rounded Rectangle 10"/>
-          <p:cNvSpPr/>
-          <p:nvPr/>
-        </p:nvSpPr>
-        <p:spPr>
-          <a:xfrm>
-            <a:off x="457200" y="2194560"/>
-            <a:ext cx="11247120" cy="731520"/>
+          <p:cNvPr id="12" name="Rounded Rectangle 11"/>
+          <p:cNvSpPr/>
+          <p:nvPr/>
+        </p:nvSpPr>
+        <p:spPr>
+          <a:xfrm>
+            <a:off x="457200" y="2297430"/>
+            <a:ext cx="11247120" cy="685800"/>
           </a:xfrm>
           <a:prstGeom prst="roundRect">
             <a:avLst/>
           </a:prstGeom>
           <a:solidFill>
-            <a:srgbClr val="141E33"/>
+            <a:srgbClr val="161F35"/>
           </a:solidFill>
           <a:ln>
             <a:noFill/>
@@ -13450,14 +13837,14 @@
       </p:sp>
       <p:sp>
         <p:nvSpPr>
-          <p:cNvPr id="12" name="Rectangle 11"/>
-          <p:cNvSpPr/>
-          <p:nvPr/>
-        </p:nvSpPr>
-        <p:spPr>
-          <a:xfrm>
-            <a:off x="457200" y="2194560"/>
-            <a:ext cx="73152" cy="731520"/>
+          <p:cNvPr id="13" name="Rectangle 12"/>
+          <p:cNvSpPr/>
+          <p:nvPr/>
+        </p:nvSpPr>
+        <p:spPr>
+          <a:xfrm>
+            <a:off x="457200" y="2297430"/>
+            <a:ext cx="54864" cy="685800"/>
           </a:xfrm>
           <a:prstGeom prst="rect">
             <a:avLst/>
@@ -13493,14 +13880,14 @@
       </p:sp>
       <p:sp>
         <p:nvSpPr>
-          <p:cNvPr id="13" name="Oval 12"/>
-          <p:cNvSpPr/>
-          <p:nvPr/>
-        </p:nvSpPr>
-        <p:spPr>
-          <a:xfrm>
-            <a:off x="731520" y="2359152"/>
-            <a:ext cx="365760" cy="365760"/>
+          <p:cNvPr id="14" name="Oval 13"/>
+          <p:cNvSpPr/>
+          <p:nvPr/>
+        </p:nvSpPr>
+        <p:spPr>
+          <a:xfrm>
+            <a:off x="685800" y="2480310"/>
+            <a:ext cx="320040" cy="320040"/>
           </a:xfrm>
           <a:prstGeom prst="ellipse">
             <a:avLst/>
@@ -13536,14 +13923,14 @@
       </p:sp>
       <p:sp>
         <p:nvSpPr>
-          <p:cNvPr id="14" name="TextBox 13"/>
+          <p:cNvPr id="15" name="TextBox 14"/>
           <p:cNvSpPr txBox="1"/>
           <p:nvPr/>
         </p:nvSpPr>
         <p:spPr>
           <a:xfrm>
-            <a:off x="731520" y="2359152"/>
-            <a:ext cx="365760" cy="365760"/>
+            <a:off x="685800" y="2480310"/>
+            <a:ext cx="320040" cy="320040"/>
           </a:xfrm>
           <a:prstGeom prst="rect">
             <a:avLst/>
@@ -13557,9 +13944,9 @@
           <a:lstStyle/>
           <a:p>
             <a:pPr algn="ctr">
-              <a:defRPr sz="1100" b="1">
+              <a:defRPr sz="1000" b="1">
                 <a:solidFill>
-                  <a:srgbClr val="FFFFFF"/>
+                  <a:srgbClr val="F0F4FC"/>
                 </a:solidFill>
                 <a:latin typeface="Microsoft YaHei"/>
               </a:defRPr>
@@ -13572,14 +13959,14 @@
       </p:sp>
       <p:sp>
         <p:nvSpPr>
-          <p:cNvPr id="15" name="TextBox 14"/>
+          <p:cNvPr id="16" name="TextBox 15"/>
           <p:cNvSpPr txBox="1"/>
           <p:nvPr/>
         </p:nvSpPr>
         <p:spPr>
           <a:xfrm>
-            <a:off x="1280160" y="2286000"/>
-            <a:ext cx="10058400" cy="548640"/>
+            <a:off x="1188720" y="2457450"/>
+            <a:ext cx="10058400" cy="365760"/>
           </a:xfrm>
           <a:prstGeom prst="rect">
             <a:avLst/>
@@ -13593,9 +13980,9 @@
           <a:lstStyle/>
           <a:p>
             <a:pPr algn="l">
-              <a:defRPr sz="1500" b="0">
+              <a:defRPr sz="1400" b="0">
                 <a:solidFill>
-                  <a:srgbClr val="CBD5E8"/>
+                  <a:srgbClr val="A0AEC4"/>
                 </a:solidFill>
                 <a:latin typeface="Microsoft YaHei"/>
               </a:defRPr>
@@ -13608,20 +13995,20 @@
       </p:sp>
       <p:sp>
         <p:nvSpPr>
-          <p:cNvPr id="16" name="Rounded Rectangle 15"/>
-          <p:cNvSpPr/>
-          <p:nvPr/>
-        </p:nvSpPr>
-        <p:spPr>
-          <a:xfrm>
-            <a:off x="457200" y="3063240"/>
-            <a:ext cx="11247120" cy="731520"/>
+          <p:cNvPr id="17" name="Rounded Rectangle 16"/>
+          <p:cNvSpPr/>
+          <p:nvPr/>
+        </p:nvSpPr>
+        <p:spPr>
+          <a:xfrm>
+            <a:off x="457200" y="3314700"/>
+            <a:ext cx="11247120" cy="685800"/>
           </a:xfrm>
           <a:prstGeom prst="roundRect">
             <a:avLst/>
           </a:prstGeom>
           <a:solidFill>
-            <a:srgbClr val="141E33"/>
+            <a:srgbClr val="161F35"/>
           </a:solidFill>
           <a:ln>
             <a:noFill/>
@@ -13651,14 +14038,14 @@
       </p:sp>
       <p:sp>
         <p:nvSpPr>
-          <p:cNvPr id="17" name="Rectangle 16"/>
-          <p:cNvSpPr/>
-          <p:nvPr/>
-        </p:nvSpPr>
-        <p:spPr>
-          <a:xfrm>
-            <a:off x="457200" y="3063240"/>
-            <a:ext cx="73152" cy="731520"/>
+          <p:cNvPr id="18" name="Rectangle 17"/>
+          <p:cNvSpPr/>
+          <p:nvPr/>
+        </p:nvSpPr>
+        <p:spPr>
+          <a:xfrm>
+            <a:off x="457200" y="3314700"/>
+            <a:ext cx="54864" cy="685800"/>
           </a:xfrm>
           <a:prstGeom prst="rect">
             <a:avLst/>
@@ -13694,14 +14081,14 @@
       </p:sp>
       <p:sp>
         <p:nvSpPr>
-          <p:cNvPr id="18" name="Oval 17"/>
-          <p:cNvSpPr/>
-          <p:nvPr/>
-        </p:nvSpPr>
-        <p:spPr>
-          <a:xfrm>
-            <a:off x="731520" y="3227832"/>
-            <a:ext cx="365760" cy="365760"/>
+          <p:cNvPr id="19" name="Oval 18"/>
+          <p:cNvSpPr/>
+          <p:nvPr/>
+        </p:nvSpPr>
+        <p:spPr>
+          <a:xfrm>
+            <a:off x="685800" y="3497580"/>
+            <a:ext cx="320040" cy="320040"/>
           </a:xfrm>
           <a:prstGeom prst="ellipse">
             <a:avLst/>
@@ -13737,14 +14124,14 @@
       </p:sp>
       <p:sp>
         <p:nvSpPr>
-          <p:cNvPr id="19" name="TextBox 18"/>
+          <p:cNvPr id="20" name="TextBox 19"/>
           <p:cNvSpPr txBox="1"/>
           <p:nvPr/>
         </p:nvSpPr>
         <p:spPr>
           <a:xfrm>
-            <a:off x="731520" y="3227832"/>
-            <a:ext cx="365760" cy="365760"/>
+            <a:off x="685800" y="3497580"/>
+            <a:ext cx="320040" cy="320040"/>
           </a:xfrm>
           <a:prstGeom prst="rect">
             <a:avLst/>
@@ -13758,9 +14145,9 @@
           <a:lstStyle/>
           <a:p>
             <a:pPr algn="ctr">
-              <a:defRPr sz="1100" b="1">
+              <a:defRPr sz="1000" b="1">
                 <a:solidFill>
-                  <a:srgbClr val="FFFFFF"/>
+                  <a:srgbClr val="F0F4FC"/>
                 </a:solidFill>
                 <a:latin typeface="Microsoft YaHei"/>
               </a:defRPr>
@@ -13773,14 +14160,14 @@
       </p:sp>
       <p:sp>
         <p:nvSpPr>
-          <p:cNvPr id="20" name="TextBox 19"/>
+          <p:cNvPr id="21" name="TextBox 20"/>
           <p:cNvSpPr txBox="1"/>
           <p:nvPr/>
         </p:nvSpPr>
         <p:spPr>
           <a:xfrm>
-            <a:off x="1280160" y="3154680"/>
-            <a:ext cx="10058400" cy="548640"/>
+            <a:off x="1188720" y="3474720"/>
+            <a:ext cx="10058400" cy="365760"/>
           </a:xfrm>
           <a:prstGeom prst="rect">
             <a:avLst/>
@@ -13794,9 +14181,9 @@
           <a:lstStyle/>
           <a:p>
             <a:pPr algn="l">
-              <a:defRPr sz="1500" b="0">
+              <a:defRPr sz="1400" b="0">
                 <a:solidFill>
-                  <a:srgbClr val="CBD5E8"/>
+                  <a:srgbClr val="A0AEC4"/>
                 </a:solidFill>
                 <a:latin typeface="Microsoft YaHei"/>
               </a:defRPr>
@@ -13809,20 +14196,20 @@
       </p:sp>
       <p:sp>
         <p:nvSpPr>
-          <p:cNvPr id="21" name="Rounded Rectangle 20"/>
-          <p:cNvSpPr/>
-          <p:nvPr/>
-        </p:nvSpPr>
-        <p:spPr>
-          <a:xfrm>
-            <a:off x="457200" y="3931919"/>
-            <a:ext cx="11247120" cy="731520"/>
+          <p:cNvPr id="22" name="Rounded Rectangle 21"/>
+          <p:cNvSpPr/>
+          <p:nvPr/>
+        </p:nvSpPr>
+        <p:spPr>
+          <a:xfrm>
+            <a:off x="457200" y="4331970"/>
+            <a:ext cx="11247120" cy="685800"/>
           </a:xfrm>
           <a:prstGeom prst="roundRect">
             <a:avLst/>
           </a:prstGeom>
           <a:solidFill>
-            <a:srgbClr val="141E33"/>
+            <a:srgbClr val="161F35"/>
           </a:solidFill>
           <a:ln>
             <a:noFill/>
@@ -13852,14 +14239,14 @@
       </p:sp>
       <p:sp>
         <p:nvSpPr>
-          <p:cNvPr id="22" name="Rectangle 21"/>
-          <p:cNvSpPr/>
-          <p:nvPr/>
-        </p:nvSpPr>
-        <p:spPr>
-          <a:xfrm>
-            <a:off x="457200" y="3931919"/>
-            <a:ext cx="73152" cy="731520"/>
+          <p:cNvPr id="23" name="Rectangle 22"/>
+          <p:cNvSpPr/>
+          <p:nvPr/>
+        </p:nvSpPr>
+        <p:spPr>
+          <a:xfrm>
+            <a:off x="457200" y="4331970"/>
+            <a:ext cx="54864" cy="685800"/>
           </a:xfrm>
           <a:prstGeom prst="rect">
             <a:avLst/>
@@ -13895,14 +14282,14 @@
       </p:sp>
       <p:sp>
         <p:nvSpPr>
-          <p:cNvPr id="23" name="Oval 22"/>
-          <p:cNvSpPr/>
-          <p:nvPr/>
-        </p:nvSpPr>
-        <p:spPr>
-          <a:xfrm>
-            <a:off x="731520" y="4096511"/>
-            <a:ext cx="365760" cy="365760"/>
+          <p:cNvPr id="24" name="Oval 23"/>
+          <p:cNvSpPr/>
+          <p:nvPr/>
+        </p:nvSpPr>
+        <p:spPr>
+          <a:xfrm>
+            <a:off x="685800" y="4514850"/>
+            <a:ext cx="320040" cy="320040"/>
           </a:xfrm>
           <a:prstGeom prst="ellipse">
             <a:avLst/>
@@ -13938,14 +14325,14 @@
       </p:sp>
       <p:sp>
         <p:nvSpPr>
-          <p:cNvPr id="24" name="TextBox 23"/>
+          <p:cNvPr id="25" name="TextBox 24"/>
           <p:cNvSpPr txBox="1"/>
           <p:nvPr/>
         </p:nvSpPr>
         <p:spPr>
           <a:xfrm>
-            <a:off x="731520" y="4096511"/>
-            <a:ext cx="365760" cy="365760"/>
+            <a:off x="685800" y="4514850"/>
+            <a:ext cx="320040" cy="320040"/>
           </a:xfrm>
           <a:prstGeom prst="rect">
             <a:avLst/>
@@ -13959,9 +14346,9 @@
           <a:lstStyle/>
           <a:p>
             <a:pPr algn="ctr">
-              <a:defRPr sz="1100" b="1">
+              <a:defRPr sz="1000" b="1">
                 <a:solidFill>
-                  <a:srgbClr val="FFFFFF"/>
+                  <a:srgbClr val="F0F4FC"/>
                 </a:solidFill>
                 <a:latin typeface="Microsoft YaHei"/>
               </a:defRPr>
@@ -13974,14 +14361,14 @@
       </p:sp>
       <p:sp>
         <p:nvSpPr>
-          <p:cNvPr id="25" name="TextBox 24"/>
+          <p:cNvPr id="26" name="TextBox 25"/>
           <p:cNvSpPr txBox="1"/>
           <p:nvPr/>
         </p:nvSpPr>
         <p:spPr>
           <a:xfrm>
-            <a:off x="1280160" y="4023359"/>
-            <a:ext cx="10058400" cy="548640"/>
+            <a:off x="1188720" y="4491990"/>
+            <a:ext cx="10058400" cy="365760"/>
           </a:xfrm>
           <a:prstGeom prst="rect">
             <a:avLst/>
@@ -13995,9 +14382,9 @@
           <a:lstStyle/>
           <a:p>
             <a:pPr algn="l">
-              <a:defRPr sz="1500" b="0">
+              <a:defRPr sz="1400" b="0">
                 <a:solidFill>
-                  <a:srgbClr val="CBD5E8"/>
+                  <a:srgbClr val="A0AEC4"/>
                 </a:solidFill>
                 <a:latin typeface="Microsoft YaHei"/>
               </a:defRPr>
@@ -14010,20 +14397,20 @@
       </p:sp>
       <p:sp>
         <p:nvSpPr>
-          <p:cNvPr id="26" name="Rounded Rectangle 25"/>
-          <p:cNvSpPr/>
-          <p:nvPr/>
-        </p:nvSpPr>
-        <p:spPr>
-          <a:xfrm>
-            <a:off x="457200" y="4800600"/>
-            <a:ext cx="11247120" cy="731520"/>
+          <p:cNvPr id="27" name="Rounded Rectangle 26"/>
+          <p:cNvSpPr/>
+          <p:nvPr/>
+        </p:nvSpPr>
+        <p:spPr>
+          <a:xfrm>
+            <a:off x="457200" y="5349240"/>
+            <a:ext cx="11247120" cy="685800"/>
           </a:xfrm>
           <a:prstGeom prst="roundRect">
             <a:avLst/>
           </a:prstGeom>
           <a:solidFill>
-            <a:srgbClr val="141E33"/>
+            <a:srgbClr val="161F35"/>
           </a:solidFill>
           <a:ln>
             <a:noFill/>
@@ -14053,14 +14440,14 @@
       </p:sp>
       <p:sp>
         <p:nvSpPr>
-          <p:cNvPr id="27" name="Rectangle 26"/>
-          <p:cNvSpPr/>
-          <p:nvPr/>
-        </p:nvSpPr>
-        <p:spPr>
-          <a:xfrm>
-            <a:off x="457200" y="4800600"/>
-            <a:ext cx="73152" cy="731520"/>
+          <p:cNvPr id="28" name="Rectangle 27"/>
+          <p:cNvSpPr/>
+          <p:nvPr/>
+        </p:nvSpPr>
+        <p:spPr>
+          <a:xfrm>
+            <a:off x="457200" y="5349240"/>
+            <a:ext cx="54864" cy="685800"/>
           </a:xfrm>
           <a:prstGeom prst="rect">
             <a:avLst/>
@@ -14096,14 +14483,14 @@
       </p:sp>
       <p:sp>
         <p:nvSpPr>
-          <p:cNvPr id="28" name="Oval 27"/>
-          <p:cNvSpPr/>
-          <p:nvPr/>
-        </p:nvSpPr>
-        <p:spPr>
-          <a:xfrm>
-            <a:off x="731520" y="4965192"/>
-            <a:ext cx="365760" cy="365760"/>
+          <p:cNvPr id="29" name="Oval 28"/>
+          <p:cNvSpPr/>
+          <p:nvPr/>
+        </p:nvSpPr>
+        <p:spPr>
+          <a:xfrm>
+            <a:off x="685800" y="5532120"/>
+            <a:ext cx="320040" cy="320040"/>
           </a:xfrm>
           <a:prstGeom prst="ellipse">
             <a:avLst/>
@@ -14139,14 +14526,14 @@
       </p:sp>
       <p:sp>
         <p:nvSpPr>
-          <p:cNvPr id="29" name="TextBox 28"/>
+          <p:cNvPr id="30" name="TextBox 29"/>
           <p:cNvSpPr txBox="1"/>
           <p:nvPr/>
         </p:nvSpPr>
         <p:spPr>
           <a:xfrm>
-            <a:off x="731520" y="4965192"/>
-            <a:ext cx="365760" cy="365760"/>
+            <a:off x="685800" y="5532120"/>
+            <a:ext cx="320040" cy="320040"/>
           </a:xfrm>
           <a:prstGeom prst="rect">
             <a:avLst/>
@@ -14160,9 +14547,9 @@
           <a:lstStyle/>
           <a:p>
             <a:pPr algn="ctr">
-              <a:defRPr sz="1100" b="1">
+              <a:defRPr sz="1000" b="1">
                 <a:solidFill>
-                  <a:srgbClr val="FFFFFF"/>
+                  <a:srgbClr val="F0F4FC"/>
                 </a:solidFill>
                 <a:latin typeface="Microsoft YaHei"/>
               </a:defRPr>
@@ -14175,14 +14562,14 @@
       </p:sp>
       <p:sp>
         <p:nvSpPr>
-          <p:cNvPr id="30" name="TextBox 29"/>
+          <p:cNvPr id="31" name="TextBox 30"/>
           <p:cNvSpPr txBox="1"/>
           <p:nvPr/>
         </p:nvSpPr>
         <p:spPr>
           <a:xfrm>
-            <a:off x="1280160" y="4892040"/>
-            <a:ext cx="10058400" cy="548640"/>
+            <a:off x="1188720" y="5509260"/>
+            <a:ext cx="10058400" cy="365760"/>
           </a:xfrm>
           <a:prstGeom prst="rect">
             <a:avLst/>
@@ -14196,9 +14583,9 @@
           <a:lstStyle/>
           <a:p>
             <a:pPr algn="l">
-              <a:defRPr sz="1500" b="0">
+              <a:defRPr sz="1400" b="0">
                 <a:solidFill>
-                  <a:srgbClr val="CBD5E8"/>
+                  <a:srgbClr val="A0AEC4"/>
                 </a:solidFill>
                 <a:latin typeface="Microsoft YaHei"/>
               </a:defRPr>
@@ -14211,20 +14598,20 @@
       </p:sp>
       <p:sp>
         <p:nvSpPr>
-          <p:cNvPr id="31" name="Rectangle 30"/>
+          <p:cNvPr id="32" name="Rectangle 31"/>
           <p:cNvSpPr/>
           <p:nvPr/>
         </p:nvSpPr>
         <p:spPr>
           <a:xfrm>
             <a:off x="0" y="6446520"/>
-            <a:ext cx="12191695" cy="19050"/>
-          </a:xfrm>
-          <a:prstGeom prst="rect">
-            <a:avLst/>
-          </a:prstGeom>
-          <a:solidFill>
-            <a:srgbClr val="2D3B55"/>
+            <a:ext cx="12191695" cy="12700"/>
+          </a:xfrm>
+          <a:prstGeom prst="rect">
+            <a:avLst/>
+          </a:prstGeom>
+          <a:solidFill>
+            <a:srgbClr val="253350"/>
           </a:solidFill>
           <a:ln>
             <a:noFill/>
@@ -14254,14 +14641,14 @@
       </p:sp>
       <p:sp>
         <p:nvSpPr>
-          <p:cNvPr id="32" name="TextBox 31"/>
+          <p:cNvPr id="33" name="TextBox 32"/>
           <p:cNvSpPr txBox="1"/>
           <p:nvPr/>
         </p:nvSpPr>
         <p:spPr>
           <a:xfrm>
-            <a:off x="457200" y="6492240"/>
-            <a:ext cx="5486400" cy="274320"/>
+            <a:off x="731520" y="6492240"/>
+            <a:ext cx="4572000" cy="274320"/>
           </a:xfrm>
           <a:prstGeom prst="rect">
             <a:avLst/>
@@ -14277,20 +14664,20 @@
             <a:pPr algn="l">
               <a:defRPr sz="900" b="0">
                 <a:solidFill>
-                  <a:srgbClr val="6B7B9E"/>
+                  <a:srgbClr val="607090"/>
                 </a:solidFill>
                 <a:latin typeface="Microsoft YaHei"/>
               </a:defRPr>
             </a:pPr>
             <a:r>
-              <a:t>模块14：工业化生产</a:t>
-            </a:r>
-          </a:p>
-        </p:txBody>
-      </p:sp>
-      <p:sp>
-        <p:nvSpPr>
-          <p:cNvPr id="33" name="TextBox 32"/>
+              <a:t>模块14 · 工业化生产</a:t>
+            </a:r>
+          </a:p>
+        </p:txBody>
+      </p:sp>
+      <p:sp>
+        <p:nvSpPr>
+          <p:cNvPr id="34" name="TextBox 33"/>
           <p:cNvSpPr txBox="1"/>
           <p:nvPr/>
         </p:nvSpPr>
@@ -14313,7 +14700,7 @@
             <a:pPr algn="r">
               <a:defRPr sz="900" b="0">
                 <a:solidFill>
-                  <a:srgbClr val="6B7B9E"/>
+                  <a:srgbClr val="607090"/>
                 </a:solidFill>
                 <a:latin typeface="Microsoft YaHei"/>
               </a:defRPr>
@@ -14338,7 +14725,7 @@
     <p:bg>
       <p:bgPr>
         <a:solidFill>
-          <a:srgbClr val="0B1120"/>
+          <a:srgbClr val="0A0E1A"/>
         </a:solidFill>
         <a:effectLst/>
       </p:bgPr>
@@ -14359,13 +14746,13 @@
         <p:spPr>
           <a:xfrm>
             <a:off x="0" y="0"/>
-            <a:ext cx="12191695" cy="1051560"/>
-          </a:xfrm>
-          <a:prstGeom prst="rect">
-            <a:avLst/>
-          </a:prstGeom>
-          <a:solidFill>
-            <a:srgbClr val="141E33"/>
+            <a:ext cx="12191695" cy="38100"/>
+          </a:xfrm>
+          <a:prstGeom prst="rect">
+            <a:avLst/>
+          </a:prstGeom>
+          <a:solidFill>
+            <a:srgbClr val="F59E0B"/>
           </a:solidFill>
           <a:ln>
             <a:noFill/>
@@ -14401,14 +14788,14 @@
         </p:nvSpPr>
         <p:spPr>
           <a:xfrm>
-            <a:off x="0" y="0"/>
-            <a:ext cx="109728" cy="1051560"/>
-          </a:xfrm>
-          <a:prstGeom prst="rect">
-            <a:avLst/>
-          </a:prstGeom>
-          <a:solidFill>
-            <a:srgbClr val="F59E0B"/>
+            <a:off x="0" y="38100"/>
+            <a:ext cx="12191695" cy="914400"/>
+          </a:xfrm>
+          <a:prstGeom prst="rect">
+            <a:avLst/>
+          </a:prstGeom>
+          <a:solidFill>
+            <a:srgbClr val="161F35"/>
           </a:solidFill>
           <a:ln>
             <a:noFill/>
@@ -14438,14 +14825,57 @@
       </p:sp>
       <p:sp>
         <p:nvSpPr>
-          <p:cNvPr id="4" name="TextBox 3"/>
+          <p:cNvPr id="4" name="Rectangle 3"/>
+          <p:cNvSpPr/>
+          <p:nvPr/>
+        </p:nvSpPr>
+        <p:spPr>
+          <a:xfrm>
+            <a:off x="0" y="38100"/>
+            <a:ext cx="91440" cy="914400"/>
+          </a:xfrm>
+          <a:prstGeom prst="rect">
+            <a:avLst/>
+          </a:prstGeom>
+          <a:solidFill>
+            <a:srgbClr val="F59E0B"/>
+          </a:solidFill>
+          <a:ln>
+            <a:noFill/>
+          </a:ln>
+        </p:spPr>
+        <p:style>
+          <a:lnRef idx="1">
+            <a:schemeClr val="accent1"/>
+          </a:lnRef>
+          <a:fillRef idx="3">
+            <a:schemeClr val="accent1"/>
+          </a:fillRef>
+          <a:effectRef idx="2">
+            <a:schemeClr val="accent1"/>
+          </a:effectRef>
+          <a:fontRef idx="minor">
+            <a:schemeClr val="lt1"/>
+          </a:fontRef>
+        </p:style>
+        <p:txBody>
+          <a:bodyPr rtlCol="0" anchor="ctr"/>
+          <a:lstStyle/>
+          <a:p>
+            <a:pPr algn="ctr"/>
+          </a:p>
+        </p:txBody>
+      </p:sp>
+      <p:sp>
+        <p:nvSpPr>
+          <p:cNvPr id="5" name="TextBox 4"/>
           <p:cNvSpPr txBox="1"/>
           <p:nvPr/>
         </p:nvSpPr>
         <p:spPr>
           <a:xfrm>
-            <a:off x="548640" y="182880"/>
-            <a:ext cx="10058400" cy="640080"/>
+            <a:off x="731520" y="137160"/>
+            <a:ext cx="10728655" cy="640080"/>
           </a:xfrm>
           <a:prstGeom prst="rect">
             <a:avLst/>
@@ -14459,9 +14889,9 @@
           <a:lstStyle/>
           <a:p>
             <a:pPr algn="l">
-              <a:defRPr sz="2600" b="1">
+              <a:defRPr sz="2400" b="1">
                 <a:solidFill>
-                  <a:srgbClr val="FFFFFF"/>
+                  <a:srgbClr val="F0F4FC"/>
                 </a:solidFill>
                 <a:latin typeface="Microsoft YaHei"/>
               </a:defRPr>
@@ -14474,20 +14904,20 @@
       </p:sp>
       <p:sp>
         <p:nvSpPr>
-          <p:cNvPr id="5" name="Rectangle 4"/>
-          <p:cNvSpPr/>
-          <p:nvPr/>
-        </p:nvSpPr>
-        <p:spPr>
-          <a:xfrm>
-            <a:off x="0" y="1051560"/>
-            <a:ext cx="12191695" cy="25400"/>
-          </a:xfrm>
-          <a:prstGeom prst="rect">
-            <a:avLst/>
-          </a:prstGeom>
-          <a:solidFill>
-            <a:srgbClr val="F59E0B"/>
+          <p:cNvPr id="6" name="Rectangle 5"/>
+          <p:cNvSpPr/>
+          <p:nvPr/>
+        </p:nvSpPr>
+        <p:spPr>
+          <a:xfrm>
+            <a:off x="0" y="1078992"/>
+            <a:ext cx="12191695" cy="12700"/>
+          </a:xfrm>
+          <a:prstGeom prst="rect">
+            <a:avLst/>
+          </a:prstGeom>
+          <a:solidFill>
+            <a:srgbClr val="253350"/>
           </a:solidFill>
           <a:ln>
             <a:noFill/>
@@ -14517,15 +14947,15 @@
       </p:sp>
       <p:graphicFrame>
         <p:nvGraphicFramePr>
-          <p:cNvPr id="6" name="Table 5"/>
+          <p:cNvPr id="7" name="Table 6"/>
           <p:cNvGraphicFramePr>
             <a:graphicFrameLocks noGrp="1"/>
           </p:cNvGraphicFramePr>
           <p:nvPr/>
         </p:nvGraphicFramePr>
         <p:xfrm>
-          <a:off x="548640" y="1463040"/>
-          <a:ext cx="11064240" cy="4160520"/>
+          <a:off x="548640" y="1371600"/>
+          <a:ext cx="11064240" cy="3840480"/>
         </p:xfrm>
         <a:graphic>
           <a:graphicData uri="http://schemas.openxmlformats.org/drawingml/2006/table">
@@ -14538,16 +14968,16 @@
                 <a:gridCol w="3688080"/>
                 <a:gridCol w="3688080"/>
               </a:tblGrid>
-              <a:tr h="594360">
+              <a:tr h="548640">
                 <a:tc>
                   <a:txBody>
                     <a:bodyPr/>
                     <a:lstStyle/>
                     <a:p>
                       <a:pPr algn="ctr">
-                        <a:defRPr sz="1400" b="1">
+                        <a:defRPr sz="1300" b="1">
                           <a:solidFill>
-                            <a:srgbClr val="FFFFFF"/>
+                            <a:srgbClr val="F0F4FC"/>
                           </a:solidFill>
                           <a:latin typeface="Microsoft YaHei"/>
                         </a:defRPr>
@@ -14569,9 +14999,9 @@
                     <a:lstStyle/>
                     <a:p>
                       <a:pPr algn="ctr">
-                        <a:defRPr sz="1400" b="1">
+                        <a:defRPr sz="1300" b="1">
                           <a:solidFill>
-                            <a:srgbClr val="FFFFFF"/>
+                            <a:srgbClr val="F0F4FC"/>
                           </a:solidFill>
                           <a:latin typeface="Microsoft YaHei"/>
                         </a:defRPr>
@@ -14593,9 +15023,9 @@
                     <a:lstStyle/>
                     <a:p>
                       <a:pPr algn="ctr">
-                        <a:defRPr sz="1400" b="1">
+                        <a:defRPr sz="1300" b="1">
                           <a:solidFill>
-                            <a:srgbClr val="FFFFFF"/>
+                            <a:srgbClr val="F0F4FC"/>
                           </a:solidFill>
                           <a:latin typeface="Microsoft YaHei"/>
                         </a:defRPr>
@@ -14612,16 +15042,16 @@
                   </a:tcPr>
                 </a:tc>
               </a:tr>
-              <a:tr h="594360">
+              <a:tr h="548640">
                 <a:tc>
                   <a:txBody>
                     <a:bodyPr/>
                     <a:lstStyle/>
                     <a:p>
                       <a:pPr algn="ctr">
-                        <a:defRPr sz="1300">
+                        <a:defRPr sz="1200">
                           <a:solidFill>
-                            <a:srgbClr val="CBD5E8"/>
+                            <a:srgbClr val="A0AEC4"/>
                           </a:solidFill>
                           <a:latin typeface="Microsoft YaHei"/>
                         </a:defRPr>
@@ -14633,7 +15063,7 @@
                   </a:txBody>
                   <a:tcPr anchor="ctr">
                     <a:solidFill>
-                      <a:srgbClr val="141E33"/>
+                      <a:srgbClr val="161F35"/>
                     </a:solidFill>
                   </a:tcPr>
                 </a:tc>
@@ -14643,9 +15073,9 @@
                     <a:lstStyle/>
                     <a:p>
                       <a:pPr algn="ctr">
-                        <a:defRPr sz="1300">
+                        <a:defRPr sz="1200">
                           <a:solidFill>
-                            <a:srgbClr val="CBD5E8"/>
+                            <a:srgbClr val="A0AEC4"/>
                           </a:solidFill>
                           <a:latin typeface="Microsoft YaHei"/>
                         </a:defRPr>
@@ -14657,7 +15087,7 @@
                   </a:txBody>
                   <a:tcPr anchor="ctr">
                     <a:solidFill>
-                      <a:srgbClr val="141E33"/>
+                      <a:srgbClr val="161F35"/>
                     </a:solidFill>
                   </a:tcPr>
                 </a:tc>
@@ -14667,9 +15097,9 @@
                     <a:lstStyle/>
                     <a:p>
                       <a:pPr algn="ctr">
-                        <a:defRPr sz="1300">
+                        <a:defRPr sz="1200">
                           <a:solidFill>
-                            <a:srgbClr val="CBD5E8"/>
+                            <a:srgbClr val="A0AEC4"/>
                           </a:solidFill>
                           <a:latin typeface="Microsoft YaHei"/>
                         </a:defRPr>
@@ -14681,21 +15111,21 @@
                   </a:txBody>
                   <a:tcPr anchor="ctr">
                     <a:solidFill>
-                      <a:srgbClr val="141E33"/>
+                      <a:srgbClr val="161F35"/>
                     </a:solidFill>
                   </a:tcPr>
                 </a:tc>
               </a:tr>
-              <a:tr h="594360">
+              <a:tr h="548640">
                 <a:tc>
                   <a:txBody>
                     <a:bodyPr/>
                     <a:lstStyle/>
                     <a:p>
                       <a:pPr algn="ctr">
-                        <a:defRPr sz="1300">
+                        <a:defRPr sz="1200">
                           <a:solidFill>
-                            <a:srgbClr val="CBD5E8"/>
+                            <a:srgbClr val="A0AEC4"/>
                           </a:solidFill>
                           <a:latin typeface="Microsoft YaHei"/>
                         </a:defRPr>
@@ -14707,7 +15137,7 @@
                   </a:txBody>
                   <a:tcPr anchor="ctr">
                     <a:solidFill>
-                      <a:srgbClr val="1A2842"/>
+                      <a:srgbClr val="1C2842"/>
                     </a:solidFill>
                   </a:tcPr>
                 </a:tc>
@@ -14717,9 +15147,9 @@
                     <a:lstStyle/>
                     <a:p>
                       <a:pPr algn="ctr">
-                        <a:defRPr sz="1300">
+                        <a:defRPr sz="1200">
                           <a:solidFill>
-                            <a:srgbClr val="CBD5E8"/>
+                            <a:srgbClr val="A0AEC4"/>
                           </a:solidFill>
                           <a:latin typeface="Microsoft YaHei"/>
                         </a:defRPr>
@@ -14731,7 +15161,7 @@
                   </a:txBody>
                   <a:tcPr anchor="ctr">
                     <a:solidFill>
-                      <a:srgbClr val="1A2842"/>
+                      <a:srgbClr val="1C2842"/>
                     </a:solidFill>
                   </a:tcPr>
                 </a:tc>
@@ -14741,9 +15171,9 @@
                     <a:lstStyle/>
                     <a:p>
                       <a:pPr algn="ctr">
-                        <a:defRPr sz="1300">
+                        <a:defRPr sz="1200">
                           <a:solidFill>
-                            <a:srgbClr val="CBD5E8"/>
+                            <a:srgbClr val="A0AEC4"/>
                           </a:solidFill>
                           <a:latin typeface="Microsoft YaHei"/>
                         </a:defRPr>
@@ -14755,21 +15185,21 @@
                   </a:txBody>
                   <a:tcPr anchor="ctr">
                     <a:solidFill>
-                      <a:srgbClr val="1A2842"/>
+                      <a:srgbClr val="1C2842"/>
                     </a:solidFill>
                   </a:tcPr>
                 </a:tc>
               </a:tr>
-              <a:tr h="594360">
+              <a:tr h="548640">
                 <a:tc>
                   <a:txBody>
                     <a:bodyPr/>
                     <a:lstStyle/>
                     <a:p>
                       <a:pPr algn="ctr">
-                        <a:defRPr sz="1300">
+                        <a:defRPr sz="1200">
                           <a:solidFill>
-                            <a:srgbClr val="CBD5E8"/>
+                            <a:srgbClr val="A0AEC4"/>
                           </a:solidFill>
                           <a:latin typeface="Microsoft YaHei"/>
                         </a:defRPr>
@@ -14781,7 +15211,7 @@
                   </a:txBody>
                   <a:tcPr anchor="ctr">
                     <a:solidFill>
-                      <a:srgbClr val="141E33"/>
+                      <a:srgbClr val="161F35"/>
                     </a:solidFill>
                   </a:tcPr>
                 </a:tc>
@@ -14791,9 +15221,9 @@
                     <a:lstStyle/>
                     <a:p>
                       <a:pPr algn="ctr">
-                        <a:defRPr sz="1300">
+                        <a:defRPr sz="1200">
                           <a:solidFill>
-                            <a:srgbClr val="CBD5E8"/>
+                            <a:srgbClr val="A0AEC4"/>
                           </a:solidFill>
                           <a:latin typeface="Microsoft YaHei"/>
                         </a:defRPr>
@@ -14805,7 +15235,7 @@
                   </a:txBody>
                   <a:tcPr anchor="ctr">
                     <a:solidFill>
-                      <a:srgbClr val="141E33"/>
+                      <a:srgbClr val="161F35"/>
                     </a:solidFill>
                   </a:tcPr>
                 </a:tc>
@@ -14815,9 +15245,9 @@
                     <a:lstStyle/>
                     <a:p>
                       <a:pPr algn="ctr">
-                        <a:defRPr sz="1300">
+                        <a:defRPr sz="1200">
                           <a:solidFill>
-                            <a:srgbClr val="CBD5E8"/>
+                            <a:srgbClr val="A0AEC4"/>
                           </a:solidFill>
                           <a:latin typeface="Microsoft YaHei"/>
                         </a:defRPr>
@@ -14829,21 +15259,21 @@
                   </a:txBody>
                   <a:tcPr anchor="ctr">
                     <a:solidFill>
-                      <a:srgbClr val="141E33"/>
+                      <a:srgbClr val="161F35"/>
                     </a:solidFill>
                   </a:tcPr>
                 </a:tc>
               </a:tr>
-              <a:tr h="594360">
+              <a:tr h="548640">
                 <a:tc>
                   <a:txBody>
                     <a:bodyPr/>
                     <a:lstStyle/>
                     <a:p>
                       <a:pPr algn="ctr">
-                        <a:defRPr sz="1300">
+                        <a:defRPr sz="1200">
                           <a:solidFill>
-                            <a:srgbClr val="CBD5E8"/>
+                            <a:srgbClr val="A0AEC4"/>
                           </a:solidFill>
                           <a:latin typeface="Microsoft YaHei"/>
                         </a:defRPr>
@@ -14855,7 +15285,7 @@
                   </a:txBody>
                   <a:tcPr anchor="ctr">
                     <a:solidFill>
-                      <a:srgbClr val="1A2842"/>
+                      <a:srgbClr val="1C2842"/>
                     </a:solidFill>
                   </a:tcPr>
                 </a:tc>
@@ -14865,9 +15295,9 @@
                     <a:lstStyle/>
                     <a:p>
                       <a:pPr algn="ctr">
-                        <a:defRPr sz="1300">
+                        <a:defRPr sz="1200">
                           <a:solidFill>
-                            <a:srgbClr val="CBD5E8"/>
+                            <a:srgbClr val="A0AEC4"/>
                           </a:solidFill>
                           <a:latin typeface="Microsoft YaHei"/>
                         </a:defRPr>
@@ -14879,7 +15309,7 @@
                   </a:txBody>
                   <a:tcPr anchor="ctr">
                     <a:solidFill>
-                      <a:srgbClr val="1A2842"/>
+                      <a:srgbClr val="1C2842"/>
                     </a:solidFill>
                   </a:tcPr>
                 </a:tc>
@@ -14889,9 +15319,9 @@
                     <a:lstStyle/>
                     <a:p>
                       <a:pPr algn="ctr">
-                        <a:defRPr sz="1300">
+                        <a:defRPr sz="1200">
                           <a:solidFill>
-                            <a:srgbClr val="CBD5E8"/>
+                            <a:srgbClr val="A0AEC4"/>
                           </a:solidFill>
                           <a:latin typeface="Microsoft YaHei"/>
                         </a:defRPr>
@@ -14903,21 +15333,21 @@
                   </a:txBody>
                   <a:tcPr anchor="ctr">
                     <a:solidFill>
-                      <a:srgbClr val="1A2842"/>
+                      <a:srgbClr val="1C2842"/>
                     </a:solidFill>
                   </a:tcPr>
                 </a:tc>
               </a:tr>
-              <a:tr h="594360">
+              <a:tr h="548640">
                 <a:tc>
                   <a:txBody>
                     <a:bodyPr/>
                     <a:lstStyle/>
                     <a:p>
                       <a:pPr algn="ctr">
-                        <a:defRPr sz="1300">
+                        <a:defRPr sz="1200">
                           <a:solidFill>
-                            <a:srgbClr val="CBD5E8"/>
+                            <a:srgbClr val="A0AEC4"/>
                           </a:solidFill>
                           <a:latin typeface="Microsoft YaHei"/>
                         </a:defRPr>
@@ -14929,7 +15359,7 @@
                   </a:txBody>
                   <a:tcPr anchor="ctr">
                     <a:solidFill>
-                      <a:srgbClr val="141E33"/>
+                      <a:srgbClr val="161F35"/>
                     </a:solidFill>
                   </a:tcPr>
                 </a:tc>
@@ -14939,9 +15369,9 @@
                     <a:lstStyle/>
                     <a:p>
                       <a:pPr algn="ctr">
-                        <a:defRPr sz="1300">
+                        <a:defRPr sz="1200">
                           <a:solidFill>
-                            <a:srgbClr val="CBD5E8"/>
+                            <a:srgbClr val="A0AEC4"/>
                           </a:solidFill>
                           <a:latin typeface="Microsoft YaHei"/>
                         </a:defRPr>
@@ -14953,7 +15383,7 @@
                   </a:txBody>
                   <a:tcPr anchor="ctr">
                     <a:solidFill>
-                      <a:srgbClr val="141E33"/>
+                      <a:srgbClr val="161F35"/>
                     </a:solidFill>
                   </a:tcPr>
                 </a:tc>
@@ -14963,9 +15393,9 @@
                     <a:lstStyle/>
                     <a:p>
                       <a:pPr algn="ctr">
-                        <a:defRPr sz="1300">
+                        <a:defRPr sz="1200">
                           <a:solidFill>
-                            <a:srgbClr val="CBD5E8"/>
+                            <a:srgbClr val="A0AEC4"/>
                           </a:solidFill>
                           <a:latin typeface="Microsoft YaHei"/>
                         </a:defRPr>
@@ -14977,21 +15407,21 @@
                   </a:txBody>
                   <a:tcPr anchor="ctr">
                     <a:solidFill>
-                      <a:srgbClr val="141E33"/>
+                      <a:srgbClr val="161F35"/>
                     </a:solidFill>
                   </a:tcPr>
                 </a:tc>
               </a:tr>
-              <a:tr h="594360">
+              <a:tr h="548640">
                 <a:tc>
                   <a:txBody>
                     <a:bodyPr/>
                     <a:lstStyle/>
                     <a:p>
                       <a:pPr algn="ctr">
-                        <a:defRPr sz="1300">
+                        <a:defRPr sz="1200">
                           <a:solidFill>
-                            <a:srgbClr val="CBD5E8"/>
+                            <a:srgbClr val="A0AEC4"/>
                           </a:solidFill>
                           <a:latin typeface="Microsoft YaHei"/>
                         </a:defRPr>
@@ -15003,7 +15433,7 @@
                   </a:txBody>
                   <a:tcPr anchor="ctr">
                     <a:solidFill>
-                      <a:srgbClr val="1A2842"/>
+                      <a:srgbClr val="1C2842"/>
                     </a:solidFill>
                   </a:tcPr>
                 </a:tc>
@@ -15013,9 +15443,9 @@
                     <a:lstStyle/>
                     <a:p>
                       <a:pPr algn="ctr">
-                        <a:defRPr sz="1300">
+                        <a:defRPr sz="1200">
                           <a:solidFill>
-                            <a:srgbClr val="CBD5E8"/>
+                            <a:srgbClr val="A0AEC4"/>
                           </a:solidFill>
                           <a:latin typeface="Microsoft YaHei"/>
                         </a:defRPr>
@@ -15027,7 +15457,7 @@
                   </a:txBody>
                   <a:tcPr anchor="ctr">
                     <a:solidFill>
-                      <a:srgbClr val="1A2842"/>
+                      <a:srgbClr val="1C2842"/>
                     </a:solidFill>
                   </a:tcPr>
                 </a:tc>
@@ -15037,9 +15467,9 @@
                     <a:lstStyle/>
                     <a:p>
                       <a:pPr algn="ctr">
-                        <a:defRPr sz="1300">
+                        <a:defRPr sz="1200">
                           <a:solidFill>
-                            <a:srgbClr val="CBD5E8"/>
+                            <a:srgbClr val="A0AEC4"/>
                           </a:solidFill>
                           <a:latin typeface="Microsoft YaHei"/>
                         </a:defRPr>
@@ -15051,7 +15481,7 @@
                   </a:txBody>
                   <a:tcPr anchor="ctr">
                     <a:solidFill>
-                      <a:srgbClr val="1A2842"/>
+                      <a:srgbClr val="1C2842"/>
                     </a:solidFill>
                   </a:tcPr>
                 </a:tc>
@@ -15062,20 +15492,20 @@
       </p:graphicFrame>
       <p:sp>
         <p:nvSpPr>
-          <p:cNvPr id="7" name="Rectangle 6"/>
+          <p:cNvPr id="8" name="Rectangle 7"/>
           <p:cNvSpPr/>
           <p:nvPr/>
         </p:nvSpPr>
         <p:spPr>
           <a:xfrm>
             <a:off x="0" y="6446520"/>
-            <a:ext cx="12191695" cy="19050"/>
-          </a:xfrm>
-          <a:prstGeom prst="rect">
-            <a:avLst/>
-          </a:prstGeom>
-          <a:solidFill>
-            <a:srgbClr val="2D3B55"/>
+            <a:ext cx="12191695" cy="12700"/>
+          </a:xfrm>
+          <a:prstGeom prst="rect">
+            <a:avLst/>
+          </a:prstGeom>
+          <a:solidFill>
+            <a:srgbClr val="253350"/>
           </a:solidFill>
           <a:ln>
             <a:noFill/>
@@ -15105,14 +15535,14 @@
       </p:sp>
       <p:sp>
         <p:nvSpPr>
-          <p:cNvPr id="8" name="TextBox 7"/>
+          <p:cNvPr id="9" name="TextBox 8"/>
           <p:cNvSpPr txBox="1"/>
           <p:nvPr/>
         </p:nvSpPr>
         <p:spPr>
           <a:xfrm>
-            <a:off x="457200" y="6492240"/>
-            <a:ext cx="5486400" cy="274320"/>
+            <a:off x="731520" y="6492240"/>
+            <a:ext cx="4572000" cy="274320"/>
           </a:xfrm>
           <a:prstGeom prst="rect">
             <a:avLst/>
@@ -15128,20 +15558,20 @@
             <a:pPr algn="l">
               <a:defRPr sz="900" b="0">
                 <a:solidFill>
-                  <a:srgbClr val="6B7B9E"/>
+                  <a:srgbClr val="607090"/>
                 </a:solidFill>
                 <a:latin typeface="Microsoft YaHei"/>
               </a:defRPr>
             </a:pPr>
             <a:r>
-              <a:t>模块14：工业化生产</a:t>
-            </a:r>
-          </a:p>
-        </p:txBody>
-      </p:sp>
-      <p:sp>
-        <p:nvSpPr>
-          <p:cNvPr id="9" name="TextBox 8"/>
+              <a:t>模块14 · 工业化生产</a:t>
+            </a:r>
+          </a:p>
+        </p:txBody>
+      </p:sp>
+      <p:sp>
+        <p:nvSpPr>
+          <p:cNvPr id="10" name="TextBox 9"/>
           <p:cNvSpPr txBox="1"/>
           <p:nvPr/>
         </p:nvSpPr>
@@ -15164,7 +15594,7 @@
             <a:pPr algn="r">
               <a:defRPr sz="900" b="0">
                 <a:solidFill>
-                  <a:srgbClr val="6B7B9E"/>
+                  <a:srgbClr val="607090"/>
                 </a:solidFill>
                 <a:latin typeface="Microsoft YaHei"/>
               </a:defRPr>
@@ -15189,7 +15619,7 @@
     <p:bg>
       <p:bgPr>
         <a:solidFill>
-          <a:srgbClr val="0B1120"/>
+          <a:srgbClr val="0A0E1A"/>
         </a:solidFill>
         <a:effectLst/>
       </p:bgPr>
@@ -15210,13 +15640,13 @@
         <p:spPr>
           <a:xfrm>
             <a:off x="0" y="0"/>
-            <a:ext cx="12191695" cy="1051560"/>
-          </a:xfrm>
-          <a:prstGeom prst="rect">
-            <a:avLst/>
-          </a:prstGeom>
-          <a:solidFill>
-            <a:srgbClr val="141E33"/>
+            <a:ext cx="12191695" cy="38100"/>
+          </a:xfrm>
+          <a:prstGeom prst="rect">
+            <a:avLst/>
+          </a:prstGeom>
+          <a:solidFill>
+            <a:srgbClr val="F59E0B"/>
           </a:solidFill>
           <a:ln>
             <a:noFill/>
@@ -15252,14 +15682,14 @@
         </p:nvSpPr>
         <p:spPr>
           <a:xfrm>
-            <a:off x="0" y="0"/>
-            <a:ext cx="109728" cy="1051560"/>
-          </a:xfrm>
-          <a:prstGeom prst="rect">
-            <a:avLst/>
-          </a:prstGeom>
-          <a:solidFill>
-            <a:srgbClr val="F59E0B"/>
+            <a:off x="0" y="38100"/>
+            <a:ext cx="12191695" cy="914400"/>
+          </a:xfrm>
+          <a:prstGeom prst="rect">
+            <a:avLst/>
+          </a:prstGeom>
+          <a:solidFill>
+            <a:srgbClr val="161F35"/>
           </a:solidFill>
           <a:ln>
             <a:noFill/>
@@ -15289,14 +15719,57 @@
       </p:sp>
       <p:sp>
         <p:nvSpPr>
-          <p:cNvPr id="4" name="TextBox 3"/>
+          <p:cNvPr id="4" name="Rectangle 3"/>
+          <p:cNvSpPr/>
+          <p:nvPr/>
+        </p:nvSpPr>
+        <p:spPr>
+          <a:xfrm>
+            <a:off x="0" y="38100"/>
+            <a:ext cx="91440" cy="914400"/>
+          </a:xfrm>
+          <a:prstGeom prst="rect">
+            <a:avLst/>
+          </a:prstGeom>
+          <a:solidFill>
+            <a:srgbClr val="F59E0B"/>
+          </a:solidFill>
+          <a:ln>
+            <a:noFill/>
+          </a:ln>
+        </p:spPr>
+        <p:style>
+          <a:lnRef idx="1">
+            <a:schemeClr val="accent1"/>
+          </a:lnRef>
+          <a:fillRef idx="3">
+            <a:schemeClr val="accent1"/>
+          </a:fillRef>
+          <a:effectRef idx="2">
+            <a:schemeClr val="accent1"/>
+          </a:effectRef>
+          <a:fontRef idx="minor">
+            <a:schemeClr val="lt1"/>
+          </a:fontRef>
+        </p:style>
+        <p:txBody>
+          <a:bodyPr rtlCol="0" anchor="ctr"/>
+          <a:lstStyle/>
+          <a:p>
+            <a:pPr algn="ctr"/>
+          </a:p>
+        </p:txBody>
+      </p:sp>
+      <p:sp>
+        <p:nvSpPr>
+          <p:cNvPr id="5" name="TextBox 4"/>
           <p:cNvSpPr txBox="1"/>
           <p:nvPr/>
         </p:nvSpPr>
         <p:spPr>
           <a:xfrm>
-            <a:off x="548640" y="182880"/>
-            <a:ext cx="10058400" cy="640080"/>
+            <a:off x="731520" y="137160"/>
+            <a:ext cx="10728655" cy="640080"/>
           </a:xfrm>
           <a:prstGeom prst="rect">
             <a:avLst/>
@@ -15310,35 +15783,35 @@
           <a:lstStyle/>
           <a:p>
             <a:pPr algn="l">
-              <a:defRPr sz="2600" b="1">
+              <a:defRPr sz="2400" b="1">
                 <a:solidFill>
-                  <a:srgbClr val="FFFFFF"/>
+                  <a:srgbClr val="F0F4FC"/>
                 </a:solidFill>
                 <a:latin typeface="Microsoft YaHei"/>
               </a:defRPr>
             </a:pPr>
             <a:r>
-              <a:t>成本参考</a:t>
-            </a:r>
-          </a:p>
-        </p:txBody>
-      </p:sp>
-      <p:sp>
-        <p:nvSpPr>
-          <p:cNvPr id="5" name="Rectangle 4"/>
-          <p:cNvSpPr/>
-          <p:nvPr/>
-        </p:nvSpPr>
-        <p:spPr>
-          <a:xfrm>
-            <a:off x="0" y="1051560"/>
-            <a:ext cx="12191695" cy="25400"/>
-          </a:xfrm>
-          <a:prstGeom prst="rect">
-            <a:avLst/>
-          </a:prstGeom>
-          <a:solidFill>
-            <a:srgbClr val="F59E0B"/>
+              <a:t>💡 成本参考</a:t>
+            </a:r>
+          </a:p>
+        </p:txBody>
+      </p:sp>
+      <p:sp>
+        <p:nvSpPr>
+          <p:cNvPr id="6" name="Rectangle 5"/>
+          <p:cNvSpPr/>
+          <p:nvPr/>
+        </p:nvSpPr>
+        <p:spPr>
+          <a:xfrm>
+            <a:off x="0" y="1078992"/>
+            <a:ext cx="12191695" cy="12700"/>
+          </a:xfrm>
+          <a:prstGeom prst="rect">
+            <a:avLst/>
+          </a:prstGeom>
+          <a:solidFill>
+            <a:srgbClr val="253350"/>
           </a:solidFill>
           <a:ln>
             <a:noFill/>
@@ -15368,20 +15841,20 @@
       </p:sp>
       <p:sp>
         <p:nvSpPr>
-          <p:cNvPr id="6" name="Rounded Rectangle 5"/>
-          <p:cNvSpPr/>
-          <p:nvPr/>
-        </p:nvSpPr>
-        <p:spPr>
-          <a:xfrm>
-            <a:off x="731520" y="1645920"/>
-            <a:ext cx="10698480" cy="2743200"/>
+          <p:cNvPr id="7" name="Rounded Rectangle 6"/>
+          <p:cNvSpPr/>
+          <p:nvPr/>
+        </p:nvSpPr>
+        <p:spPr>
+          <a:xfrm>
+            <a:off x="731520" y="1463040"/>
+            <a:ext cx="10698480" cy="2926080"/>
           </a:xfrm>
           <a:prstGeom prst="roundRect">
             <a:avLst/>
           </a:prstGeom>
           <a:solidFill>
-            <a:srgbClr val="141E33"/>
+            <a:srgbClr val="161F35"/>
           </a:solidFill>
           <a:ln>
             <a:noFill/>
@@ -15411,14 +15884,14 @@
       </p:sp>
       <p:sp>
         <p:nvSpPr>
-          <p:cNvPr id="7" name="Rectangle 6"/>
-          <p:cNvSpPr/>
-          <p:nvPr/>
-        </p:nvSpPr>
-        <p:spPr>
-          <a:xfrm>
-            <a:off x="731520" y="1645920"/>
-            <a:ext cx="10698480" cy="91440"/>
+          <p:cNvPr id="8" name="Rectangle 7"/>
+          <p:cNvSpPr/>
+          <p:nvPr/>
+        </p:nvSpPr>
+        <p:spPr>
+          <a:xfrm>
+            <a:off x="731520" y="1463040"/>
+            <a:ext cx="10698480" cy="50800"/>
           </a:xfrm>
           <a:prstGeom prst="rect">
             <a:avLst/>
@@ -15454,14 +15927,14 @@
       </p:sp>
       <p:sp>
         <p:nvSpPr>
-          <p:cNvPr id="8" name="Rectangle 7"/>
-          <p:cNvSpPr/>
-          <p:nvPr/>
-        </p:nvSpPr>
-        <p:spPr>
-          <a:xfrm>
-            <a:off x="731520" y="1645920"/>
-            <a:ext cx="109728" cy="2743200"/>
+          <p:cNvPr id="9" name="Rectangle 8"/>
+          <p:cNvSpPr/>
+          <p:nvPr/>
+        </p:nvSpPr>
+        <p:spPr>
+          <a:xfrm>
+            <a:off x="731520" y="1463040"/>
+            <a:ext cx="63500" cy="2926080"/>
           </a:xfrm>
           <a:prstGeom prst="rect">
             <a:avLst/>
@@ -15497,14 +15970,14 @@
       </p:sp>
       <p:sp>
         <p:nvSpPr>
-          <p:cNvPr id="9" name="TextBox 8"/>
+          <p:cNvPr id="10" name="TextBox 9"/>
           <p:cNvSpPr txBox="1"/>
           <p:nvPr/>
         </p:nvSpPr>
         <p:spPr>
           <a:xfrm>
-            <a:off x="1097280" y="1920240"/>
-            <a:ext cx="914400" cy="548640"/>
+            <a:off x="1188720" y="1920240"/>
+            <a:ext cx="9784080" cy="2011680"/>
           </a:xfrm>
           <a:prstGeom prst="rect">
             <a:avLst/>
@@ -15518,29 +15991,115 @@
           <a:lstStyle/>
           <a:p>
             <a:pPr algn="l">
-              <a:defRPr sz="3200" b="0">
+              <a:defRPr sz="3200" b="1">
                 <a:solidFill>
-                  <a:srgbClr val="F59E0B"/>
+                  <a:srgbClr val="F0F4FC"/>
                 </a:solidFill>
                 <a:latin typeface="Microsoft YaHei"/>
               </a:defRPr>
             </a:pPr>
             <a:r>
-              <a:t>💡</a:t>
-            </a:r>
-          </a:p>
-        </p:txBody>
-      </p:sp>
-      <p:sp>
-        <p:nvSpPr>
-          <p:cNvPr id="10" name="TextBox 9"/>
+              <a:t>极速流约275-660元/集，精品流约760-2720元/集</a:t>
+            </a:r>
+          </a:p>
+        </p:txBody>
+      </p:sp>
+      <p:sp>
+        <p:nvSpPr>
+          <p:cNvPr id="11" name="Rounded Rectangle 10"/>
+          <p:cNvSpPr/>
+          <p:nvPr/>
+        </p:nvSpPr>
+        <p:spPr>
+          <a:xfrm>
+            <a:off x="731520" y="4663440"/>
+            <a:ext cx="10698480" cy="1463040"/>
+          </a:xfrm>
+          <a:prstGeom prst="roundRect">
+            <a:avLst/>
+          </a:prstGeom>
+          <a:solidFill>
+            <a:srgbClr val="1C2842"/>
+          </a:solidFill>
+          <a:ln>
+            <a:noFill/>
+          </a:ln>
+        </p:spPr>
+        <p:style>
+          <a:lnRef idx="1">
+            <a:schemeClr val="accent1"/>
+          </a:lnRef>
+          <a:fillRef idx="3">
+            <a:schemeClr val="accent1"/>
+          </a:fillRef>
+          <a:effectRef idx="2">
+            <a:schemeClr val="accent1"/>
+          </a:effectRef>
+          <a:fontRef idx="minor">
+            <a:schemeClr val="lt1"/>
+          </a:fontRef>
+        </p:style>
+        <p:txBody>
+          <a:bodyPr rtlCol="0" anchor="ctr"/>
+          <a:lstStyle/>
+          <a:p>
+            <a:pPr algn="ctr"/>
+          </a:p>
+        </p:txBody>
+      </p:sp>
+      <p:sp>
+        <p:nvSpPr>
+          <p:cNvPr id="12" name="Rectangle 11"/>
+          <p:cNvSpPr/>
+          <p:nvPr/>
+        </p:nvSpPr>
+        <p:spPr>
+          <a:xfrm>
+            <a:off x="731520" y="4663440"/>
+            <a:ext cx="50800" cy="1463040"/>
+          </a:xfrm>
+          <a:prstGeom prst="rect">
+            <a:avLst/>
+          </a:prstGeom>
+          <a:solidFill>
+            <a:srgbClr val="607090"/>
+          </a:solidFill>
+          <a:ln>
+            <a:noFill/>
+          </a:ln>
+        </p:spPr>
+        <p:style>
+          <a:lnRef idx="1">
+            <a:schemeClr val="accent1"/>
+          </a:lnRef>
+          <a:fillRef idx="3">
+            <a:schemeClr val="accent1"/>
+          </a:fillRef>
+          <a:effectRef idx="2">
+            <a:schemeClr val="accent1"/>
+          </a:effectRef>
+          <a:fontRef idx="minor">
+            <a:schemeClr val="lt1"/>
+          </a:fontRef>
+        </p:style>
+        <p:txBody>
+          <a:bodyPr rtlCol="0" anchor="ctr"/>
+          <a:lstStyle/>
+          <a:p>
+            <a:pPr algn="ctr"/>
+          </a:p>
+        </p:txBody>
+      </p:sp>
+      <p:sp>
+        <p:nvSpPr>
+          <p:cNvPr id="13" name="TextBox 12"/>
           <p:cNvSpPr txBox="1"/>
           <p:nvPr/>
         </p:nvSpPr>
         <p:spPr>
           <a:xfrm>
-            <a:off x="1645920" y="1965960"/>
-            <a:ext cx="2743200" cy="457200"/>
+            <a:off x="1188720" y="4800600"/>
+            <a:ext cx="9875520" cy="1188720"/>
           </a:xfrm>
           <a:prstGeom prst="rect">
             <a:avLst/>
@@ -15554,29 +16113,72 @@
           <a:lstStyle/>
           <a:p>
             <a:pPr algn="l">
-              <a:defRPr sz="1600" b="1">
+              <a:defRPr sz="1400" b="0">
                 <a:solidFill>
-                  <a:srgbClr val="F59E0B"/>
+                  <a:srgbClr val="A0AEC4"/>
                 </a:solidFill>
                 <a:latin typeface="Microsoft YaHei"/>
               </a:defRPr>
             </a:pPr>
             <a:r>
-              <a:t>核心要点</a:t>
-            </a:r>
-          </a:p>
-        </p:txBody>
-      </p:sp>
-      <p:sp>
-        <p:nvSpPr>
-          <p:cNvPr id="11" name="TextBox 10"/>
+              <a:t>成本主要集中在视频生成环节（占比60-70%），通过Draft模式、资产复用、精准提示词等策略可有效降低单集成本。多工具交叉验证（即梦+通义万相、可灵+Seedance）可提高抽卡成功率。</a:t>
+            </a:r>
+          </a:p>
+        </p:txBody>
+      </p:sp>
+      <p:sp>
+        <p:nvSpPr>
+          <p:cNvPr id="14" name="Rectangle 13"/>
+          <p:cNvSpPr/>
+          <p:nvPr/>
+        </p:nvSpPr>
+        <p:spPr>
+          <a:xfrm>
+            <a:off x="0" y="6446520"/>
+            <a:ext cx="12191695" cy="12700"/>
+          </a:xfrm>
+          <a:prstGeom prst="rect">
+            <a:avLst/>
+          </a:prstGeom>
+          <a:solidFill>
+            <a:srgbClr val="253350"/>
+          </a:solidFill>
+          <a:ln>
+            <a:noFill/>
+          </a:ln>
+        </p:spPr>
+        <p:style>
+          <a:lnRef idx="1">
+            <a:schemeClr val="accent1"/>
+          </a:lnRef>
+          <a:fillRef idx="3">
+            <a:schemeClr val="accent1"/>
+          </a:fillRef>
+          <a:effectRef idx="2">
+            <a:schemeClr val="accent1"/>
+          </a:effectRef>
+          <a:fontRef idx="minor">
+            <a:schemeClr val="lt1"/>
+          </a:fontRef>
+        </p:style>
+        <p:txBody>
+          <a:bodyPr rtlCol="0" anchor="ctr"/>
+          <a:lstStyle/>
+          <a:p>
+            <a:pPr algn="ctr"/>
+          </a:p>
+        </p:txBody>
+      </p:sp>
+      <p:sp>
+        <p:nvSpPr>
+          <p:cNvPr id="15" name="TextBox 14"/>
           <p:cNvSpPr txBox="1"/>
           <p:nvPr/>
         </p:nvSpPr>
         <p:spPr>
           <a:xfrm>
-            <a:off x="1188720" y="2560320"/>
-            <a:ext cx="9784080" cy="1371600"/>
+            <a:off x="731520" y="6492240"/>
+            <a:ext cx="4572000" cy="274320"/>
           </a:xfrm>
           <a:prstGeom prst="rect">
             <a:avLst/>
@@ -15590,115 +16192,29 @@
           <a:lstStyle/>
           <a:p>
             <a:pPr algn="l">
-              <a:defRPr sz="2400" b="1">
+              <a:defRPr sz="900" b="0">
                 <a:solidFill>
-                  <a:srgbClr val="FFFFFF"/>
+                  <a:srgbClr val="607090"/>
                 </a:solidFill>
                 <a:latin typeface="Microsoft YaHei"/>
               </a:defRPr>
             </a:pPr>
             <a:r>
-              <a:t>极速流约275-660元/集，精品流约760-2720元/集</a:t>
-            </a:r>
-          </a:p>
-        </p:txBody>
-      </p:sp>
-      <p:sp>
-        <p:nvSpPr>
-          <p:cNvPr id="12" name="Rounded Rectangle 11"/>
-          <p:cNvSpPr/>
-          <p:nvPr/>
-        </p:nvSpPr>
-        <p:spPr>
-          <a:xfrm>
-            <a:off x="731520" y="4754880"/>
-            <a:ext cx="10698480" cy="1371600"/>
-          </a:xfrm>
-          <a:prstGeom prst="roundRect">
-            <a:avLst/>
-          </a:prstGeom>
-          <a:solidFill>
-            <a:srgbClr val="1A2842"/>
-          </a:solidFill>
-          <a:ln>
-            <a:noFill/>
-          </a:ln>
-        </p:spPr>
-        <p:style>
-          <a:lnRef idx="1">
-            <a:schemeClr val="accent1"/>
-          </a:lnRef>
-          <a:fillRef idx="3">
-            <a:schemeClr val="accent1"/>
-          </a:fillRef>
-          <a:effectRef idx="2">
-            <a:schemeClr val="accent1"/>
-          </a:effectRef>
-          <a:fontRef idx="minor">
-            <a:schemeClr val="lt1"/>
-          </a:fontRef>
-        </p:style>
-        <p:txBody>
-          <a:bodyPr rtlCol="0" anchor="ctr"/>
-          <a:lstStyle/>
-          <a:p>
-            <a:pPr algn="ctr"/>
-          </a:p>
-        </p:txBody>
-      </p:sp>
-      <p:sp>
-        <p:nvSpPr>
-          <p:cNvPr id="13" name="Rectangle 12"/>
-          <p:cNvSpPr/>
-          <p:nvPr/>
-        </p:nvSpPr>
-        <p:spPr>
-          <a:xfrm>
-            <a:off x="731520" y="4754880"/>
-            <a:ext cx="73152" cy="1371600"/>
-          </a:xfrm>
-          <a:prstGeom prst="rect">
-            <a:avLst/>
-          </a:prstGeom>
-          <a:solidFill>
-            <a:srgbClr val="6B7B9E"/>
-          </a:solidFill>
-          <a:ln>
-            <a:noFill/>
-          </a:ln>
-        </p:spPr>
-        <p:style>
-          <a:lnRef idx="1">
-            <a:schemeClr val="accent1"/>
-          </a:lnRef>
-          <a:fillRef idx="3">
-            <a:schemeClr val="accent1"/>
-          </a:fillRef>
-          <a:effectRef idx="2">
-            <a:schemeClr val="accent1"/>
-          </a:effectRef>
-          <a:fontRef idx="minor">
-            <a:schemeClr val="lt1"/>
-          </a:fontRef>
-        </p:style>
-        <p:txBody>
-          <a:bodyPr rtlCol="0" anchor="ctr"/>
-          <a:lstStyle/>
-          <a:p>
-            <a:pPr algn="ctr"/>
-          </a:p>
-        </p:txBody>
-      </p:sp>
-      <p:sp>
-        <p:nvSpPr>
-          <p:cNvPr id="14" name="TextBox 13"/>
+              <a:t>模块14 · 工业化生产</a:t>
+            </a:r>
+          </a:p>
+        </p:txBody>
+      </p:sp>
+      <p:sp>
+        <p:nvSpPr>
+          <p:cNvPr id="16" name="TextBox 15"/>
           <p:cNvSpPr txBox="1"/>
           <p:nvPr/>
         </p:nvSpPr>
         <p:spPr>
           <a:xfrm>
-            <a:off x="1097280" y="4892040"/>
-            <a:ext cx="10058400" cy="1097280"/>
+            <a:off x="10515600" y="6492240"/>
+            <a:ext cx="1371600" cy="274320"/>
           </a:xfrm>
           <a:prstGeom prst="rect">
             <a:avLst/>
@@ -15711,125 +16227,10 @@
           </a:bodyPr>
           <a:lstStyle/>
           <a:p>
-            <a:pPr algn="l">
-              <a:defRPr sz="1400" b="0">
-                <a:solidFill>
-                  <a:srgbClr val="CBD5E8"/>
-                </a:solidFill>
-                <a:latin typeface="Microsoft YaHei"/>
-              </a:defRPr>
-            </a:pPr>
-            <a:r>
-              <a:t>成本主要集中在视频生成环节（占比60-70%），通过Draft模式、资产复用、精准提示词等策略可有效降低单集成本。多工具交叉验证（即梦+通义万相、可灵+Seedance）可提高抽卡成功率。</a:t>
-            </a:r>
-          </a:p>
-        </p:txBody>
-      </p:sp>
-      <p:sp>
-        <p:nvSpPr>
-          <p:cNvPr id="15" name="Rectangle 14"/>
-          <p:cNvSpPr/>
-          <p:nvPr/>
-        </p:nvSpPr>
-        <p:spPr>
-          <a:xfrm>
-            <a:off x="0" y="6446520"/>
-            <a:ext cx="12191695" cy="19050"/>
-          </a:xfrm>
-          <a:prstGeom prst="rect">
-            <a:avLst/>
-          </a:prstGeom>
-          <a:solidFill>
-            <a:srgbClr val="2D3B55"/>
-          </a:solidFill>
-          <a:ln>
-            <a:noFill/>
-          </a:ln>
-        </p:spPr>
-        <p:style>
-          <a:lnRef idx="1">
-            <a:schemeClr val="accent1"/>
-          </a:lnRef>
-          <a:fillRef idx="3">
-            <a:schemeClr val="accent1"/>
-          </a:fillRef>
-          <a:effectRef idx="2">
-            <a:schemeClr val="accent1"/>
-          </a:effectRef>
-          <a:fontRef idx="minor">
-            <a:schemeClr val="lt1"/>
-          </a:fontRef>
-        </p:style>
-        <p:txBody>
-          <a:bodyPr rtlCol="0" anchor="ctr"/>
-          <a:lstStyle/>
-          <a:p>
-            <a:pPr algn="ctr"/>
-          </a:p>
-        </p:txBody>
-      </p:sp>
-      <p:sp>
-        <p:nvSpPr>
-          <p:cNvPr id="16" name="TextBox 15"/>
-          <p:cNvSpPr txBox="1"/>
-          <p:nvPr/>
-        </p:nvSpPr>
-        <p:spPr>
-          <a:xfrm>
-            <a:off x="457200" y="6492240"/>
-            <a:ext cx="5486400" cy="274320"/>
-          </a:xfrm>
-          <a:prstGeom prst="rect">
-            <a:avLst/>
-          </a:prstGeom>
-          <a:noFill/>
-        </p:spPr>
-        <p:txBody>
-          <a:bodyPr wrap="square">
-            <a:spAutoFit/>
-          </a:bodyPr>
-          <a:lstStyle/>
-          <a:p>
-            <a:pPr algn="l">
-              <a:defRPr sz="900" b="0">
-                <a:solidFill>
-                  <a:srgbClr val="6B7B9E"/>
-                </a:solidFill>
-                <a:latin typeface="Microsoft YaHei"/>
-              </a:defRPr>
-            </a:pPr>
-            <a:r>
-              <a:t>模块14：工业化生产</a:t>
-            </a:r>
-          </a:p>
-        </p:txBody>
-      </p:sp>
-      <p:sp>
-        <p:nvSpPr>
-          <p:cNvPr id="17" name="TextBox 16"/>
-          <p:cNvSpPr txBox="1"/>
-          <p:nvPr/>
-        </p:nvSpPr>
-        <p:spPr>
-          <a:xfrm>
-            <a:off x="10515600" y="6492240"/>
-            <a:ext cx="1371600" cy="274320"/>
-          </a:xfrm>
-          <a:prstGeom prst="rect">
-            <a:avLst/>
-          </a:prstGeom>
-          <a:noFill/>
-        </p:spPr>
-        <p:txBody>
-          <a:bodyPr wrap="square">
-            <a:spAutoFit/>
-          </a:bodyPr>
-          <a:lstStyle/>
-          <a:p>
             <a:pPr algn="r">
               <a:defRPr sz="900" b="0">
                 <a:solidFill>
-                  <a:srgbClr val="6B7B9E"/>
+                  <a:srgbClr val="607090"/>
                 </a:solidFill>
                 <a:latin typeface="Microsoft YaHei"/>
               </a:defRPr>

--- a/AI漫剧制作课程/PPT课件/模块14-工业化生产.pptx
+++ b/AI漫剧制作课程/PPT课件/模块14-工业化生产.pptx
@@ -12222,7 +12222,7 @@
               </a:defRPr>
             </a:pPr>
             <a:r>
-              <a:t>🛠️  本模块实操任务</a:t>
+              <a:t>◆  本模块实操任务</a:t>
             </a:r>
           </a:p>
         </p:txBody>
@@ -15989,7 +15989,7 @@
               </a:defRPr>
             </a:pPr>
             <a:r>
-              <a:t>✓</a:t>
+              <a:t>◆</a:t>
             </a:r>
           </a:p>
         </p:txBody>
@@ -18106,7 +18106,7 @@
               </a:defRPr>
             </a:pPr>
             <a:r>
-              <a:t>📋  本节内容</a:t>
+              <a:t>§  本节内容</a:t>
             </a:r>
           </a:p>
         </p:txBody>
@@ -21008,7 +21008,7 @@
               </a:defRPr>
             </a:pPr>
             <a:r>
-              <a:t>⏱️  ⏱️ AI漫剧工业化流水线</a:t>
+              <a:t>§️  §️ AI漫剧工业化流水线</a:t>
             </a:r>
           </a:p>
         </p:txBody>
